--- a/theorie/lektion11/Lektion11_Besondere_Situationen.pptx
+++ b/theorie/lektion11/Lektion11_Besondere_Situationen.pptx
@@ -534,7 +534,8 @@
           <a:p>
             <a:r>
               <a:rPr lang="en-US" dirty="0"/>
-              <a:t>▶ Begrüßen. Heute geht es um drei Situationen, in denen Sekunden zählen: nachts und bei Nebel, wenn Blaulicht kommt, und im Tunnel.
+              <a:t>⏱ 0. Minute
+▶ Begrüßen. Heute geht es um drei Situationen, in denen Sekunden zählen: nachts und bei Nebel, wenn Blaulicht kommt, und im Tunnel.
 🖱 Alles baut sich von selbst auf.</a:t>
             </a:r>
             <a:endParaRPr lang="en-US" dirty="0"/>
@@ -721,7 +722,8 @@
 50 km/h: 15 + 25 = 40 m. Passt.
 80 km/h: 24 + 64 = 88 m. Deutlich zu lang.
 100 km/h: 30 + 100 = 130 m. Mehr als doppelt so weit wie dein Licht.
-🖱 Klick 4: Merksatz.</a:t>
+🖱 Klick 4: Die rote Linie: Dunkel gekleidete Menschen siehst du erst bei 25 m. Selbst bei 50 km/h (40 m) wird es dann knapp. Zurück zu Folie 2!
+🖱 Klick 5: Merksatz.</a:t>
             </a:r>
             <a:endParaRPr lang="en-US" dirty="0"/>
           </a:p>
@@ -810,7 +812,7 @@
             <a:r>
               <a:rPr lang="en-US" dirty="0"/>
               <a:t>▶ Klare Nacht. Vor dir ein Auto, rechts und links die Leitpfosten.
-🖱 Klick 1: Nebel zieht auf. Behindert er die Sicht erheblich: Abblendlicht, auch am Tag. Dann sind auch Nebelscheinwerfer erlaubt (§ 17 Abs. 3 StVO).
+🖱 Klick 1: Nebel zieht auf. Behindert er die Sicht erheblich: Abblendlicht, auch am Tag. Dann sind auch Nebelscheinwerfer erlaubt (§ 17 Abs. 3 StVO). Kein Fernlicht: Der Nebel wirft das Licht zurück und blendet dich selbst.
 🖱 Klick 2: Dichter Nebel. Das Auto vor dir ist weg. Sicht unter 50 m: höchstens 50 km/h (§ 3 Abs. 1 StVO, gilt auch bei Schnee und Regen). Nur bei Nebel darf jetzt die Nebelschlussleuchte an.
 🖱 Klick 3: Trick: Leitpfosten stehen auf gerader Strecke alle 50 m (in Kurven dichter). Siehst du nur noch den nächsten, hast du etwa 50 m Sicht.
 Wichtig: Nebelschlussleuchte wieder aus, wenn die Sicht besser wird. Sie blendet den Hintermann.</a:t>
@@ -904,6 +906,7 @@
               <a:t>▶ Eine Zahl für alles: 50.
 🖱 3 Klicks: Sicht unter 50 Meter. Dann höchstens 50 km/h (auch bei Schnee oder Regen). Und erst dann darf die Nebelschlussleuchte an, aber nur bei Nebel, nicht bei Regen oder Schnee.
 ❓ Frage: Gilt das auch auf der Autobahn? ✅ Ja, überall.
+❓ Frage: Reicht 50 km/h bei 50 m Sicht? ✅ Knapp: 40 m Anhalteweg auf trockener Straße. Im Nebel ist die Straße meist nass, also langsamer.
 🖱 Klick 4: Merksatz.</a:t>
             </a:r>
             <a:endParaRPr lang="en-US" dirty="0"/>
@@ -996,7 +999,8 @@
 ❓ Frage: Ein Reh steht im Licht. Was tust du?
 🖱 3 Klicks: Abblenden (Fernlicht macht Tiere orientierungslos). Bremsen. Hupen.
 🖱 Klick 4: Stempel. Nicht ausweichen! Wer ausweicht, landet oft am Baum oder im Gegenverkehr. Lenkrad festhalten.
-🖱 Klick 5: Wild kommt selten allein. Mit Nachzüglern rechnen.</a:t>
+🖱 Klick 5: Wild kommt selten allein. Mit Nachzüglern rechnen.
+🖱 Klick 6: Gekracht? Warnblinker, Unfallstelle sichern, Polizei 110 rufen. Tier nicht anfassen. Wildunfallbescheinigung für die Versicherung holen. Tier nie mitnehmen, das ist Wilderei.</a:t>
             </a:r>
             <a:endParaRPr lang="en-US" dirty="0"/>
           </a:p>
@@ -1173,7 +1177,8 @@
           <a:p>
             <a:r>
               <a:rPr lang="en-US" dirty="0"/>
-              <a:t>▶ Kapitel 2. Stell dir vor, im Rückspiegel blinkt es blau und du hörst das Horn.
+              <a:t>⏱ ca. 35. Minute
+▶ Kapitel 2. Stell dir vor, im Rückspiegel blinkt es blau und du hörst das Horn.
 ❓ Frage: Was ist euer erster Gedanke? Viele sagen: Panik. Genau das wollen wir heute abstellen.</a:t>
             </a:r>
             <a:endParaRPr lang="en-US" dirty="0"/>
@@ -1537,7 +1542,8 @@
           <a:p>
             <a:r>
               <a:rPr lang="en-US" dirty="0"/>
-              <a:t>▶ Licht aus im Raum, wenn möglich. Situation schildern: Landstraße, 22 Uhr, du fährst 80 km/h mit Abblendlicht.
+              <a:t>⏱ ca. 2. Minute
+▶ Licht aus im Raum, wenn möglich. Situation schildern: Landstraße, 22 Uhr, du fährst 80 km/h mit Abblendlicht.
 ❓ Frage: Seht ihr etwas auf der Straße?
 🖱 Klick 1: Ein Fußgänger in dunkler Kleidung taucht auf. Viele sehen ihn erst jetzt.
 🖱 Klick 2: Die Entfernung: 25 Meter.
@@ -1632,7 +1638,8 @@
               <a:t>▶ Stau auf der Autobahn, drei Fahrstreifen. Noch ist kein Blaulicht zu sehen.
 ❓ Frage: Wann bildest du die Rettungsgasse? Erst wenn du das Horn hörst?
 🖱 Klick: ✅ Nein! Sobald der Verkehr nur noch Schritttempo fährt oder steht (§ 11 Abs. 2 StVO). Gilt auf Autobahnen und auf Außerortsstraßen mit mindestens zwei Fahrstreifen pro Richtung.
-➜ Weiter: Und wohin fährst du?</a:t>
+❓ Frage vor dem Weiterklicken: Du bist ganz links, ich bin in der Mitte, er ist rechts. Wer fährt wohin? Mit den Händen zeigen lassen.
+➜ Weiterklicken: Die Autos weichen aus.</a:t>
             </a:r>
             <a:endParaRPr lang="en-US" dirty="0"/>
           </a:p>
@@ -1721,8 +1728,10 @@
             <a:r>
               <a:rPr lang="en-US" dirty="0"/>
               <a:t>▶ Die Autos weichen aus. Regel: Wer ganz links fährt, fährt nach links. Alle anderen fahren nach rechts. Die Gasse ist also zwischen der linken Spur und der daneben.
-❓ Frage: Wo ist die Gasse bei zwei Spuren? ✅ Genau in der Mitte.
-🖱 Klick: Der Rettungswagen fährt durch.
+❓ Frage: Wo ist die Gasse bei zwei Spuren? Erst raten lassen.
+🖱 Klick 1: Die Regel erscheint.
+🖱 Klick 2: Der Rettungswagen fährt durch.
+🖱 Klick 3: Bei zwei Spuren liegt die Gasse genau in der Mitte.
 Tipp: Nicht in die Gasse nachrücken und nicht hinterherfahren.</a:t>
             </a:r>
             <a:endParaRPr lang="en-US" dirty="0"/>
@@ -1994,7 +2003,8 @@
           <a:p>
             <a:r>
               <a:rPr lang="en-US" dirty="0"/>
-              <a:t>▶ Kapitel 3. Der Tunnel ist eng, dunkel und man kann nicht einfach ausweichen. Deshalb gelten besondere Regeln.
+              <a:t>⏱ ca. 52. Minute
+▶ Kapitel 3. Der Tunnel ist eng, dunkel und man kann nicht einfach ausweichen. Deshalb gelten besondere Regeln.
 ❓ Frage: Wer fährt ungern durch Tunnel? Kurz Hände heben lassen.</a:t>
             </a:r>
             <a:endParaRPr lang="en-US" dirty="0"/>
@@ -2088,7 +2098,7 @@
 1. Abblendlicht an, auch wenn der Tunnel beleuchtet ist (Zeichen 327). Tagfahrlicht reicht nicht.
 2. Sonnenbrille ab. Die Augen brauchen Zeit, sich an das Dunkel zu gewöhnen.
 3. Radio an: Viele Tunnel senden Durchsagen über den Verkehrsfunk.
-4. Genug Abstand halten.
+4. Genug Abstand halten. Faustregel: halber Tacho in Metern, also bei 80 km/h 40 m.
 5. Wenden ist verboten (Zeichen 327). Nicht rückwärts fahren, nur im Notfall halten, am besten in der Pannenbucht.</a:t>
             </a:r>
             <a:endParaRPr lang="en-US" dirty="0"/>
@@ -2181,7 +2191,7 @@
 ❓ Frage: A, B oder C? Abstimmen lassen, Hände hoch.
 🖱 Klick 1: A ist falsch. Wenden ist im Tunnel verboten und blockiert die Feuerwehr.
 🖱 Klick 2: B ist falsch. Rauch ist die größte Gefahr, das Auto schützt dich nicht.
-🖱 Klick 3: C ist richtig. Warnblinker, rechts ran, Motor aus, Schlüssel stecken lassen (die Feuerwehr muss das Auto wegfahren können), Tür nicht abschließen. Dann zu Fuß zum nächsten Notausgang, weg vom Rauch. Notausgänge sind grün beleuchtet.</a:t>
+🖱 Klick 3: C ist richtig. Darunter erscheint, wie genau: Warnblinker, rechts ran, Motor aus, Schlüssel stecken lassen (die Feuerwehr muss das Auto wegfahren können), Tür nicht abschließen. Dann zu Fuß zum nächsten Notausgang, weg vom Rauch. Notausgänge sind grün beleuchtet.</a:t>
             </a:r>
             <a:endParaRPr lang="en-US" dirty="0"/>
           </a:p>
@@ -2269,11 +2279,10 @@
           <a:p>
             <a:r>
               <a:rPr lang="en-US" dirty="0"/>
-              <a:t>▶ Drei Notfälle im Tunnel im Überblick.
+              <a:t>▶ Zwei weitere Notfälle im Tunnel. Brand hatten wir gerade.
 ▶ Das sind Empfehlungen von ADAC und Autobahn GmbH.
-🖱 Klick 1: Stau: Warnblinker, mindestens 5 m Abstand zum Vordermann, Rettungsgasse, bei längerem Stillstand Motor aus.
-🖱 Klick 2: Panne: Warnblinker, möglichst in die Pannenbucht, Warnweste, Hilfe über die Notrufstation rufen.
-🖱 Klick 3: Brand: Motor aus, Schlüssel stecken lassen, Tür nicht abschließen, weg vom Rauch zum grünen Notausgang.</a:t>
+🖱 Klick 1: Stau: Warnblinker, mindestens 5 m Abstand zum Vordermann, bei längerem Stillstand Motor aus. Rettungsgasse gilt natürlich auch hier.
+🖱 Klick 2: Panne: Warnblinker, möglichst in die Pannenbucht, Warnweste, Hilfe über die Notrufstation rufen.</a:t>
             </a:r>
             <a:endParaRPr lang="en-US" dirty="0"/>
           </a:p>
@@ -2631,9 +2640,9 @@
           <a:p>
             <a:r>
               <a:rPr lang="en-US" dirty="0"/>
-              <a:t>▶ Drei Gruppen, drei Themen. Jede Gruppe bekommt ein Arbeitsblatt.
-🖱 Klick 1–3: Die drei Gruppen.
-🖱 Klick 4: 15 Minuten. Danach stellt jede Gruppe ihr Plakat in 1 Minute vor. Nur zwei Personen kommen nach vorne.</a:t>
+              <a:t>▶ Zur Lektion 11 gehört laut Rahmenplan noch mehr. Das machen wir in einer eigenen Einheit.
+🖱 Klick: Die Themen erscheinen: Verhalten nach einem Unfall, Bußgeld und Fahrverbot, Punkte in Flensburg, Entzug der Fahrerlaubnis, Versicherung und Regress, MPU.
+Probezeit und Seminare kommen gleich nach der Pause in Lektion 12.</a:t>
             </a:r>
             <a:endParaRPr lang="en-US" dirty="0"/>
           </a:p>
@@ -2721,8 +2730,10 @@
           <a:p>
             <a:r>
               <a:rPr lang="en-US" dirty="0"/>
-              <a:t>▶ Drei Sätze, die ihr mitnehmt. Gemeinsam laut vorlesen lassen.
-🖱 3 Klicks.</a:t>
+              <a:t>⏱ ca. 65. Minute (15 Min. Arbeit + 5 Min. Vorstellen)
+▶ Drei Gruppen, drei Themen. Jede Gruppe bekommt ein Arbeitsblatt.
+🖱 Klick 1–3: Die drei Gruppen.
+🖱 Klick 4: 15 Minuten. Danach stellt jede Gruppe ihr Plakat in 1 Minute vor. Nur zwei Personen kommen nach vorne.</a:t>
             </a:r>
             <a:endParaRPr lang="en-US" dirty="0"/>
           </a:p>
@@ -2810,9 +2821,9 @@
           <a:p>
             <a:r>
               <a:rPr lang="en-US" dirty="0"/>
-              <a:t>▶ Zur Lektion 11 gehört laut Rahmenplan noch mehr. Das machen wir in einer eigenen Einheit.
-🖱 Klick: Die Themen erscheinen: Verhalten nach einem Unfall, Bußgeld und Fahrverbot, Punkte in Flensburg, Entzug der Fahrerlaubnis, Versicherung und Regress, MPU.
-Probezeit und Seminare kennt ihr aus Lektion 12.</a:t>
+              <a:t>⏱ ca. 86. Minute
+▶ Drei Sätze, die ihr mitnehmt. Gemeinsam laut vorlesen lassen.
+🖱 3 Klicks.</a:t>
             </a:r>
             <a:endParaRPr lang="en-US" dirty="0"/>
           </a:p>
@@ -2900,7 +2911,9 @@
           <a:p>
             <a:r>
               <a:rPr lang="en-US" dirty="0"/>
-              <a:t>▶ Halbzeit. Pause. Danach geht es weiter mit Lektion 12.</a:t>
+              <a:t>⏱ ca. 90. Minute. Ende Lektion 11.
+▶ Pause! Die Frage für nach der Pause schon mal mitgeben. Nicht auflösen, sie wird in Lektion 12 aufgelöst.
+➜ Nach der Pause: weiter mit Lektion 12.</a:t>
             </a:r>
             <a:endParaRPr lang="en-US" dirty="0"/>
           </a:p>
@@ -3077,7 +3090,8 @@
           <a:p>
             <a:r>
               <a:rPr lang="en-US" dirty="0"/>
-              <a:t>▶ Kapitel 1. Erst die Lichter am Auto, dann Blendung, Nebel und Wild.</a:t>
+              <a:t>⏱ ca. 6. Minute
+▶ Kapitel 1. Erst die Lichter am Auto, dann Blendung, Nebel und Wild.</a:t>
             </a:r>
             <a:endParaRPr lang="en-US" dirty="0"/>
           </a:p>
@@ -3994,7 +4008,7 @@
             <a:r>
               <a:rPr lang="en-US" sz="2200" dirty="0">
                 <a:solidFill>
-                  <a:srgbClr val="A7B0BD"/>
+                  <a:srgbClr val="CDD3DC"/>
                 </a:solidFill>
                 <a:latin typeface="Calibri" pitchFamily="34" charset="0"/>
                 <a:ea typeface="Calibri" pitchFamily="34" charset="-122"/>
@@ -4656,7 +4670,7 @@
             <a:r>
               <a:rPr lang="en-US" sz="1800" dirty="0">
                 <a:solidFill>
-                  <a:srgbClr val="A7B0BD"/>
+                  <a:srgbClr val="CDD3DC"/>
                 </a:solidFill>
                 <a:latin typeface="Calibri" pitchFamily="34" charset="0"/>
                 <a:ea typeface="Calibri" pitchFamily="34" charset="-122"/>
@@ -4824,7 +4838,7 @@
             <a:r>
               <a:rPr lang="en-US" sz="1800" dirty="0">
                 <a:solidFill>
-                  <a:srgbClr val="A7B0BD"/>
+                  <a:srgbClr val="CDD3DC"/>
                 </a:solidFill>
                 <a:latin typeface="Calibri" pitchFamily="34" charset="0"/>
                 <a:ea typeface="Calibri" pitchFamily="34" charset="-122"/>
@@ -4992,7 +5006,7 @@
             <a:r>
               <a:rPr lang="en-US" sz="1800" dirty="0">
                 <a:solidFill>
-                  <a:srgbClr val="A7B0BD"/>
+                  <a:srgbClr val="CDD3DC"/>
                 </a:solidFill>
                 <a:latin typeface="Calibri" pitchFamily="34" charset="0"/>
                 <a:ea typeface="Calibri" pitchFamily="34" charset="-122"/>
@@ -5995,8 +6009,8 @@
         </p:nvSpPr>
         <p:spPr>
           <a:xfrm>
-            <a:off x="4242816" y="2057400"/>
-            <a:ext cx="2926080" cy="320040"/>
+            <a:off x="3968496" y="2011680"/>
+            <a:ext cx="3474720" cy="365760"/>
           </a:xfrm>
           <a:prstGeom prst="rect">
             <a:avLst/>
@@ -6012,7 +6026,7 @@
               <a:buNone/>
             </a:pPr>
             <a:r>
-              <a:rPr lang="en-US" sz="1500" b="1" dirty="0">
+              <a:rPr lang="en-US" sz="1800" b="1" dirty="0">
                 <a:solidFill>
                   <a:srgbClr val="FFE8B0"/>
                 </a:solidFill>
@@ -6022,7 +6036,7 @@
               </a:rPr>
               <a:t>Abblendlicht ≈ 50–60 m</a:t>
             </a:r>
-            <a:endParaRPr lang="en-US" sz="1500" dirty="0"/>
+            <a:endParaRPr lang="en-US" sz="1800" dirty="0"/>
           </a:p>
         </p:txBody>
       </p:sp>
@@ -6388,6 +6402,68 @@
         </p:nvSpPr>
         <p:spPr>
           <a:xfrm>
+            <a:off x="3840480" y="2468880"/>
+            <a:ext cx="914" cy="2971800"/>
+          </a:xfrm>
+          <a:prstGeom prst="line">
+            <a:avLst/>
+          </a:prstGeom>
+          <a:noFill/>
+          <a:ln w="31750">
+            <a:solidFill>
+              <a:srgbClr val="FF4D4D"/>
+            </a:solidFill>
+            <a:prstDash val="sysDash"/>
+          </a:ln>
+        </p:spPr>
+      </p:sp>
+      <p:sp>
+        <p:nvSpPr>
+          <p:cNvPr id="24" name="e11_20"/>
+          <p:cNvSpPr txBox="1"/>
+          <p:nvPr/>
+        </p:nvSpPr>
+        <p:spPr>
+          <a:xfrm>
+            <a:off x="1188720" y="2011680"/>
+            <a:ext cx="2560320" cy="365760"/>
+          </a:xfrm>
+          <a:prstGeom prst="rect">
+            <a:avLst/>
+          </a:prstGeom>
+          <a:noFill/>
+          <a:ln/>
+        </p:spPr>
+        <p:txBody>
+          <a:bodyPr wrap="square" lIns="0" tIns="0" rIns="0" bIns="0" rtlCol="0" anchor="t"/>
+          <a:lstStyle/>
+          <a:p>
+            <a:pPr algn="r" indent="0" marL="0">
+              <a:buNone/>
+            </a:pPr>
+            <a:r>
+              <a:rPr lang="en-US" sz="1800" b="1" dirty="0">
+                <a:solidFill>
+                  <a:srgbClr val="FF4D4D"/>
+                </a:solidFill>
+                <a:latin typeface="Calibri" pitchFamily="34" charset="0"/>
+                <a:ea typeface="Calibri" pitchFamily="34" charset="-122"/>
+                <a:cs typeface="Calibri" pitchFamily="34" charset="-120"/>
+              </a:rPr>
+              <a:t>dunkel gekleidet: 25 m</a:t>
+            </a:r>
+            <a:endParaRPr lang="en-US" sz="1800" dirty="0"/>
+          </a:p>
+        </p:txBody>
+      </p:sp>
+      <p:sp>
+        <p:nvSpPr>
+          <p:cNvPr id="25" name="e11_21"/>
+          <p:cNvSpPr/>
+          <p:nvPr/>
+        </p:nvSpPr>
+        <p:spPr>
+          <a:xfrm>
             <a:off x="2286000" y="5596128"/>
             <a:ext cx="274320" cy="182880"/>
           </a:xfrm>
@@ -6402,14 +6478,14 @@
       </p:sp>
       <p:sp>
         <p:nvSpPr>
-          <p:cNvPr id="24" name="e11_20"/>
+          <p:cNvPr id="26" name="e11_22"/>
           <p:cNvSpPr txBox="1"/>
           <p:nvPr/>
         </p:nvSpPr>
         <p:spPr>
           <a:xfrm>
-            <a:off x="2651760" y="5532120"/>
-            <a:ext cx="1828800" cy="320040"/>
+            <a:off x="2651760" y="5513832"/>
+            <a:ext cx="1828800" cy="365760"/>
           </a:xfrm>
           <a:prstGeom prst="rect">
             <a:avLst/>
@@ -6425,9 +6501,9 @@
               <a:buNone/>
             </a:pPr>
             <a:r>
-              <a:rPr lang="en-US" sz="1400" dirty="0">
+              <a:rPr lang="en-US" sz="1600" dirty="0">
                 <a:solidFill>
-                  <a:srgbClr val="A7B0BD"/>
+                  <a:srgbClr val="CDD3DC"/>
                 </a:solidFill>
                 <a:latin typeface="Calibri" pitchFamily="34" charset="0"/>
                 <a:ea typeface="Calibri" pitchFamily="34" charset="-122"/>
@@ -6435,13 +6511,13 @@
               </a:rPr>
               <a:t>Reaktionsweg</a:t>
             </a:r>
-            <a:endParaRPr lang="en-US" sz="1400" dirty="0"/>
+            <a:endParaRPr lang="en-US" sz="1600" dirty="0"/>
           </a:p>
         </p:txBody>
       </p:sp>
       <p:sp>
         <p:nvSpPr>
-          <p:cNvPr id="25" name="e11_21"/>
+          <p:cNvPr id="27" name="e11_23"/>
           <p:cNvSpPr/>
           <p:nvPr/>
         </p:nvSpPr>
@@ -6461,7 +6537,7 @@
       </p:sp>
       <p:sp>
         <p:nvSpPr>
-          <p:cNvPr id="26" name="e11_22"/>
+          <p:cNvPr id="28" name="e11_24"/>
           <p:cNvSpPr/>
           <p:nvPr/>
         </p:nvSpPr>
@@ -6481,14 +6557,14 @@
       </p:sp>
       <p:sp>
         <p:nvSpPr>
-          <p:cNvPr id="27" name="e11_23"/>
+          <p:cNvPr id="29" name="e11_25"/>
           <p:cNvSpPr txBox="1"/>
           <p:nvPr/>
         </p:nvSpPr>
         <p:spPr>
           <a:xfrm>
-            <a:off x="5029200" y="5532120"/>
-            <a:ext cx="3657600" cy="320040"/>
+            <a:off x="5029200" y="5513832"/>
+            <a:ext cx="4572000" cy="365760"/>
           </a:xfrm>
           <a:prstGeom prst="rect">
             <a:avLst/>
@@ -6504,9 +6580,9 @@
               <a:buNone/>
             </a:pPr>
             <a:r>
-              <a:rPr lang="en-US" sz="1400" dirty="0">
+              <a:rPr lang="en-US" sz="1600" dirty="0">
                 <a:solidFill>
-                  <a:srgbClr val="A7B0BD"/>
+                  <a:srgbClr val="CDD3DC"/>
                 </a:solidFill>
                 <a:latin typeface="Calibri" pitchFamily="34" charset="0"/>
                 <a:ea typeface="Calibri" pitchFamily="34" charset="-122"/>
@@ -6514,13 +6590,13 @@
               </a:rPr>
               <a:t>Bremsweg (normal): passt / zu lang</a:t>
             </a:r>
-            <a:endParaRPr lang="en-US" sz="1400" dirty="0"/>
+            <a:endParaRPr lang="en-US" sz="1600" dirty="0"/>
           </a:p>
         </p:txBody>
       </p:sp>
       <p:sp>
         <p:nvSpPr>
-          <p:cNvPr id="28" name="e11_24"/>
+          <p:cNvPr id="30" name="e11_26"/>
           <p:cNvSpPr txBox="1"/>
           <p:nvPr/>
         </p:nvSpPr>
@@ -6565,7 +6641,7 @@
                 <a:ea typeface="Cambria" pitchFamily="34" charset="-122"/>
                 <a:cs typeface="Cambria" pitchFamily="34" charset="-120"/>
               </a:rPr>
-              <a:t>Tempo runter, bis du im Licht anhalten kannst.</a:t>
+              <a:t>So langsam, dass du im Licht anhalten kannst.</a:t>
             </a:r>
             <a:endParaRPr lang="en-US" sz="2400" dirty="0"/>
           </a:p>
@@ -7101,7 +7177,7 @@
                             </p:stCondLst>
                             <p:childTnLst>
                               <p:par>
-                                <p:cTn id="50" presetID="42" presetClass="entr" presetSubtype="0" fill="hold" grpId="0" nodeType="clickEffect">
+                                <p:cTn id="50" presetID="22" presetClass="entr" presetSubtype="1" fill="hold" grpId="0" nodeType="clickEffect">
                                   <p:stCondLst>
                                     <p:cond delay="0"/>
                                   </p:stCondLst>
@@ -7114,7 +7190,42 @@
                                           </p:stCondLst>
                                         </p:cTn>
                                         <p:tgtEl>
-                                          <p:spTgt spid="28"/>
+                                          <p:spTgt spid="23"/>
+                                        </p:tgtEl>
+                                        <p:attrNameLst>
+                                          <p:attrName>style.visibility</p:attrName>
+                                        </p:attrNameLst>
+                                      </p:cBhvr>
+                                      <p:to>
+                                        <p:strVal val="visible"/>
+                                      </p:to>
+                                    </p:set>
+                                    <p:animEffect transition="in" filter="wipe(up)">
+                                      <p:cBhvr>
+                                        <p:cTn id="52" dur="600"/>
+                                        <p:tgtEl>
+                                          <p:spTgt spid="23"/>
+                                        </p:tgtEl>
+                                      </p:cBhvr>
+                                    </p:animEffect>
+                                  </p:childTnLst>
+                                </p:cTn>
+                              </p:par>
+                              <p:par>
+                                <p:cTn id="53" presetID="10" presetClass="entr" presetSubtype="0" fill="hold" grpId="0" nodeType="withEffect">
+                                  <p:stCondLst>
+                                    <p:cond delay="0"/>
+                                  </p:stCondLst>
+                                  <p:childTnLst>
+                                    <p:set>
+                                      <p:cBhvr>
+                                        <p:cTn id="54" dur="1" fill="hold">
+                                          <p:stCondLst>
+                                            <p:cond delay="0"/>
+                                          </p:stCondLst>
+                                        </p:cTn>
+                                        <p:tgtEl>
+                                          <p:spTgt spid="24"/>
                                         </p:tgtEl>
                                         <p:attrNameLst>
                                           <p:attrName>style.visibility</p:attrName>
@@ -7126,17 +7237,70 @@
                                     </p:set>
                                     <p:animEffect transition="in" filter="fade">
                                       <p:cBhvr>
-                                        <p:cTn id="52" dur="800"/>
-                                        <p:tgtEl>
-                                          <p:spTgt spid="28"/>
+                                        <p:cTn id="55" dur="400"/>
+                                        <p:tgtEl>
+                                          <p:spTgt spid="24"/>
+                                        </p:tgtEl>
+                                      </p:cBhvr>
+                                    </p:animEffect>
+                                  </p:childTnLst>
+                                </p:cTn>
+                              </p:par>
+                            </p:childTnLst>
+                          </p:cTn>
+                        </p:par>
+                      </p:childTnLst>
+                    </p:cTn>
+                  </p:par>
+                  <p:par>
+                    <p:cTn id="56" fill="hold">
+                      <p:stCondLst>
+                        <p:cond delay="indefinite"/>
+                      </p:stCondLst>
+                      <p:childTnLst>
+                        <p:par>
+                          <p:cTn id="57" fill="hold">
+                            <p:stCondLst>
+                              <p:cond delay="0"/>
+                            </p:stCondLst>
+                            <p:childTnLst>
+                              <p:par>
+                                <p:cTn id="58" presetID="42" presetClass="entr" presetSubtype="0" fill="hold" grpId="0" nodeType="clickEffect">
+                                  <p:stCondLst>
+                                    <p:cond delay="0"/>
+                                  </p:stCondLst>
+                                  <p:childTnLst>
+                                    <p:set>
+                                      <p:cBhvr>
+                                        <p:cTn id="59" dur="1" fill="hold">
+                                          <p:stCondLst>
+                                            <p:cond delay="0"/>
+                                          </p:stCondLst>
+                                        </p:cTn>
+                                        <p:tgtEl>
+                                          <p:spTgt spid="30"/>
+                                        </p:tgtEl>
+                                        <p:attrNameLst>
+                                          <p:attrName>style.visibility</p:attrName>
+                                        </p:attrNameLst>
+                                      </p:cBhvr>
+                                      <p:to>
+                                        <p:strVal val="visible"/>
+                                      </p:to>
+                                    </p:set>
+                                    <p:animEffect transition="in" filter="fade">
+                                      <p:cBhvr>
+                                        <p:cTn id="60" dur="800"/>
+                                        <p:tgtEl>
+                                          <p:spTgt spid="30"/>
                                         </p:tgtEl>
                                       </p:cBhvr>
                                     </p:animEffect>
                                     <p:anim calcmode="lin" valueType="num">
                                       <p:cBhvr additive="base">
-                                        <p:cTn id="53" dur="800" fill="hold" decel="100000"/>
-                                        <p:tgtEl>
-                                          <p:spTgt spid="28"/>
+                                        <p:cTn id="61" dur="800" fill="hold" decel="100000"/>
+                                        <p:tgtEl>
+                                          <p:spTgt spid="30"/>
                                         </p:tgtEl>
                                         <p:attrNameLst>
                                           <p:attrName>ppt_x</p:attrName>
@@ -7157,9 +7321,9 @@
                                     </p:anim>
                                     <p:anim calcmode="lin" valueType="num">
                                       <p:cBhvr additive="base">
-                                        <p:cTn id="54" dur="800" fill="hold" decel="100000"/>
-                                        <p:tgtEl>
-                                          <p:spTgt spid="28"/>
+                                        <p:cTn id="62" dur="800" fill="hold" decel="100000"/>
+                                        <p:tgtEl>
+                                          <p:spTgt spid="30"/>
                                         </p:tgtEl>
                                         <p:attrNameLst>
                                           <p:attrName>ppt_y</p:attrName>
@@ -7221,7 +7385,9 @@
       <p:bldP spid="20" grpId="0" animBg="1"/>
       <p:bldP spid="21" grpId="0" animBg="1"/>
       <p:bldP spid="22" grpId="0" animBg="1"/>
-      <p:bldP spid="28" grpId="0" animBg="1"/>
+      <p:bldP spid="23" grpId="0" animBg="1"/>
+      <p:bldP spid="24" grpId="0" animBg="1"/>
+      <p:bldP spid="30" grpId="0" animBg="1"/>
     </p:bldLst>
   </p:timing>
 </p:sld>
@@ -7450,7 +7616,7 @@
                 <a:ea typeface="Calibri" pitchFamily="34" charset="-122"/>
                 <a:cs typeface="Calibri" pitchFamily="34" charset="-120"/>
               </a:rPr>
-              <a:t>NEBEL-REGLER</a:t>
+              <a:t>NEBEL</a:t>
             </a:r>
             <a:endParaRPr lang="en-US" sz="1300" dirty="0"/>
           </a:p>
@@ -7521,7 +7687,7 @@
           </a:solidFill>
           <a:ln w="19050">
             <a:solidFill>
-              <a:srgbClr val="A7B0BD"/>
+              <a:srgbClr val="CDD3DC"/>
             </a:solidFill>
             <a:prstDash val="solid"/>
           </a:ln>
@@ -7554,7 +7720,7 @@
             <a:r>
               <a:rPr lang="en-US" sz="1700" b="1" dirty="0">
                 <a:solidFill>
-                  <a:srgbClr val="A7B0BD"/>
+                  <a:srgbClr val="CDD3DC"/>
                 </a:solidFill>
                 <a:latin typeface="Calibri" pitchFamily="34" charset="0"/>
                 <a:ea typeface="Calibri" pitchFamily="34" charset="-122"/>
@@ -7574,8 +7740,8 @@
         </p:nvSpPr>
         <p:spPr>
           <a:xfrm>
-            <a:off x="731520" y="5852160"/>
-            <a:ext cx="3108960" cy="502920"/>
+            <a:off x="731520" y="5833872"/>
+            <a:ext cx="3200400" cy="548640"/>
           </a:xfrm>
           <a:prstGeom prst="rect">
             <a:avLst/>
@@ -7591,7 +7757,7 @@
               <a:buNone/>
             </a:pPr>
             <a:r>
-              <a:rPr lang="en-US" sz="1400" dirty="0">
+              <a:rPr lang="en-US" sz="1600" dirty="0">
                 <a:solidFill>
                   <a:srgbClr val="F5F2EC"/>
                 </a:solidFill>
@@ -7601,7 +7767,7 @@
               </a:rPr>
               <a:t>Abblendlicht, Fernlicht wenn frei</a:t>
             </a:r>
-            <a:endParaRPr lang="en-US" sz="1400" dirty="0"/>
+            <a:endParaRPr lang="en-US" sz="1600" dirty="0"/>
           </a:p>
         </p:txBody>
       </p:sp>
@@ -7681,8 +7847,8 @@
         </p:nvSpPr>
         <p:spPr>
           <a:xfrm>
-            <a:off x="4544568" y="5852160"/>
-            <a:ext cx="3108960" cy="502920"/>
+            <a:off x="4544568" y="5833872"/>
+            <a:ext cx="3200400" cy="548640"/>
           </a:xfrm>
           <a:prstGeom prst="rect">
             <a:avLst/>
@@ -7698,7 +7864,7 @@
               <a:buNone/>
             </a:pPr>
             <a:r>
-              <a:rPr lang="en-US" sz="1400" dirty="0">
+              <a:rPr lang="en-US" sz="1600" dirty="0">
                 <a:solidFill>
                   <a:srgbClr val="F5F2EC"/>
                 </a:solidFill>
@@ -7706,9 +7872,9 @@
                 <a:ea typeface="Calibri" pitchFamily="34" charset="-122"/>
                 <a:cs typeface="Calibri" pitchFamily="34" charset="-120"/>
               </a:rPr>
-              <a:t>Abblendlicht auch am Tag, Nebelscheinwerfer erlaubt</a:t>
+              <a:t>Abblendlicht, kein Fernlicht! Nebelscheinwerfer erlaubt</a:t>
             </a:r>
-            <a:endParaRPr lang="en-US" sz="1400" dirty="0"/>
+            <a:endParaRPr lang="en-US" sz="1600" dirty="0"/>
           </a:p>
         </p:txBody>
       </p:sp>
@@ -7788,8 +7954,8 @@
         </p:nvSpPr>
         <p:spPr>
           <a:xfrm>
-            <a:off x="8348472" y="5852160"/>
-            <a:ext cx="3108960" cy="502920"/>
+            <a:off x="8348472" y="5833872"/>
+            <a:ext cx="3200400" cy="548640"/>
           </a:xfrm>
           <a:prstGeom prst="rect">
             <a:avLst/>
@@ -7805,7 +7971,7 @@
               <a:buNone/>
             </a:pPr>
             <a:r>
-              <a:rPr lang="en-US" sz="1400" dirty="0">
+              <a:rPr lang="en-US" sz="1600" dirty="0">
                 <a:solidFill>
                   <a:srgbClr val="F5F2EC"/>
                 </a:solidFill>
@@ -7815,7 +7981,7 @@
               </a:rPr>
               <a:t>Max. 50 km/h + Nebelschlussleuchte</a:t>
             </a:r>
-            <a:endParaRPr lang="en-US" sz="1400" dirty="0"/>
+            <a:endParaRPr lang="en-US" sz="1600" dirty="0"/>
           </a:p>
         </p:txBody>
       </p:sp>
@@ -8651,8 +8817,8 @@
         </p:nvSpPr>
         <p:spPr>
           <a:xfrm>
-            <a:off x="1234440" y="2148840"/>
-            <a:ext cx="2468880" cy="457200"/>
+            <a:off x="1143000" y="2103120"/>
+            <a:ext cx="2651760" cy="457200"/>
           </a:xfrm>
           <a:prstGeom prst="rect">
             <a:avLst/>
@@ -8668,9 +8834,9 @@
               <a:buNone/>
             </a:pPr>
             <a:r>
-              <a:rPr lang="en-US" sz="1600" b="1" dirty="0">
+              <a:rPr lang="en-US" sz="1700" b="1" dirty="0">
                 <a:solidFill>
-                  <a:srgbClr val="A7B0BD"/>
+                  <a:srgbClr val="CDD3DC"/>
                 </a:solidFill>
                 <a:latin typeface="Calibri" pitchFamily="34" charset="0"/>
                 <a:ea typeface="Calibri" pitchFamily="34" charset="-122"/>
@@ -8678,7 +8844,7 @@
               </a:rPr>
               <a:t>Sicht unter</a:t>
             </a:r>
-            <a:endParaRPr lang="en-US" sz="1600" dirty="0"/>
+            <a:endParaRPr lang="en-US" sz="1700" dirty="0"/>
           </a:p>
         </p:txBody>
       </p:sp>
@@ -8768,8 +8934,8 @@
         </p:nvSpPr>
         <p:spPr>
           <a:xfrm>
-            <a:off x="4800600" y="2148840"/>
-            <a:ext cx="2468880" cy="457200"/>
+            <a:off x="4709160" y="2103120"/>
+            <a:ext cx="2651760" cy="457200"/>
           </a:xfrm>
           <a:prstGeom prst="rect">
             <a:avLst/>
@@ -8785,9 +8951,9 @@
               <a:buNone/>
             </a:pPr>
             <a:r>
-              <a:rPr lang="en-US" sz="1600" b="1" dirty="0">
+              <a:rPr lang="en-US" sz="1700" b="1" dirty="0">
                 <a:solidFill>
-                  <a:srgbClr val="A7B0BD"/>
+                  <a:srgbClr val="CDD3DC"/>
                 </a:solidFill>
                 <a:latin typeface="Calibri" pitchFamily="34" charset="0"/>
                 <a:ea typeface="Calibri" pitchFamily="34" charset="-122"/>
@@ -8795,7 +8961,7 @@
               </a:rPr>
               <a:t>höchstens</a:t>
             </a:r>
-            <a:endParaRPr lang="en-US" sz="1600" dirty="0"/>
+            <a:endParaRPr lang="en-US" sz="1700" dirty="0"/>
           </a:p>
         </p:txBody>
       </p:sp>
@@ -8885,8 +9051,8 @@
         </p:nvSpPr>
         <p:spPr>
           <a:xfrm>
-            <a:off x="8366760" y="2148840"/>
-            <a:ext cx="2468880" cy="457200"/>
+            <a:off x="8275320" y="2103120"/>
+            <a:ext cx="2651760" cy="457200"/>
           </a:xfrm>
           <a:prstGeom prst="rect">
             <a:avLst/>
@@ -8902,9 +9068,9 @@
               <a:buNone/>
             </a:pPr>
             <a:r>
-              <a:rPr lang="en-US" sz="1600" b="1" dirty="0">
+              <a:rPr lang="en-US" sz="1700" b="1" dirty="0">
                 <a:solidFill>
-                  <a:srgbClr val="A7B0BD"/>
+                  <a:srgbClr val="CDD3DC"/>
                 </a:solidFill>
                 <a:latin typeface="Calibri" pitchFamily="34" charset="0"/>
                 <a:ea typeface="Calibri" pitchFamily="34" charset="-122"/>
@@ -8912,7 +9078,7 @@
               </a:rPr>
               <a:t>Nebelschlussleuchte</a:t>
             </a:r>
-            <a:endParaRPr lang="en-US" sz="1600" dirty="0"/>
+            <a:endParaRPr lang="en-US" sz="1700" dirty="0"/>
           </a:p>
         </p:txBody>
       </p:sp>
@@ -8983,7 +9149,7 @@
               <a:buNone/>
             </a:pPr>
             <a:r>
-              <a:rPr lang="en-US" sz="3000" i="1" dirty="0">
+              <a:rPr lang="en-US" sz="2800" i="1" dirty="0">
                 <a:solidFill>
                   <a:srgbClr val="FF7A1A"/>
                 </a:solidFill>
@@ -8991,9 +9157,9 @@
                 <a:ea typeface="Cambria" pitchFamily="34" charset="-122"/>
                 <a:cs typeface="Cambria" pitchFamily="34" charset="-120"/>
               </a:rPr>
-              <a:t>Gilt überall. Nebelschlussleuchte nur bei Nebel.</a:t>
+              <a:t>Höchstens heißt: oft langsamer. Nebelschlussleuchte nur bei Nebel.</a:t>
             </a:r>
-            <a:endParaRPr lang="en-US" sz="3000" dirty="0"/>
+            <a:endParaRPr lang="en-US" sz="2800" dirty="0"/>
           </a:p>
         </p:txBody>
       </p:sp>
@@ -9759,7 +9925,7 @@
         </p:blipFill>
         <p:spPr>
           <a:xfrm>
-            <a:off x="822960" y="1280160"/>
+            <a:off x="822960" y="1097280"/>
             <a:ext cx="3291840" cy="2855671"/>
           </a:xfrm>
           <a:prstGeom prst="rect">
@@ -10090,7 +10256,7 @@
         </p:nvSpPr>
         <p:spPr>
           <a:xfrm rot="-180000">
-            <a:off x="914400" y="4983480"/>
+            <a:off x="914400" y="4754880"/>
             <a:ext cx="4754880" cy="868680"/>
           </a:xfrm>
           <a:prstGeom prst="roundRect">
@@ -10140,7 +10306,7 @@
         </p:nvSpPr>
         <p:spPr>
           <a:xfrm>
-            <a:off x="6126480" y="4983480"/>
+            <a:off x="6126480" y="4754880"/>
             <a:ext cx="5303520" cy="914400"/>
           </a:xfrm>
           <a:prstGeom prst="rect">
@@ -10188,6 +10354,59 @@
           </a:p>
         </p:txBody>
       </p:sp>
+      <p:sp>
+        <p:nvSpPr>
+          <p:cNvPr id="16" name="e14_12"/>
+          <p:cNvSpPr txBox="1"/>
+          <p:nvPr/>
+        </p:nvSpPr>
+        <p:spPr>
+          <a:xfrm>
+            <a:off x="914400" y="5989320"/>
+            <a:ext cx="10515600" cy="457200"/>
+          </a:xfrm>
+          <a:prstGeom prst="rect">
+            <a:avLst/>
+          </a:prstGeom>
+          <a:noFill/>
+          <a:ln/>
+        </p:spPr>
+        <p:txBody>
+          <a:bodyPr wrap="square" lIns="0" tIns="0" rIns="0" bIns="0" rtlCol="0" anchor="t"/>
+          <a:lstStyle/>
+          <a:p>
+            <a:pPr algn="l" indent="0" marL="0">
+              <a:buNone/>
+            </a:pPr>
+            <a:r>
+              <a:rPr lang="en-US" sz="2000" b="1" dirty="0">
+                <a:solidFill>
+                  <a:srgbClr val="FF4D4D"/>
+                </a:solidFill>
+                <a:latin typeface="Calibri" pitchFamily="34" charset="0"/>
+                <a:ea typeface="Calibri" pitchFamily="34" charset="-122"/>
+                <a:cs typeface="Calibri" pitchFamily="34" charset="-120"/>
+              </a:rPr>
+              <a:t>Gekracht? </a:t>
+            </a:r>
+            <a:pPr algn="l" indent="0" marL="0">
+              <a:buNone/>
+            </a:pPr>
+            <a:r>
+              <a:rPr lang="en-US" sz="2000" b="1" dirty="0">
+                <a:solidFill>
+                  <a:srgbClr val="F5F2EC"/>
+                </a:solidFill>
+                <a:latin typeface="Calibri" pitchFamily="34" charset="0"/>
+                <a:ea typeface="Calibri" pitchFamily="34" charset="-122"/>
+                <a:cs typeface="Calibri" pitchFamily="34" charset="-120"/>
+              </a:rPr>
+              <a:t>Warnblinker, absichern, Polizei 110. Tier nicht anfassen.</a:t>
+            </a:r>
+            <a:endParaRPr lang="en-US" sz="2000" dirty="0"/>
+          </a:p>
+        </p:txBody>
+      </p:sp>
     </p:spTree>
   </p:cSld>
   <p:clrMapOvr>
@@ -10969,6 +11188,105 @@
                                         <p:cTn id="53" dur="800" fill="hold" decel="100000"/>
                                         <p:tgtEl>
                                           <p:spTgt spid="15"/>
+                                        </p:tgtEl>
+                                        <p:attrNameLst>
+                                          <p:attrName>ppt_y</p:attrName>
+                                        </p:attrNameLst>
+                                      </p:cBhvr>
+                                      <p:tavLst>
+                                        <p:tav tm="0">
+                                          <p:val>
+                                            <p:strVal val="#ppt_y+.18"/>
+                                          </p:val>
+                                        </p:tav>
+                                        <p:tav tm="100000">
+                                          <p:val>
+                                            <p:strVal val="#ppt_y"/>
+                                          </p:val>
+                                        </p:tav>
+                                      </p:tavLst>
+                                    </p:anim>
+                                  </p:childTnLst>
+                                </p:cTn>
+                              </p:par>
+                            </p:childTnLst>
+                          </p:cTn>
+                        </p:par>
+                      </p:childTnLst>
+                    </p:cTn>
+                  </p:par>
+                  <p:par>
+                    <p:cTn id="54" fill="hold">
+                      <p:stCondLst>
+                        <p:cond delay="indefinite"/>
+                      </p:stCondLst>
+                      <p:childTnLst>
+                        <p:par>
+                          <p:cTn id="55" fill="hold">
+                            <p:stCondLst>
+                              <p:cond delay="0"/>
+                            </p:stCondLst>
+                            <p:childTnLst>
+                              <p:par>
+                                <p:cTn id="56" presetID="42" presetClass="entr" presetSubtype="0" fill="hold" grpId="0" nodeType="clickEffect">
+                                  <p:stCondLst>
+                                    <p:cond delay="0"/>
+                                  </p:stCondLst>
+                                  <p:childTnLst>
+                                    <p:set>
+                                      <p:cBhvr>
+                                        <p:cTn id="57" dur="1" fill="hold">
+                                          <p:stCondLst>
+                                            <p:cond delay="0"/>
+                                          </p:stCondLst>
+                                        </p:cTn>
+                                        <p:tgtEl>
+                                          <p:spTgt spid="16"/>
+                                        </p:tgtEl>
+                                        <p:attrNameLst>
+                                          <p:attrName>style.visibility</p:attrName>
+                                        </p:attrNameLst>
+                                      </p:cBhvr>
+                                      <p:to>
+                                        <p:strVal val="visible"/>
+                                      </p:to>
+                                    </p:set>
+                                    <p:animEffect transition="in" filter="fade">
+                                      <p:cBhvr>
+                                        <p:cTn id="58" dur="800"/>
+                                        <p:tgtEl>
+                                          <p:spTgt spid="16"/>
+                                        </p:tgtEl>
+                                      </p:cBhvr>
+                                    </p:animEffect>
+                                    <p:anim calcmode="lin" valueType="num">
+                                      <p:cBhvr additive="base">
+                                        <p:cTn id="59" dur="800" fill="hold" decel="100000"/>
+                                        <p:tgtEl>
+                                          <p:spTgt spid="16"/>
+                                        </p:tgtEl>
+                                        <p:attrNameLst>
+                                          <p:attrName>ppt_x</p:attrName>
+                                        </p:attrNameLst>
+                                      </p:cBhvr>
+                                      <p:tavLst>
+                                        <p:tav tm="0">
+                                          <p:val>
+                                            <p:strVal val="#ppt_x"/>
+                                          </p:val>
+                                        </p:tav>
+                                        <p:tav tm="100000">
+                                          <p:val>
+                                            <p:strVal val="#ppt_x"/>
+                                          </p:val>
+                                        </p:tav>
+                                      </p:tavLst>
+                                    </p:anim>
+                                    <p:anim calcmode="lin" valueType="num">
+                                      <p:cBhvr additive="base">
+                                        <p:cTn id="60" dur="800" fill="hold" decel="100000"/>
+                                        <p:tgtEl>
+                                          <p:spTgt spid="16"/>
                                         </p:tgtEl>
                                         <p:attrNameLst>
                                           <p:attrName>ppt_y</p:attrName>
@@ -11026,6 +11344,7 @@
       <p:bldP spid="13" grpId="0" animBg="1"/>
       <p:bldP spid="14" grpId="0" animBg="1"/>
       <p:bldP spid="15" grpId="0" animBg="1"/>
+      <p:bldP spid="16" grpId="0" animBg="1"/>
     </p:bldLst>
   </p:timing>
 </p:sld>
@@ -12491,7 +12810,7 @@
             <a:r>
               <a:rPr lang="en-US" sz="2400" dirty="0">
                 <a:solidFill>
-                  <a:srgbClr val="A7B0BD"/>
+                  <a:srgbClr val="CDD3DC"/>
                 </a:solidFill>
                 <a:latin typeface="Calibri" pitchFamily="34" charset="0"/>
                 <a:ea typeface="Calibri" pitchFamily="34" charset="-122"/>
@@ -13112,7 +13431,7 @@
             <a:r>
               <a:rPr lang="en-US" sz="1700" dirty="0">
                 <a:solidFill>
-                  <a:srgbClr val="A7B0BD"/>
+                  <a:srgbClr val="CDD3DC"/>
                 </a:solidFill>
                 <a:latin typeface="Calibri" pitchFamily="34" charset="0"/>
                 <a:ea typeface="Calibri" pitchFamily="34" charset="-122"/>
@@ -13284,7 +13603,7 @@
             <a:r>
               <a:rPr lang="en-US" sz="1700" dirty="0">
                 <a:solidFill>
-                  <a:srgbClr val="A7B0BD"/>
+                  <a:srgbClr val="CDD3DC"/>
                 </a:solidFill>
                 <a:latin typeface="Calibri" pitchFamily="34" charset="0"/>
                 <a:ea typeface="Calibri" pitchFamily="34" charset="-122"/>
@@ -13456,7 +13775,7 @@
             <a:r>
               <a:rPr lang="en-US" sz="1700" dirty="0">
                 <a:solidFill>
-                  <a:srgbClr val="A7B0BD"/>
+                  <a:srgbClr val="CDD3DC"/>
                 </a:solidFill>
                 <a:latin typeface="Calibri" pitchFamily="34" charset="0"/>
                 <a:ea typeface="Calibri" pitchFamily="34" charset="-122"/>
@@ -14744,8 +15063,8 @@
         </p:nvSpPr>
         <p:spPr>
           <a:xfrm>
-            <a:off x="4297680" y="2633472"/>
-            <a:ext cx="1417320" cy="457200"/>
+            <a:off x="4114800" y="2615184"/>
+            <a:ext cx="1600200" cy="457200"/>
           </a:xfrm>
           <a:prstGeom prst="rect">
             <a:avLst/>
@@ -14761,9 +15080,9 @@
               <a:buNone/>
             </a:pPr>
             <a:r>
-              <a:rPr lang="en-US" sz="1500" b="1" dirty="0">
+              <a:rPr lang="en-US" sz="1700" b="1" dirty="0">
                 <a:solidFill>
-                  <a:srgbClr val="A7B0BD"/>
+                  <a:srgbClr val="CDD3DC"/>
                 </a:solidFill>
                 <a:latin typeface="Calibri" pitchFamily="34" charset="0"/>
                 <a:ea typeface="Calibri" pitchFamily="34" charset="-122"/>
@@ -14771,7 +15090,7 @@
               </a:rPr>
               <a:t>§ 35 StVO</a:t>
             </a:r>
-            <a:endParaRPr lang="en-US" sz="1500" dirty="0"/>
+            <a:endParaRPr lang="en-US" sz="1700" dirty="0"/>
           </a:p>
         </p:txBody>
       </p:sp>
@@ -14841,7 +15160,7 @@
             <a:r>
               <a:rPr lang="en-US" sz="1700" dirty="0">
                 <a:solidFill>
-                  <a:srgbClr val="A7B0BD"/>
+                  <a:srgbClr val="CDD3DC"/>
                 </a:solidFill>
                 <a:latin typeface="Calibri" pitchFamily="34" charset="0"/>
                 <a:ea typeface="Calibri" pitchFamily="34" charset="-122"/>
@@ -14927,8 +15246,8 @@
         </p:nvSpPr>
         <p:spPr>
           <a:xfrm>
-            <a:off x="9784080" y="2633472"/>
-            <a:ext cx="1417320" cy="457200"/>
+            <a:off x="9601200" y="2615184"/>
+            <a:ext cx="1600200" cy="457200"/>
           </a:xfrm>
           <a:prstGeom prst="rect">
             <a:avLst/>
@@ -14944,9 +15263,9 @@
               <a:buNone/>
             </a:pPr>
             <a:r>
-              <a:rPr lang="en-US" sz="1500" b="1" dirty="0">
+              <a:rPr lang="en-US" sz="1700" b="1" dirty="0">
                 <a:solidFill>
-                  <a:srgbClr val="A7B0BD"/>
+                  <a:srgbClr val="CDD3DC"/>
                 </a:solidFill>
                 <a:latin typeface="Calibri" pitchFamily="34" charset="0"/>
                 <a:ea typeface="Calibri" pitchFamily="34" charset="-122"/>
@@ -14954,7 +15273,7 @@
               </a:rPr>
               <a:t>§ 38 StVO</a:t>
             </a:r>
-            <a:endParaRPr lang="en-US" sz="1500" dirty="0"/>
+            <a:endParaRPr lang="en-US" sz="1700" dirty="0"/>
           </a:p>
         </p:txBody>
       </p:sp>
@@ -15024,7 +15343,7 @@
             <a:r>
               <a:rPr lang="en-US" sz="1700" dirty="0">
                 <a:solidFill>
-                  <a:srgbClr val="A7B0BD"/>
+                  <a:srgbClr val="CDD3DC"/>
                 </a:solidFill>
                 <a:latin typeface="Calibri" pitchFamily="34" charset="0"/>
                 <a:ea typeface="Calibri" pitchFamily="34" charset="-122"/>
@@ -15104,7 +15423,7 @@
             <a:r>
               <a:rPr lang="en-US" sz="2000" dirty="0">
                 <a:solidFill>
-                  <a:srgbClr val="A7B0BD"/>
+                  <a:srgbClr val="CDD3DC"/>
                 </a:solidFill>
                 <a:latin typeface="Calibri" pitchFamily="34" charset="0"/>
                 <a:ea typeface="Calibri" pitchFamily="34" charset="-122"/>
@@ -16072,7 +16391,7 @@
             <a:r>
               <a:rPr lang="en-US" sz="1700" dirty="0">
                 <a:solidFill>
-                  <a:srgbClr val="A7B0BD"/>
+                  <a:srgbClr val="CDD3DC"/>
                 </a:solidFill>
                 <a:latin typeface="Calibri" pitchFamily="34" charset="0"/>
                 <a:ea typeface="Calibri" pitchFamily="34" charset="-122"/>
@@ -16221,7 +16540,7 @@
             <a:r>
               <a:rPr lang="en-US" sz="1700" dirty="0">
                 <a:solidFill>
-                  <a:srgbClr val="A7B0BD"/>
+                  <a:srgbClr val="CDD3DC"/>
                 </a:solidFill>
                 <a:latin typeface="Calibri" pitchFamily="34" charset="0"/>
                 <a:ea typeface="Calibri" pitchFamily="34" charset="-122"/>
@@ -16370,7 +16689,7 @@
             <a:r>
               <a:rPr lang="en-US" sz="1700" dirty="0">
                 <a:solidFill>
-                  <a:srgbClr val="A7B0BD"/>
+                  <a:srgbClr val="CDD3DC"/>
                 </a:solidFill>
                 <a:latin typeface="Calibri" pitchFamily="34" charset="0"/>
                 <a:ea typeface="Calibri" pitchFamily="34" charset="-122"/>
@@ -16519,7 +16838,7 @@
             <a:r>
               <a:rPr lang="en-US" sz="1700" dirty="0">
                 <a:solidFill>
-                  <a:srgbClr val="A7B0BD"/>
+                  <a:srgbClr val="CDD3DC"/>
                 </a:solidFill>
                 <a:latin typeface="Calibri" pitchFamily="34" charset="0"/>
                 <a:ea typeface="Calibri" pitchFamily="34" charset="-122"/>
@@ -19177,7 +19496,7 @@
             <a:r>
               <a:rPr lang="en-US" sz="1900" dirty="0">
                 <a:solidFill>
-                  <a:srgbClr val="A7B0BD"/>
+                  <a:srgbClr val="CDD3DC"/>
                 </a:solidFill>
                 <a:latin typeface="Calibri" pitchFamily="34" charset="0"/>
                 <a:ea typeface="Calibri" pitchFamily="34" charset="-122"/>
@@ -19188,6 +19507,244 @@
             <a:endParaRPr lang="en-US" sz="1900" dirty="0"/>
           </a:p>
         </p:txBody>
+      </p:sp>
+      <p:sp>
+        <p:nvSpPr>
+          <p:cNvPr id="21" name="e21_8"/>
+          <p:cNvSpPr txBox="1"/>
+          <p:nvPr/>
+        </p:nvSpPr>
+        <p:spPr>
+          <a:xfrm>
+            <a:off x="731520" y="4800600"/>
+            <a:ext cx="2194560" cy="320040"/>
+          </a:xfrm>
+          <a:prstGeom prst="rect">
+            <a:avLst/>
+          </a:prstGeom>
+          <a:noFill/>
+          <a:ln/>
+        </p:spPr>
+        <p:txBody>
+          <a:bodyPr wrap="square" lIns="0" tIns="0" rIns="0" bIns="0" rtlCol="0" anchor="t"/>
+          <a:lstStyle/>
+          <a:p>
+            <a:pPr algn="l" indent="0" marL="0">
+              <a:buNone/>
+            </a:pPr>
+            <a:r>
+              <a:rPr lang="en-US" sz="1300" b="1" spc="300" kern="0" dirty="0">
+                <a:solidFill>
+                  <a:srgbClr val="CDD3DC"/>
+                </a:solidFill>
+                <a:latin typeface="Calibri" pitchFamily="34" charset="0"/>
+                <a:ea typeface="Calibri" pitchFamily="34" charset="-122"/>
+                <a:cs typeface="Calibri" pitchFamily="34" charset="-120"/>
+              </a:rPr>
+              <a:t>BEI 2 SPUREN</a:t>
+            </a:r>
+            <a:endParaRPr lang="en-US" sz="1300" dirty="0"/>
+          </a:p>
+        </p:txBody>
+      </p:sp>
+      <p:sp>
+        <p:nvSpPr>
+          <p:cNvPr id="22" name="e21_9"/>
+          <p:cNvSpPr txBox="1"/>
+          <p:nvPr/>
+        </p:nvSpPr>
+        <p:spPr>
+          <a:xfrm>
+            <a:off x="731520" y="5120640"/>
+            <a:ext cx="2377440" cy="822960"/>
+          </a:xfrm>
+          <a:prstGeom prst="rect">
+            <a:avLst/>
+          </a:prstGeom>
+          <a:noFill/>
+          <a:ln/>
+        </p:spPr>
+        <p:txBody>
+          <a:bodyPr wrap="square" lIns="0" tIns="0" rIns="0" bIns="0" rtlCol="0" anchor="t"/>
+          <a:lstStyle/>
+          <a:p>
+            <a:pPr algn="l" indent="0" marL="0">
+              <a:buNone/>
+            </a:pPr>
+            <a:r>
+              <a:rPr lang="en-US" sz="2400" b="1" dirty="0">
+                <a:solidFill>
+                  <a:srgbClr val="F5F2EC"/>
+                </a:solidFill>
+                <a:latin typeface="Cambria" pitchFamily="34" charset="0"/>
+                <a:ea typeface="Cambria" pitchFamily="34" charset="-122"/>
+                <a:cs typeface="Cambria" pitchFamily="34" charset="-120"/>
+              </a:rPr>
+              <a:t>Gasse in der Mitte</a:t>
+            </a:r>
+            <a:endParaRPr lang="en-US" sz="2400" dirty="0"/>
+          </a:p>
+        </p:txBody>
+      </p:sp>
+      <p:sp>
+        <p:nvSpPr>
+          <p:cNvPr id="23" name="e21_10"/>
+          <p:cNvSpPr/>
+          <p:nvPr/>
+        </p:nvSpPr>
+        <p:spPr>
+          <a:xfrm>
+            <a:off x="3291840" y="4572000"/>
+            <a:ext cx="2011680" cy="1828800"/>
+          </a:xfrm>
+          <a:prstGeom prst="rect">
+            <a:avLst/>
+          </a:prstGeom>
+          <a:solidFill>
+            <a:srgbClr val="161C25"/>
+          </a:solidFill>
+          <a:ln w="12700">
+            <a:solidFill>
+              <a:srgbClr val="3A4252"/>
+            </a:solidFill>
+            <a:prstDash val="solid"/>
+          </a:ln>
+        </p:spPr>
+      </p:sp>
+      <p:sp>
+        <p:nvSpPr>
+          <p:cNvPr id="24" name="e21_11"/>
+          <p:cNvSpPr/>
+          <p:nvPr/>
+        </p:nvSpPr>
+        <p:spPr>
+          <a:xfrm>
+            <a:off x="4297680" y="4572000"/>
+            <a:ext cx="914" cy="1828800"/>
+          </a:xfrm>
+          <a:prstGeom prst="line">
+            <a:avLst/>
+          </a:prstGeom>
+          <a:noFill/>
+          <a:ln w="15875">
+            <a:solidFill>
+              <a:srgbClr val="D9DEE5"/>
+            </a:solidFill>
+            <a:prstDash val="dash"/>
+          </a:ln>
+        </p:spPr>
+      </p:sp>
+      <p:sp>
+        <p:nvSpPr>
+          <p:cNvPr id="25" name="e21_12"/>
+          <p:cNvSpPr/>
+          <p:nvPr/>
+        </p:nvSpPr>
+        <p:spPr>
+          <a:xfrm>
+            <a:off x="3401568" y="4754880"/>
+            <a:ext cx="384048" cy="658368"/>
+          </a:xfrm>
+          <a:prstGeom prst="roundRect">
+            <a:avLst>
+              <a:gd name="adj" fmla="val 19048"/>
+            </a:avLst>
+          </a:prstGeom>
+          <a:solidFill>
+            <a:srgbClr val="8A9BB0"/>
+          </a:solidFill>
+          <a:ln/>
+        </p:spPr>
+      </p:sp>
+      <p:sp>
+        <p:nvSpPr>
+          <p:cNvPr id="26" name="e21_13"/>
+          <p:cNvSpPr/>
+          <p:nvPr/>
+        </p:nvSpPr>
+        <p:spPr>
+          <a:xfrm>
+            <a:off x="4809744" y="4754880"/>
+            <a:ext cx="384048" cy="658368"/>
+          </a:xfrm>
+          <a:prstGeom prst="roundRect">
+            <a:avLst>
+              <a:gd name="adj" fmla="val 19048"/>
+            </a:avLst>
+          </a:prstGeom>
+          <a:solidFill>
+            <a:srgbClr val="4F78A8"/>
+          </a:solidFill>
+          <a:ln/>
+        </p:spPr>
+      </p:sp>
+      <p:sp>
+        <p:nvSpPr>
+          <p:cNvPr id="27" name="e21_14"/>
+          <p:cNvSpPr/>
+          <p:nvPr/>
+        </p:nvSpPr>
+        <p:spPr>
+          <a:xfrm>
+            <a:off x="3401568" y="5577840"/>
+            <a:ext cx="384048" cy="658368"/>
+          </a:xfrm>
+          <a:prstGeom prst="roundRect">
+            <a:avLst>
+              <a:gd name="adj" fmla="val 19048"/>
+            </a:avLst>
+          </a:prstGeom>
+          <a:solidFill>
+            <a:srgbClr val="8A9BB0"/>
+          </a:solidFill>
+          <a:ln/>
+        </p:spPr>
+      </p:sp>
+      <p:sp>
+        <p:nvSpPr>
+          <p:cNvPr id="28" name="e21_15"/>
+          <p:cNvSpPr/>
+          <p:nvPr/>
+        </p:nvSpPr>
+        <p:spPr>
+          <a:xfrm>
+            <a:off x="4809744" y="5577840"/>
+            <a:ext cx="384048" cy="658368"/>
+          </a:xfrm>
+          <a:prstGeom prst="roundRect">
+            <a:avLst>
+              <a:gd name="adj" fmla="val 19048"/>
+            </a:avLst>
+          </a:prstGeom>
+          <a:solidFill>
+            <a:srgbClr val="4F78A8"/>
+          </a:solidFill>
+          <a:ln/>
+        </p:spPr>
+      </p:sp>
+      <p:sp>
+        <p:nvSpPr>
+          <p:cNvPr id="29" name="e21_16"/>
+          <p:cNvSpPr/>
+          <p:nvPr/>
+        </p:nvSpPr>
+        <p:spPr>
+          <a:xfrm flipV="1">
+            <a:off x="4297680" y="4709160"/>
+            <a:ext cx="914" cy="1600200"/>
+          </a:xfrm>
+          <a:prstGeom prst="line">
+            <a:avLst/>
+          </a:prstGeom>
+          <a:noFill/>
+          <a:ln w="38100">
+            <a:solidFill>
+              <a:srgbClr val="4A8BFF"/>
+            </a:solidFill>
+            <a:prstDash val="solid"/>
+            <a:tailEnd type="triangle"/>
+          </a:ln>
+        </p:spPr>
       </p:sp>
     </p:spTree>
   </p:cSld>
@@ -19312,14 +19869,218 @@
                             </p:stCondLst>
                             <p:childTnLst>
                               <p:par>
-                                <p:cTn id="11" presetID="0" presetClass="path" presetSubtype="0" fill="hold" nodeType="clickEffect" accel="40000" decel="40000">
+                                <p:cTn id="11" presetID="42" presetClass="entr" presetSubtype="0" fill="hold" grpId="0" nodeType="clickEffect">
+                                  <p:stCondLst>
+                                    <p:cond delay="0"/>
+                                  </p:stCondLst>
+                                  <p:childTnLst>
+                                    <p:set>
+                                      <p:cBhvr>
+                                        <p:cTn id="12" dur="1" fill="hold">
+                                          <p:stCondLst>
+                                            <p:cond delay="0"/>
+                                          </p:stCondLst>
+                                        </p:cTn>
+                                        <p:tgtEl>
+                                          <p:spTgt spid="17"/>
+                                        </p:tgtEl>
+                                        <p:attrNameLst>
+                                          <p:attrName>style.visibility</p:attrName>
+                                        </p:attrNameLst>
+                                      </p:cBhvr>
+                                      <p:to>
+                                        <p:strVal val="visible"/>
+                                      </p:to>
+                                    </p:set>
+                                    <p:animEffect transition="in" filter="fade">
+                                      <p:cBhvr>
+                                        <p:cTn id="13" dur="500"/>
+                                        <p:tgtEl>
+                                          <p:spTgt spid="17"/>
+                                        </p:tgtEl>
+                                      </p:cBhvr>
+                                    </p:animEffect>
+                                    <p:anim calcmode="lin" valueType="num">
+                                      <p:cBhvr additive="base">
+                                        <p:cTn id="14" dur="500" fill="hold" decel="100000"/>
+                                        <p:tgtEl>
+                                          <p:spTgt spid="17"/>
+                                        </p:tgtEl>
+                                        <p:attrNameLst>
+                                          <p:attrName>ppt_x</p:attrName>
+                                        </p:attrNameLst>
+                                      </p:cBhvr>
+                                      <p:tavLst>
+                                        <p:tav tm="0">
+                                          <p:val>
+                                            <p:strVal val="#ppt_x"/>
+                                          </p:val>
+                                        </p:tav>
+                                        <p:tav tm="100000">
+                                          <p:val>
+                                            <p:strVal val="#ppt_x"/>
+                                          </p:val>
+                                        </p:tav>
+                                      </p:tavLst>
+                                    </p:anim>
+                                    <p:anim calcmode="lin" valueType="num">
+                                      <p:cBhvr additive="base">
+                                        <p:cTn id="15" dur="500" fill="hold" decel="100000"/>
+                                        <p:tgtEl>
+                                          <p:spTgt spid="17"/>
+                                        </p:tgtEl>
+                                        <p:attrNameLst>
+                                          <p:attrName>ppt_y</p:attrName>
+                                        </p:attrNameLst>
+                                      </p:cBhvr>
+                                      <p:tavLst>
+                                        <p:tav tm="0">
+                                          <p:val>
+                                            <p:strVal val="#ppt_y+.18"/>
+                                          </p:val>
+                                        </p:tav>
+                                        <p:tav tm="100000">
+                                          <p:val>
+                                            <p:strVal val="#ppt_y"/>
+                                          </p:val>
+                                        </p:tav>
+                                      </p:tavLst>
+                                    </p:anim>
+                                  </p:childTnLst>
+                                </p:cTn>
+                              </p:par>
+                              <p:par>
+                                <p:cTn id="16" presetID="10" presetClass="entr" presetSubtype="0" fill="hold" grpId="0" nodeType="withEffect">
+                                  <p:stCondLst>
+                                    <p:cond delay="0"/>
+                                  </p:stCondLst>
+                                  <p:childTnLst>
+                                    <p:set>
+                                      <p:cBhvr>
+                                        <p:cTn id="17" dur="1" fill="hold">
+                                          <p:stCondLst>
+                                            <p:cond delay="0"/>
+                                          </p:stCondLst>
+                                        </p:cTn>
+                                        <p:tgtEl>
+                                          <p:spTgt spid="18"/>
+                                        </p:tgtEl>
+                                        <p:attrNameLst>
+                                          <p:attrName>style.visibility</p:attrName>
+                                        </p:attrNameLst>
+                                      </p:cBhvr>
+                                      <p:to>
+                                        <p:strVal val="visible"/>
+                                      </p:to>
+                                    </p:set>
+                                    <p:animEffect transition="in" filter="fade">
+                                      <p:cBhvr>
+                                        <p:cTn id="18" dur="500"/>
+                                        <p:tgtEl>
+                                          <p:spTgt spid="18"/>
+                                        </p:tgtEl>
+                                      </p:cBhvr>
+                                    </p:animEffect>
+                                  </p:childTnLst>
+                                </p:cTn>
+                              </p:par>
+                              <p:par>
+                                <p:cTn id="19" presetID="10" presetClass="entr" presetSubtype="0" fill="hold" grpId="0" nodeType="withEffect">
+                                  <p:stCondLst>
+                                    <p:cond delay="0"/>
+                                  </p:stCondLst>
+                                  <p:childTnLst>
+                                    <p:set>
+                                      <p:cBhvr>
+                                        <p:cTn id="20" dur="1" fill="hold">
+                                          <p:stCondLst>
+                                            <p:cond delay="0"/>
+                                          </p:stCondLst>
+                                        </p:cTn>
+                                        <p:tgtEl>
+                                          <p:spTgt spid="19"/>
+                                        </p:tgtEl>
+                                        <p:attrNameLst>
+                                          <p:attrName>style.visibility</p:attrName>
+                                        </p:attrNameLst>
+                                      </p:cBhvr>
+                                      <p:to>
+                                        <p:strVal val="visible"/>
+                                      </p:to>
+                                    </p:set>
+                                    <p:animEffect transition="in" filter="fade">
+                                      <p:cBhvr>
+                                        <p:cTn id="21" dur="500"/>
+                                        <p:tgtEl>
+                                          <p:spTgt spid="19"/>
+                                        </p:tgtEl>
+                                      </p:cBhvr>
+                                    </p:animEffect>
+                                  </p:childTnLst>
+                                </p:cTn>
+                              </p:par>
+                              <p:par>
+                                <p:cTn id="22" presetID="10" presetClass="entr" presetSubtype="0" fill="hold" grpId="0" nodeType="withEffect">
+                                  <p:stCondLst>
+                                    <p:cond delay="0"/>
+                                  </p:stCondLst>
+                                  <p:childTnLst>
+                                    <p:set>
+                                      <p:cBhvr>
+                                        <p:cTn id="23" dur="1" fill="hold">
+                                          <p:stCondLst>
+                                            <p:cond delay="0"/>
+                                          </p:stCondLst>
+                                        </p:cTn>
+                                        <p:tgtEl>
+                                          <p:spTgt spid="20"/>
+                                        </p:tgtEl>
+                                        <p:attrNameLst>
+                                          <p:attrName>style.visibility</p:attrName>
+                                        </p:attrNameLst>
+                                      </p:cBhvr>
+                                      <p:to>
+                                        <p:strVal val="visible"/>
+                                      </p:to>
+                                    </p:set>
+                                    <p:animEffect transition="in" filter="fade">
+                                      <p:cBhvr>
+                                        <p:cTn id="24" dur="500"/>
+                                        <p:tgtEl>
+                                          <p:spTgt spid="20"/>
+                                        </p:tgtEl>
+                                      </p:cBhvr>
+                                    </p:animEffect>
+                                  </p:childTnLst>
+                                </p:cTn>
+                              </p:par>
+                            </p:childTnLst>
+                          </p:cTn>
+                        </p:par>
+                      </p:childTnLst>
+                    </p:cTn>
+                  </p:par>
+                  <p:par>
+                    <p:cTn id="25" fill="hold">
+                      <p:stCondLst>
+                        <p:cond delay="indefinite"/>
+                      </p:stCondLst>
+                      <p:childTnLst>
+                        <p:par>
+                          <p:cTn id="26" fill="hold">
+                            <p:stCondLst>
+                              <p:cond delay="0"/>
+                            </p:stCondLst>
+                            <p:childTnLst>
+                              <p:par>
+                                <p:cTn id="27" presetID="0" presetClass="path" presetSubtype="0" fill="hold" nodeType="clickEffect" accel="40000" decel="40000">
                                   <p:stCondLst>
                                     <p:cond delay="0"/>
                                   </p:stCondLst>
                                   <p:childTnLst>
                                     <p:animMotion origin="layout" path="M 0 0 L 0 -1.05 E" pathEditMode="relative" rAng="0" ptsTypes="">
                                       <p:cBhvr>
-                                        <p:cTn id="12" dur="2600" fill="hold"/>
+                                        <p:cTn id="28" dur="2600" fill="hold"/>
                                         <p:tgtEl>
                                           <p:spTgt spid="14"/>
                                         </p:tgtEl>
@@ -19334,14 +20095,14 @@
                                 </p:cTn>
                               </p:par>
                               <p:par>
-                                <p:cTn id="13" presetID="0" presetClass="path" presetSubtype="0" fill="hold" nodeType="withEffect" accel="40000" decel="40000">
+                                <p:cTn id="29" presetID="0" presetClass="path" presetSubtype="0" fill="hold" nodeType="withEffect" accel="40000" decel="40000">
                                   <p:stCondLst>
                                     <p:cond delay="0"/>
                                   </p:stCondLst>
                                   <p:childTnLst>
                                     <p:animMotion origin="layout" path="M 0 0 L 0 -1.05 E" pathEditMode="relative" rAng="0" ptsTypes="">
                                       <p:cBhvr>
-                                        <p:cTn id="14" dur="2600" fill="hold"/>
+                                        <p:cTn id="30" dur="2600" fill="hold"/>
                                         <p:tgtEl>
                                           <p:spTgt spid="15"/>
                                         </p:tgtEl>
@@ -19356,14 +20117,14 @@
                                 </p:cTn>
                               </p:par>
                               <p:par>
-                                <p:cTn id="15" presetID="0" presetClass="path" presetSubtype="0" fill="hold" nodeType="withEffect" accel="40000" decel="40000">
+                                <p:cTn id="31" presetID="0" presetClass="path" presetSubtype="0" fill="hold" nodeType="withEffect" accel="40000" decel="40000">
                                   <p:stCondLst>
                                     <p:cond delay="0"/>
                                   </p:stCondLst>
                                   <p:childTnLst>
                                     <p:animMotion origin="layout" path="M 0 0 L 0 -1.05 E" pathEditMode="relative" rAng="0" ptsTypes="">
                                       <p:cBhvr>
-                                        <p:cTn id="16" dur="2600" fill="hold"/>
+                                        <p:cTn id="32" dur="2600" fill="hold"/>
                                         <p:tgtEl>
                                           <p:spTgt spid="16"/>
                                         </p:tgtEl>
@@ -19374,6 +20135,339 @@
                                       </p:cBhvr>
                                       <p:rCtr x="0" y="0"/>
                                     </p:animMotion>
+                                  </p:childTnLst>
+                                </p:cTn>
+                              </p:par>
+                            </p:childTnLst>
+                          </p:cTn>
+                        </p:par>
+                      </p:childTnLst>
+                    </p:cTn>
+                  </p:par>
+                  <p:par>
+                    <p:cTn id="33" fill="hold">
+                      <p:stCondLst>
+                        <p:cond delay="indefinite"/>
+                      </p:stCondLst>
+                      <p:childTnLst>
+                        <p:par>
+                          <p:cTn id="34" fill="hold">
+                            <p:stCondLst>
+                              <p:cond delay="0"/>
+                            </p:stCondLst>
+                            <p:childTnLst>
+                              <p:par>
+                                <p:cTn id="35" presetID="10" presetClass="entr" presetSubtype="0" fill="hold" grpId="0" nodeType="clickEffect">
+                                  <p:stCondLst>
+                                    <p:cond delay="0"/>
+                                  </p:stCondLst>
+                                  <p:childTnLst>
+                                    <p:set>
+                                      <p:cBhvr>
+                                        <p:cTn id="36" dur="1" fill="hold">
+                                          <p:stCondLst>
+                                            <p:cond delay="0"/>
+                                          </p:stCondLst>
+                                        </p:cTn>
+                                        <p:tgtEl>
+                                          <p:spTgt spid="21"/>
+                                        </p:tgtEl>
+                                        <p:attrNameLst>
+                                          <p:attrName>style.visibility</p:attrName>
+                                        </p:attrNameLst>
+                                      </p:cBhvr>
+                                      <p:to>
+                                        <p:strVal val="visible"/>
+                                      </p:to>
+                                    </p:set>
+                                    <p:animEffect transition="in" filter="fade">
+                                      <p:cBhvr>
+                                        <p:cTn id="37" dur="500"/>
+                                        <p:tgtEl>
+                                          <p:spTgt spid="21"/>
+                                        </p:tgtEl>
+                                      </p:cBhvr>
+                                    </p:animEffect>
+                                  </p:childTnLst>
+                                </p:cTn>
+                              </p:par>
+                              <p:par>
+                                <p:cTn id="38" presetID="10" presetClass="entr" presetSubtype="0" fill="hold" grpId="0" nodeType="withEffect">
+                                  <p:stCondLst>
+                                    <p:cond delay="0"/>
+                                  </p:stCondLst>
+                                  <p:childTnLst>
+                                    <p:set>
+                                      <p:cBhvr>
+                                        <p:cTn id="39" dur="1" fill="hold">
+                                          <p:stCondLst>
+                                            <p:cond delay="0"/>
+                                          </p:stCondLst>
+                                        </p:cTn>
+                                        <p:tgtEl>
+                                          <p:spTgt spid="22"/>
+                                        </p:tgtEl>
+                                        <p:attrNameLst>
+                                          <p:attrName>style.visibility</p:attrName>
+                                        </p:attrNameLst>
+                                      </p:cBhvr>
+                                      <p:to>
+                                        <p:strVal val="visible"/>
+                                      </p:to>
+                                    </p:set>
+                                    <p:animEffect transition="in" filter="fade">
+                                      <p:cBhvr>
+                                        <p:cTn id="40" dur="500"/>
+                                        <p:tgtEl>
+                                          <p:spTgt spid="22"/>
+                                        </p:tgtEl>
+                                      </p:cBhvr>
+                                    </p:animEffect>
+                                  </p:childTnLst>
+                                </p:cTn>
+                              </p:par>
+                              <p:par>
+                                <p:cTn id="41" presetID="10" presetClass="entr" presetSubtype="0" fill="hold" grpId="0" nodeType="withEffect">
+                                  <p:stCondLst>
+                                    <p:cond delay="0"/>
+                                  </p:stCondLst>
+                                  <p:childTnLst>
+                                    <p:set>
+                                      <p:cBhvr>
+                                        <p:cTn id="42" dur="1" fill="hold">
+                                          <p:stCondLst>
+                                            <p:cond delay="0"/>
+                                          </p:stCondLst>
+                                        </p:cTn>
+                                        <p:tgtEl>
+                                          <p:spTgt spid="23"/>
+                                        </p:tgtEl>
+                                        <p:attrNameLst>
+                                          <p:attrName>style.visibility</p:attrName>
+                                        </p:attrNameLst>
+                                      </p:cBhvr>
+                                      <p:to>
+                                        <p:strVal val="visible"/>
+                                      </p:to>
+                                    </p:set>
+                                    <p:animEffect transition="in" filter="fade">
+                                      <p:cBhvr>
+                                        <p:cTn id="43" dur="500"/>
+                                        <p:tgtEl>
+                                          <p:spTgt spid="23"/>
+                                        </p:tgtEl>
+                                      </p:cBhvr>
+                                    </p:animEffect>
+                                  </p:childTnLst>
+                                </p:cTn>
+                              </p:par>
+                              <p:par>
+                                <p:cTn id="44" presetID="10" presetClass="entr" presetSubtype="0" fill="hold" grpId="0" nodeType="withEffect">
+                                  <p:stCondLst>
+                                    <p:cond delay="0"/>
+                                  </p:stCondLst>
+                                  <p:childTnLst>
+                                    <p:set>
+                                      <p:cBhvr>
+                                        <p:cTn id="45" dur="1" fill="hold">
+                                          <p:stCondLst>
+                                            <p:cond delay="0"/>
+                                          </p:stCondLst>
+                                        </p:cTn>
+                                        <p:tgtEl>
+                                          <p:spTgt spid="24"/>
+                                        </p:tgtEl>
+                                        <p:attrNameLst>
+                                          <p:attrName>style.visibility</p:attrName>
+                                        </p:attrNameLst>
+                                      </p:cBhvr>
+                                      <p:to>
+                                        <p:strVal val="visible"/>
+                                      </p:to>
+                                    </p:set>
+                                    <p:animEffect transition="in" filter="fade">
+                                      <p:cBhvr>
+                                        <p:cTn id="46" dur="500"/>
+                                        <p:tgtEl>
+                                          <p:spTgt spid="24"/>
+                                        </p:tgtEl>
+                                      </p:cBhvr>
+                                    </p:animEffect>
+                                  </p:childTnLst>
+                                </p:cTn>
+                              </p:par>
+                              <p:par>
+                                <p:cTn id="47" presetID="10" presetClass="entr" presetSubtype="0" fill="hold" grpId="0" nodeType="withEffect">
+                                  <p:stCondLst>
+                                    <p:cond delay="0"/>
+                                  </p:stCondLst>
+                                  <p:childTnLst>
+                                    <p:set>
+                                      <p:cBhvr>
+                                        <p:cTn id="48" dur="1" fill="hold">
+                                          <p:stCondLst>
+                                            <p:cond delay="0"/>
+                                          </p:stCondLst>
+                                        </p:cTn>
+                                        <p:tgtEl>
+                                          <p:spTgt spid="25"/>
+                                        </p:tgtEl>
+                                        <p:attrNameLst>
+                                          <p:attrName>style.visibility</p:attrName>
+                                        </p:attrNameLst>
+                                      </p:cBhvr>
+                                      <p:to>
+                                        <p:strVal val="visible"/>
+                                      </p:to>
+                                    </p:set>
+                                    <p:animEffect transition="in" filter="fade">
+                                      <p:cBhvr>
+                                        <p:cTn id="49" dur="500"/>
+                                        <p:tgtEl>
+                                          <p:spTgt spid="25"/>
+                                        </p:tgtEl>
+                                      </p:cBhvr>
+                                    </p:animEffect>
+                                  </p:childTnLst>
+                                </p:cTn>
+                              </p:par>
+                              <p:par>
+                                <p:cTn id="50" presetID="10" presetClass="entr" presetSubtype="0" fill="hold" grpId="0" nodeType="withEffect">
+                                  <p:stCondLst>
+                                    <p:cond delay="0"/>
+                                  </p:stCondLst>
+                                  <p:childTnLst>
+                                    <p:set>
+                                      <p:cBhvr>
+                                        <p:cTn id="51" dur="1" fill="hold">
+                                          <p:stCondLst>
+                                            <p:cond delay="0"/>
+                                          </p:stCondLst>
+                                        </p:cTn>
+                                        <p:tgtEl>
+                                          <p:spTgt spid="26"/>
+                                        </p:tgtEl>
+                                        <p:attrNameLst>
+                                          <p:attrName>style.visibility</p:attrName>
+                                        </p:attrNameLst>
+                                      </p:cBhvr>
+                                      <p:to>
+                                        <p:strVal val="visible"/>
+                                      </p:to>
+                                    </p:set>
+                                    <p:animEffect transition="in" filter="fade">
+                                      <p:cBhvr>
+                                        <p:cTn id="52" dur="500"/>
+                                        <p:tgtEl>
+                                          <p:spTgt spid="26"/>
+                                        </p:tgtEl>
+                                      </p:cBhvr>
+                                    </p:animEffect>
+                                  </p:childTnLst>
+                                </p:cTn>
+                              </p:par>
+                              <p:par>
+                                <p:cTn id="53" presetID="10" presetClass="entr" presetSubtype="0" fill="hold" grpId="0" nodeType="withEffect">
+                                  <p:stCondLst>
+                                    <p:cond delay="0"/>
+                                  </p:stCondLst>
+                                  <p:childTnLst>
+                                    <p:set>
+                                      <p:cBhvr>
+                                        <p:cTn id="54" dur="1" fill="hold">
+                                          <p:stCondLst>
+                                            <p:cond delay="0"/>
+                                          </p:stCondLst>
+                                        </p:cTn>
+                                        <p:tgtEl>
+                                          <p:spTgt spid="27"/>
+                                        </p:tgtEl>
+                                        <p:attrNameLst>
+                                          <p:attrName>style.visibility</p:attrName>
+                                        </p:attrNameLst>
+                                      </p:cBhvr>
+                                      <p:to>
+                                        <p:strVal val="visible"/>
+                                      </p:to>
+                                    </p:set>
+                                    <p:animEffect transition="in" filter="fade">
+                                      <p:cBhvr>
+                                        <p:cTn id="55" dur="500"/>
+                                        <p:tgtEl>
+                                          <p:spTgt spid="27"/>
+                                        </p:tgtEl>
+                                      </p:cBhvr>
+                                    </p:animEffect>
+                                  </p:childTnLst>
+                                </p:cTn>
+                              </p:par>
+                              <p:par>
+                                <p:cTn id="56" presetID="10" presetClass="entr" presetSubtype="0" fill="hold" grpId="0" nodeType="withEffect">
+                                  <p:stCondLst>
+                                    <p:cond delay="0"/>
+                                  </p:stCondLst>
+                                  <p:childTnLst>
+                                    <p:set>
+                                      <p:cBhvr>
+                                        <p:cTn id="57" dur="1" fill="hold">
+                                          <p:stCondLst>
+                                            <p:cond delay="0"/>
+                                          </p:stCondLst>
+                                        </p:cTn>
+                                        <p:tgtEl>
+                                          <p:spTgt spid="28"/>
+                                        </p:tgtEl>
+                                        <p:attrNameLst>
+                                          <p:attrName>style.visibility</p:attrName>
+                                        </p:attrNameLst>
+                                      </p:cBhvr>
+                                      <p:to>
+                                        <p:strVal val="visible"/>
+                                      </p:to>
+                                    </p:set>
+                                    <p:animEffect transition="in" filter="fade">
+                                      <p:cBhvr>
+                                        <p:cTn id="58" dur="500"/>
+                                        <p:tgtEl>
+                                          <p:spTgt spid="28"/>
+                                        </p:tgtEl>
+                                      </p:cBhvr>
+                                    </p:animEffect>
+                                  </p:childTnLst>
+                                </p:cTn>
+                              </p:par>
+                              <p:par>
+                                <p:cTn id="59" presetID="10" presetClass="entr" presetSubtype="0" fill="hold" grpId="0" nodeType="withEffect">
+                                  <p:stCondLst>
+                                    <p:cond delay="0"/>
+                                  </p:stCondLst>
+                                  <p:childTnLst>
+                                    <p:set>
+                                      <p:cBhvr>
+                                        <p:cTn id="60" dur="1" fill="hold">
+                                          <p:stCondLst>
+                                            <p:cond delay="0"/>
+                                          </p:stCondLst>
+                                        </p:cTn>
+                                        <p:tgtEl>
+                                          <p:spTgt spid="29"/>
+                                        </p:tgtEl>
+                                        <p:attrNameLst>
+                                          <p:attrName>style.visibility</p:attrName>
+                                        </p:attrNameLst>
+                                      </p:cBhvr>
+                                      <p:to>
+                                        <p:strVal val="visible"/>
+                                      </p:to>
+                                    </p:set>
+                                    <p:animEffect transition="in" filter="fade">
+                                      <p:cBhvr>
+                                        <p:cTn id="61" dur="500"/>
+                                        <p:tgtEl>
+                                          <p:spTgt spid="29"/>
+                                        </p:tgtEl>
+                                      </p:cBhvr>
+                                    </p:animEffect>
                                   </p:childTnLst>
                                 </p:cTn>
                               </p:par>
@@ -19404,6 +20498,21 @@
         </p:cTn>
       </p:par>
     </p:tnLst>
+    <p:bldLst>
+      <p:bldP spid="17" grpId="0" animBg="1"/>
+      <p:bldP spid="18" grpId="0" animBg="1"/>
+      <p:bldP spid="19" grpId="0" animBg="1"/>
+      <p:bldP spid="20" grpId="0" animBg="1"/>
+      <p:bldP spid="21" grpId="0" animBg="1"/>
+      <p:bldP spid="22" grpId="0" animBg="1"/>
+      <p:bldP spid="23" grpId="0" animBg="1"/>
+      <p:bldP spid="24" grpId="0" animBg="1"/>
+      <p:bldP spid="25" grpId="0" animBg="1"/>
+      <p:bldP spid="26" grpId="0" animBg="1"/>
+      <p:bldP spid="27" grpId="0" animBg="1"/>
+      <p:bldP spid="28" grpId="0" animBg="1"/>
+      <p:bldP spid="29" grpId="0" animBg="1"/>
+    </p:bldLst>
   </p:timing>
 </p:sld>
 </file>
@@ -19631,7 +20740,7 @@
             <a:r>
               <a:rPr lang="en-US" sz="1300" b="1" spc="300" kern="0" dirty="0">
                 <a:solidFill>
-                  <a:srgbClr val="A7B0BD"/>
+                  <a:srgbClr val="CDD3DC"/>
                 </a:solidFill>
                 <a:latin typeface="Calibri" pitchFamily="34" charset="0"/>
                 <a:ea typeface="Calibri" pitchFamily="34" charset="-122"/>
@@ -19670,7 +20779,7 @@
             <a:r>
               <a:rPr lang="en-US" sz="1300" b="1" spc="300" kern="0" dirty="0">
                 <a:solidFill>
-                  <a:srgbClr val="A7B0BD"/>
+                  <a:srgbClr val="CDD3DC"/>
                 </a:solidFill>
                 <a:latin typeface="Calibri" pitchFamily="34" charset="0"/>
                 <a:ea typeface="Calibri" pitchFamily="34" charset="-122"/>
@@ -19709,7 +20818,7 @@
             <a:r>
               <a:rPr lang="en-US" sz="1300" b="1" spc="300" kern="0" dirty="0">
                 <a:solidFill>
-                  <a:srgbClr val="A7B0BD"/>
+                  <a:srgbClr val="CDD3DC"/>
                 </a:solidFill>
                 <a:latin typeface="Calibri" pitchFamily="34" charset="0"/>
                 <a:ea typeface="Calibri" pitchFamily="34" charset="-122"/>
@@ -22072,7 +23181,7 @@
                 <a:ea typeface="Calibri" pitchFamily="34" charset="-122"/>
                 <a:cs typeface="Calibri" pitchFamily="34" charset="-120"/>
               </a:rPr>
-              <a:t>Wann bildest du die Rettungsgasse?</a:t>
+              <a:t>Rot an der Ampel, hinter dir Blau + Horn?</a:t>
             </a:r>
             <a:endParaRPr lang="en-US" sz="2000" dirty="0"/>
           </a:p>
@@ -22133,7 +23242,7 @@
                 <a:ea typeface="Calibri" pitchFamily="34" charset="-122"/>
                 <a:cs typeface="Calibri" pitchFamily="34" charset="-120"/>
               </a:rPr>
-              <a:t>Schon bei Schritttempo oder Stillstand.</a:t>
+              <a:t>Ruhig bleiben. Nur vorrollen, wenn niemand gefährdet wird.</a:t>
             </a:r>
             <a:endParaRPr lang="en-US" sz="1800" dirty="0"/>
           </a:p>
@@ -23432,8 +24541,8 @@
         </p:nvSpPr>
         <p:spPr>
           <a:xfrm>
-            <a:off x="841248" y="4709160"/>
-            <a:ext cx="1792224" cy="822960"/>
+            <a:off x="822960" y="4663440"/>
+            <a:ext cx="1828800" cy="914400"/>
           </a:xfrm>
           <a:prstGeom prst="rect">
             <a:avLst/>
@@ -23449,9 +24558,9 @@
               <a:buNone/>
             </a:pPr>
             <a:r>
-              <a:rPr lang="en-US" sz="1600" dirty="0">
+              <a:rPr lang="en-US" sz="1700" dirty="0">
                 <a:solidFill>
-                  <a:srgbClr val="A7B0BD"/>
+                  <a:srgbClr val="CDD3DC"/>
                 </a:solidFill>
                 <a:latin typeface="Calibri" pitchFamily="34" charset="0"/>
                 <a:ea typeface="Calibri" pitchFamily="34" charset="-122"/>
@@ -23459,7 +24568,7 @@
               </a:rPr>
               <a:t>auch wenn es hell ist</a:t>
             </a:r>
-            <a:endParaRPr lang="en-US" sz="1600" dirty="0"/>
+            <a:endParaRPr lang="en-US" sz="1700" dirty="0"/>
           </a:p>
         </p:txBody>
       </p:sp>
@@ -23581,8 +24690,8 @@
         </p:nvSpPr>
         <p:spPr>
           <a:xfrm>
-            <a:off x="3012948" y="4709160"/>
-            <a:ext cx="1792224" cy="822960"/>
+            <a:off x="2994660" y="4663440"/>
+            <a:ext cx="1828800" cy="914400"/>
           </a:xfrm>
           <a:prstGeom prst="rect">
             <a:avLst/>
@@ -23598,9 +24707,9 @@
               <a:buNone/>
             </a:pPr>
             <a:r>
-              <a:rPr lang="en-US" sz="1600" dirty="0">
+              <a:rPr lang="en-US" sz="1700" dirty="0">
                 <a:solidFill>
-                  <a:srgbClr val="A7B0BD"/>
+                  <a:srgbClr val="CDD3DC"/>
                 </a:solidFill>
                 <a:latin typeface="Calibri" pitchFamily="34" charset="0"/>
                 <a:ea typeface="Calibri" pitchFamily="34" charset="-122"/>
@@ -23608,7 +24717,7 @@
               </a:rPr>
               <a:t>Augen brauchen Zeit</a:t>
             </a:r>
-            <a:endParaRPr lang="en-US" sz="1600" dirty="0"/>
+            <a:endParaRPr lang="en-US" sz="1700" dirty="0"/>
           </a:p>
         </p:txBody>
       </p:sp>
@@ -23730,8 +24839,8 @@
         </p:nvSpPr>
         <p:spPr>
           <a:xfrm>
-            <a:off x="5184648" y="4709160"/>
-            <a:ext cx="1792224" cy="822960"/>
+            <a:off x="5166360" y="4663440"/>
+            <a:ext cx="1828800" cy="914400"/>
           </a:xfrm>
           <a:prstGeom prst="rect">
             <a:avLst/>
@@ -23747,9 +24856,9 @@
               <a:buNone/>
             </a:pPr>
             <a:r>
-              <a:rPr lang="en-US" sz="1600" dirty="0">
+              <a:rPr lang="en-US" sz="1700" dirty="0">
                 <a:solidFill>
-                  <a:srgbClr val="A7B0BD"/>
+                  <a:srgbClr val="CDD3DC"/>
                 </a:solidFill>
                 <a:latin typeface="Calibri" pitchFamily="34" charset="0"/>
                 <a:ea typeface="Calibri" pitchFamily="34" charset="-122"/>
@@ -23757,7 +24866,7 @@
               </a:rPr>
               <a:t>Durchsagen hören</a:t>
             </a:r>
-            <a:endParaRPr lang="en-US" sz="1600" dirty="0"/>
+            <a:endParaRPr lang="en-US" sz="1700" dirty="0"/>
           </a:p>
         </p:txBody>
       </p:sp>
@@ -23879,8 +24988,8 @@
         </p:nvSpPr>
         <p:spPr>
           <a:xfrm>
-            <a:off x="7356348" y="4709160"/>
-            <a:ext cx="1792224" cy="822960"/>
+            <a:off x="7338060" y="4663440"/>
+            <a:ext cx="1828800" cy="914400"/>
           </a:xfrm>
           <a:prstGeom prst="rect">
             <a:avLst/>
@@ -23896,17 +25005,17 @@
               <a:buNone/>
             </a:pPr>
             <a:r>
-              <a:rPr lang="en-US" sz="1600" dirty="0">
+              <a:rPr lang="en-US" sz="1700" dirty="0">
                 <a:solidFill>
-                  <a:srgbClr val="A7B0BD"/>
+                  <a:srgbClr val="CDD3DC"/>
                 </a:solidFill>
                 <a:latin typeface="Calibri" pitchFamily="34" charset="0"/>
                 <a:ea typeface="Calibri" pitchFamily="34" charset="-122"/>
                 <a:cs typeface="Calibri" pitchFamily="34" charset="-120"/>
               </a:rPr>
-              <a:t>auch im Stau</a:t>
+              <a:t>halber Tacho, 80 km/h = 40 m</a:t>
             </a:r>
-            <a:endParaRPr lang="en-US" sz="1600" dirty="0"/>
+            <a:endParaRPr lang="en-US" sz="1700" dirty="0"/>
           </a:p>
         </p:txBody>
       </p:sp>
@@ -24028,8 +25137,8 @@
         </p:nvSpPr>
         <p:spPr>
           <a:xfrm>
-            <a:off x="9528048" y="4709160"/>
-            <a:ext cx="1792224" cy="822960"/>
+            <a:off x="9509760" y="4663440"/>
+            <a:ext cx="1828800" cy="914400"/>
           </a:xfrm>
           <a:prstGeom prst="rect">
             <a:avLst/>
@@ -24045,9 +25154,9 @@
               <a:buNone/>
             </a:pPr>
             <a:r>
-              <a:rPr lang="en-US" sz="1600" dirty="0">
+              <a:rPr lang="en-US" sz="1700" dirty="0">
                 <a:solidFill>
-                  <a:srgbClr val="A7B0BD"/>
+                  <a:srgbClr val="CDD3DC"/>
                 </a:solidFill>
                 <a:latin typeface="Calibri" pitchFamily="34" charset="0"/>
                 <a:ea typeface="Calibri" pitchFamily="34" charset="-122"/>
@@ -24055,7 +25164,7 @@
               </a:rPr>
               <a:t>nicht rückwärts, nur im Notfall halten</a:t>
             </a:r>
-            <a:endParaRPr lang="en-US" sz="1600" dirty="0"/>
+            <a:endParaRPr lang="en-US" sz="1700" dirty="0"/>
           </a:p>
         </p:txBody>
       </p:sp>
@@ -25541,12 +26650,12 @@
         </p:nvSpPr>
         <p:spPr>
           <a:xfrm>
-            <a:off x="548640" y="4892040"/>
-            <a:ext cx="3474720" cy="1463040"/>
+            <a:off x="548640" y="4160520"/>
+            <a:ext cx="3566160" cy="1143000"/>
           </a:xfrm>
           <a:prstGeom prst="roundRect">
             <a:avLst>
-              <a:gd name="adj" fmla="val 8750"/>
+              <a:gd name="adj" fmla="val 11200"/>
             </a:avLst>
           </a:prstGeom>
           <a:solidFill>
@@ -25570,8 +26679,8 @@
         </p:nvSpPr>
         <p:spPr>
           <a:xfrm>
-            <a:off x="731520" y="4983480"/>
-            <a:ext cx="640080" cy="640080"/>
+            <a:off x="731520" y="4389120"/>
+            <a:ext cx="640080" cy="685800"/>
           </a:xfrm>
           <a:prstGeom prst="rect">
             <a:avLst/>
@@ -25609,8 +26718,8 @@
         </p:nvSpPr>
         <p:spPr>
           <a:xfrm>
-            <a:off x="1371600" y="4983480"/>
-            <a:ext cx="2377440" cy="1280160"/>
+            <a:off x="1325880" y="4206240"/>
+            <a:ext cx="2606040" cy="1051560"/>
           </a:xfrm>
           <a:prstGeom prst="rect">
             <a:avLst/>
@@ -25626,7 +26735,7 @@
               <a:buNone/>
             </a:pPr>
             <a:r>
-              <a:rPr lang="en-US" sz="1700" b="1" dirty="0">
+              <a:rPr lang="en-US" sz="2000" b="1" dirty="0">
                 <a:solidFill>
                   <a:srgbClr val="F5F2EC"/>
                 </a:solidFill>
@@ -25634,9 +26743,9 @@
                 <a:ea typeface="Calibri" pitchFamily="34" charset="-122"/>
                 <a:cs typeface="Calibri" pitchFamily="34" charset="-120"/>
               </a:rPr>
-              <a:t>Wenden und zurück raus</a:t>
+              <a:t>Wenden und zurückfahren</a:t>
             </a:r>
-            <a:endParaRPr lang="en-US" sz="1700" dirty="0"/>
+            <a:endParaRPr lang="en-US" sz="2000" dirty="0"/>
           </a:p>
         </p:txBody>
       </p:sp>
@@ -25648,12 +26757,12 @@
         </p:nvSpPr>
         <p:spPr>
           <a:xfrm>
-            <a:off x="4206240" y="4892040"/>
-            <a:ext cx="3474720" cy="1463040"/>
+            <a:off x="4315968" y="4160520"/>
+            <a:ext cx="3566160" cy="1143000"/>
           </a:xfrm>
           <a:prstGeom prst="roundRect">
             <a:avLst>
-              <a:gd name="adj" fmla="val 8750"/>
+              <a:gd name="adj" fmla="val 11200"/>
             </a:avLst>
           </a:prstGeom>
           <a:solidFill>
@@ -25677,8 +26786,8 @@
         </p:nvSpPr>
         <p:spPr>
           <a:xfrm>
-            <a:off x="4389120" y="4983480"/>
-            <a:ext cx="640080" cy="640080"/>
+            <a:off x="4498848" y="4389120"/>
+            <a:ext cx="640080" cy="685800"/>
           </a:xfrm>
           <a:prstGeom prst="rect">
             <a:avLst/>
@@ -25716,8 +26825,8 @@
         </p:nvSpPr>
         <p:spPr>
           <a:xfrm>
-            <a:off x="5029200" y="4983480"/>
-            <a:ext cx="2377440" cy="1280160"/>
+            <a:off x="5093208" y="4206240"/>
+            <a:ext cx="2606040" cy="1051560"/>
           </a:xfrm>
           <a:prstGeom prst="rect">
             <a:avLst/>
@@ -25733,7 +26842,7 @@
               <a:buNone/>
             </a:pPr>
             <a:r>
-              <a:rPr lang="en-US" sz="1700" b="1" dirty="0">
+              <a:rPr lang="en-US" sz="2000" b="1" dirty="0">
                 <a:solidFill>
                   <a:srgbClr val="F5F2EC"/>
                 </a:solidFill>
@@ -25741,9 +26850,9 @@
                 <a:ea typeface="Calibri" pitchFamily="34" charset="-122"/>
                 <a:cs typeface="Calibri" pitchFamily="34" charset="-120"/>
               </a:rPr>
-              <a:t>Sitzen bleiben, Fenster zu</a:t>
+              <a:t>Im Auto warten</a:t>
             </a:r>
-            <a:endParaRPr lang="en-US" sz="1700" dirty="0"/>
+            <a:endParaRPr lang="en-US" sz="2000" dirty="0"/>
           </a:p>
         </p:txBody>
       </p:sp>
@@ -25755,12 +26864,12 @@
         </p:nvSpPr>
         <p:spPr>
           <a:xfrm>
-            <a:off x="7863840" y="4892040"/>
-            <a:ext cx="3794760" cy="1463040"/>
+            <a:off x="8083296" y="4160520"/>
+            <a:ext cx="3566160" cy="1143000"/>
           </a:xfrm>
           <a:prstGeom prst="roundRect">
             <a:avLst>
-              <a:gd name="adj" fmla="val 8750"/>
+              <a:gd name="adj" fmla="val 11200"/>
             </a:avLst>
           </a:prstGeom>
           <a:solidFill>
@@ -25784,8 +26893,8 @@
         </p:nvSpPr>
         <p:spPr>
           <a:xfrm>
-            <a:off x="8046720" y="4983480"/>
-            <a:ext cx="640080" cy="640080"/>
+            <a:off x="8266176" y="4389120"/>
+            <a:ext cx="640080" cy="685800"/>
           </a:xfrm>
           <a:prstGeom prst="rect">
             <a:avLst/>
@@ -25823,8 +26932,8 @@
         </p:nvSpPr>
         <p:spPr>
           <a:xfrm>
-            <a:off x="8686800" y="4983480"/>
-            <a:ext cx="2697480" cy="1280160"/>
+            <a:off x="8860536" y="4206240"/>
+            <a:ext cx="2606040" cy="1051560"/>
           </a:xfrm>
           <a:prstGeom prst="rect">
             <a:avLst/>
@@ -25840,7 +26949,7 @@
               <a:buNone/>
             </a:pPr>
             <a:r>
-              <a:rPr lang="en-US" sz="1700" b="1" dirty="0">
+              <a:rPr lang="en-US" sz="2000" b="1" dirty="0">
                 <a:solidFill>
                   <a:srgbClr val="F5F2EC"/>
                 </a:solidFill>
@@ -25848,9 +26957,9 @@
                 <a:ea typeface="Calibri" pitchFamily="34" charset="-122"/>
                 <a:cs typeface="Calibri" pitchFamily="34" charset="-120"/>
               </a:rPr>
-              <a:t>Rechts ran, Motor aus, Schlüssel stecken, zu Fuß zum Notausgang</a:t>
+              <a:t>Anhalten und zu Fuß raus</a:t>
             </a:r>
-            <a:endParaRPr lang="en-US" sz="1700" dirty="0"/>
+            <a:endParaRPr lang="en-US" sz="2000" dirty="0"/>
           </a:p>
         </p:txBody>
       </p:sp>
@@ -25870,7 +26979,7 @@
         </p:blipFill>
         <p:spPr>
           <a:xfrm>
-            <a:off x="3337560" y="4526280"/>
+            <a:off x="3429000" y="3794760"/>
             <a:ext cx="731520" cy="731520"/>
           </a:xfrm>
           <a:prstGeom prst="rect">
@@ -25894,7 +27003,7 @@
         </p:blipFill>
         <p:spPr>
           <a:xfrm>
-            <a:off x="6995160" y="4526280"/>
+            <a:off x="7196328" y="3794760"/>
             <a:ext cx="731520" cy="731520"/>
           </a:xfrm>
           <a:prstGeom prst="rect">
@@ -25918,7 +27027,7 @@
         </p:blipFill>
         <p:spPr>
           <a:xfrm>
-            <a:off x="10972800" y="4526280"/>
+            <a:off x="10963656" y="3794760"/>
             <a:ext cx="731520" cy="731520"/>
           </a:xfrm>
           <a:prstGeom prst="rect">
@@ -25934,12 +27043,12 @@
         </p:nvSpPr>
         <p:spPr>
           <a:xfrm>
-            <a:off x="7818120" y="4846320"/>
-            <a:ext cx="3886200" cy="1554480"/>
+            <a:off x="8037576" y="4114800"/>
+            <a:ext cx="3657600" cy="1234440"/>
           </a:xfrm>
           <a:prstGeom prst="roundRect">
             <a:avLst>
-              <a:gd name="adj" fmla="val 8235"/>
+              <a:gd name="adj" fmla="val 10370"/>
             </a:avLst>
           </a:prstGeom>
           <a:ln w="38100">
@@ -25949,6 +27058,74 @@
             <a:prstDash val="solid"/>
           </a:ln>
         </p:spPr>
+      </p:sp>
+      <p:sp>
+        <p:nvSpPr>
+          <p:cNvPr id="22" name="e26_18"/>
+          <p:cNvSpPr/>
+          <p:nvPr/>
+        </p:nvSpPr>
+        <p:spPr>
+          <a:xfrm>
+            <a:off x="548640" y="5532120"/>
+            <a:ext cx="11100816" cy="868680"/>
+          </a:xfrm>
+          <a:prstGeom prst="roundRect">
+            <a:avLst>
+              <a:gd name="adj" fmla="val 14737"/>
+            </a:avLst>
+          </a:prstGeom>
+          <a:solidFill>
+            <a:srgbClr val="0B1A12">
+              <a:alpha val="95000"/>
+            </a:srgbClr>
+          </a:solidFill>
+          <a:ln w="19050">
+            <a:solidFill>
+              <a:srgbClr val="3FD17A"/>
+            </a:solidFill>
+            <a:prstDash val="solid"/>
+          </a:ln>
+        </p:spPr>
+      </p:sp>
+      <p:sp>
+        <p:nvSpPr>
+          <p:cNvPr id="23" name="e26_19"/>
+          <p:cNvSpPr txBox="1"/>
+          <p:nvPr/>
+        </p:nvSpPr>
+        <p:spPr>
+          <a:xfrm>
+            <a:off x="777240" y="5532120"/>
+            <a:ext cx="10698480" cy="868680"/>
+          </a:xfrm>
+          <a:prstGeom prst="rect">
+            <a:avLst/>
+          </a:prstGeom>
+          <a:noFill/>
+          <a:ln/>
+        </p:spPr>
+        <p:txBody>
+          <a:bodyPr wrap="square" lIns="0" tIns="0" rIns="0" bIns="0" rtlCol="0" anchor="ctr"/>
+          <a:lstStyle/>
+          <a:p>
+            <a:pPr algn="ctr" indent="0" marL="0">
+              <a:buNone/>
+            </a:pPr>
+            <a:r>
+              <a:rPr lang="en-US" sz="2000" b="1" dirty="0">
+                <a:solidFill>
+                  <a:srgbClr val="F5F2EC"/>
+                </a:solidFill>
+                <a:latin typeface="Calibri" pitchFamily="34" charset="0"/>
+                <a:ea typeface="Calibri" pitchFamily="34" charset="-122"/>
+                <a:cs typeface="Calibri" pitchFamily="34" charset="-120"/>
+              </a:rPr>
+              <a:t>Warnblinker · rechts ran · Motor aus · Schlüssel stecken · Tür offen · zum grünen Notausgang</a:t>
+            </a:r>
+            <a:endParaRPr lang="en-US" sz="2000" dirty="0"/>
+          </a:p>
+        </p:txBody>
       </p:sp>
     </p:spTree>
   </p:cSld>
@@ -26351,6 +27528,131 @@
                             </p:childTnLst>
                           </p:cTn>
                         </p:par>
+                        <p:par>
+                          <p:cTn id="32" fill="hold">
+                            <p:stCondLst>
+                              <p:cond delay="400"/>
+                            </p:stCondLst>
+                            <p:childTnLst>
+                              <p:par>
+                                <p:cTn id="33" presetID="42" presetClass="entr" presetSubtype="0" fill="hold" grpId="0" nodeType="afterEffect">
+                                  <p:stCondLst>
+                                    <p:cond delay="0"/>
+                                  </p:stCondLst>
+                                  <p:childTnLst>
+                                    <p:set>
+                                      <p:cBhvr>
+                                        <p:cTn id="34" dur="1" fill="hold">
+                                          <p:stCondLst>
+                                            <p:cond delay="0"/>
+                                          </p:stCondLst>
+                                        </p:cTn>
+                                        <p:tgtEl>
+                                          <p:spTgt spid="22"/>
+                                        </p:tgtEl>
+                                        <p:attrNameLst>
+                                          <p:attrName>style.visibility</p:attrName>
+                                        </p:attrNameLst>
+                                      </p:cBhvr>
+                                      <p:to>
+                                        <p:strVal val="visible"/>
+                                      </p:to>
+                                    </p:set>
+                                    <p:animEffect transition="in" filter="fade">
+                                      <p:cBhvr>
+                                        <p:cTn id="35" dur="600"/>
+                                        <p:tgtEl>
+                                          <p:spTgt spid="22"/>
+                                        </p:tgtEl>
+                                      </p:cBhvr>
+                                    </p:animEffect>
+                                    <p:anim calcmode="lin" valueType="num">
+                                      <p:cBhvr additive="base">
+                                        <p:cTn id="36" dur="600" fill="hold" decel="100000"/>
+                                        <p:tgtEl>
+                                          <p:spTgt spid="22"/>
+                                        </p:tgtEl>
+                                        <p:attrNameLst>
+                                          <p:attrName>ppt_x</p:attrName>
+                                        </p:attrNameLst>
+                                      </p:cBhvr>
+                                      <p:tavLst>
+                                        <p:tav tm="0">
+                                          <p:val>
+                                            <p:strVal val="#ppt_x"/>
+                                          </p:val>
+                                        </p:tav>
+                                        <p:tav tm="100000">
+                                          <p:val>
+                                            <p:strVal val="#ppt_x"/>
+                                          </p:val>
+                                        </p:tav>
+                                      </p:tavLst>
+                                    </p:anim>
+                                    <p:anim calcmode="lin" valueType="num">
+                                      <p:cBhvr additive="base">
+                                        <p:cTn id="37" dur="600" fill="hold" decel="100000"/>
+                                        <p:tgtEl>
+                                          <p:spTgt spid="22"/>
+                                        </p:tgtEl>
+                                        <p:attrNameLst>
+                                          <p:attrName>ppt_y</p:attrName>
+                                        </p:attrNameLst>
+                                      </p:cBhvr>
+                                      <p:tavLst>
+                                        <p:tav tm="0">
+                                          <p:val>
+                                            <p:strVal val="#ppt_y+.18"/>
+                                          </p:val>
+                                        </p:tav>
+                                        <p:tav tm="100000">
+                                          <p:val>
+                                            <p:strVal val="#ppt_y"/>
+                                          </p:val>
+                                        </p:tav>
+                                      </p:tavLst>
+                                    </p:anim>
+                                  </p:childTnLst>
+                                </p:cTn>
+                              </p:par>
+                              <p:par>
+                                <p:cTn id="38" presetID="10" presetClass="entr" presetSubtype="0" fill="hold" grpId="0" nodeType="withEffect">
+                                  <p:stCondLst>
+                                    <p:cond delay="0"/>
+                                  </p:stCondLst>
+                                  <p:childTnLst>
+                                    <p:set>
+                                      <p:cBhvr>
+                                        <p:cTn id="39" dur="1" fill="hold">
+                                          <p:stCondLst>
+                                            <p:cond delay="0"/>
+                                          </p:stCondLst>
+                                        </p:cTn>
+                                        <p:tgtEl>
+                                          <p:spTgt spid="23"/>
+                                        </p:tgtEl>
+                                        <p:attrNameLst>
+                                          <p:attrName>style.visibility</p:attrName>
+                                        </p:attrNameLst>
+                                      </p:cBhvr>
+                                      <p:to>
+                                        <p:strVal val="visible"/>
+                                      </p:to>
+                                    </p:set>
+                                    <p:animEffect transition="in" filter="fade">
+                                      <p:cBhvr>
+                                        <p:cTn id="40" dur="400"/>
+                                        <p:tgtEl>
+                                          <p:spTgt spid="23"/>
+                                        </p:tgtEl>
+                                      </p:cBhvr>
+                                    </p:animEffect>
+                                  </p:childTnLst>
+                                </p:cTn>
+                              </p:par>
+                            </p:childTnLst>
+                          </p:cTn>
+                        </p:par>
                       </p:childTnLst>
                     </p:cTn>
                   </p:par>
@@ -26377,6 +27679,8 @@
     </p:tnLst>
     <p:bldLst>
       <p:bldP spid="21" grpId="0" animBg="1"/>
+      <p:bldP spid="22" grpId="0" animBg="1"/>
+      <p:bldP spid="23" grpId="0" animBg="1"/>
     </p:bldLst>
   </p:timing>
 </p:sld>
@@ -26544,7 +27848,7 @@
                 <a:ea typeface="Cambria" pitchFamily="34" charset="-122"/>
                 <a:cs typeface="Cambria" pitchFamily="34" charset="-120"/>
               </a:rPr>
-              <a:t>Stau, Panne, Brand</a:t>
+              <a:t>Stau und Panne</a:t>
             </a:r>
             <a:endParaRPr lang="en-US" sz="4400" dirty="0"/>
           </a:p>
@@ -26559,11 +27863,11 @@
         <p:spPr>
           <a:xfrm>
             <a:off x="731520" y="2377440"/>
-            <a:ext cx="3429000" cy="3291840"/>
+            <a:ext cx="5257800" cy="2651760"/>
           </a:xfrm>
           <a:prstGeom prst="roundRect">
             <a:avLst>
-              <a:gd name="adj" fmla="val 3889"/>
+              <a:gd name="adj" fmla="val 4828"/>
             </a:avLst>
           </a:prstGeom>
           <a:solidFill>
@@ -26610,7 +27914,7 @@
         <p:spPr>
           <a:xfrm>
             <a:off x="1691640" y="2578608"/>
-            <a:ext cx="2286000" cy="603504"/>
+            <a:ext cx="4023360" cy="603504"/>
           </a:xfrm>
           <a:prstGeom prst="rect">
             <a:avLst/>
@@ -26626,7 +27930,7 @@
               <a:buNone/>
             </a:pPr>
             <a:r>
-              <a:rPr lang="en-US" sz="3000" b="1" dirty="0">
+              <a:rPr lang="en-US" sz="3200" b="1" dirty="0">
                 <a:solidFill>
                   <a:srgbClr val="FFB547"/>
                 </a:solidFill>
@@ -26636,7 +27940,7 @@
               </a:rPr>
               <a:t>Stau</a:t>
             </a:r>
-            <a:endParaRPr lang="en-US" sz="3000" dirty="0"/>
+            <a:endParaRPr lang="en-US" sz="3200" dirty="0"/>
           </a:p>
         </p:txBody>
       </p:sp>
@@ -26648,8 +27952,8 @@
         </p:nvSpPr>
         <p:spPr>
           <a:xfrm>
-            <a:off x="1005840" y="3429000"/>
-            <a:ext cx="2971800" cy="2651760"/>
+            <a:off x="1097280" y="3429000"/>
+            <a:ext cx="4663440" cy="2011680"/>
           </a:xfrm>
           <a:prstGeom prst="rect">
             <a:avLst/>
@@ -26663,13 +27967,13 @@
           <a:p>
             <a:pPr algn="l" marL="342900" indent="-342900">
               <a:spcAft>
-                <a:spcPts val="1000"/>
+                <a:spcPts val="1200"/>
               </a:spcAft>
               <a:buSzPct val="100000"/>
               <a:buChar char="•"/>
             </a:pPr>
             <a:r>
-              <a:rPr lang="en-US" sz="1800" dirty="0">
+              <a:rPr lang="en-US" sz="2400" dirty="0">
                 <a:solidFill>
                   <a:srgbClr val="F5F2EC"/>
                 </a:solidFill>
@@ -26679,18 +27983,18 @@
               </a:rPr>
               <a:t>Warnblinker an</a:t>
             </a:r>
-            <a:endParaRPr lang="en-US" sz="1800" dirty="0"/>
+            <a:endParaRPr lang="en-US" sz="2400" dirty="0"/>
           </a:p>
           <a:p>
             <a:pPr algn="l" marL="342900" indent="-342900">
               <a:spcAft>
-                <a:spcPts val="1000"/>
+                <a:spcPts val="1200"/>
               </a:spcAft>
               <a:buSzPct val="100000"/>
               <a:buChar char="•"/>
             </a:pPr>
             <a:r>
-              <a:rPr lang="en-US" sz="1800" dirty="0">
+              <a:rPr lang="en-US" sz="2400" dirty="0">
                 <a:solidFill>
                   <a:srgbClr val="F5F2EC"/>
                 </a:solidFill>
@@ -26700,18 +28004,18 @@
               </a:rPr>
               <a:t>Mind. 5 m Abstand</a:t>
             </a:r>
-            <a:endParaRPr lang="en-US" sz="1800" dirty="0"/>
+            <a:endParaRPr lang="en-US" sz="2400" dirty="0"/>
           </a:p>
           <a:p>
             <a:pPr algn="l" marL="342900" indent="-342900">
               <a:spcAft>
-                <a:spcPts val="1000"/>
+                <a:spcPts val="1200"/>
               </a:spcAft>
               <a:buSzPct val="100000"/>
               <a:buChar char="•"/>
             </a:pPr>
             <a:r>
-              <a:rPr lang="en-US" sz="1800" dirty="0">
+              <a:rPr lang="en-US" sz="2400" dirty="0">
                 <a:solidFill>
                   <a:srgbClr val="F5F2EC"/>
                 </a:solidFill>
@@ -26719,30 +28023,9 @@
                 <a:ea typeface="Calibri" pitchFamily="34" charset="-122"/>
                 <a:cs typeface="Calibri" pitchFamily="34" charset="-120"/>
               </a:rPr>
-              <a:t>Rettungsgasse bilden</a:t>
+              <a:t>Langer Stillstand: Motor aus</a:t>
             </a:r>
-            <a:endParaRPr lang="en-US" sz="1800" dirty="0"/>
-          </a:p>
-          <a:p>
-            <a:pPr algn="l" marL="342900" indent="-342900">
-              <a:spcAft>
-                <a:spcPts val="1000"/>
-              </a:spcAft>
-              <a:buSzPct val="100000"/>
-              <a:buChar char="•"/>
-            </a:pPr>
-            <a:r>
-              <a:rPr lang="en-US" sz="1800" dirty="0">
-                <a:solidFill>
-                  <a:srgbClr val="F5F2EC"/>
-                </a:solidFill>
-                <a:latin typeface="Calibri" pitchFamily="34" charset="0"/>
-                <a:ea typeface="Calibri" pitchFamily="34" charset="-122"/>
-                <a:cs typeface="Calibri" pitchFamily="34" charset="-120"/>
-              </a:rPr>
-              <a:t>Längerer Stillstand: Motor aus</a:t>
-            </a:r>
-            <a:endParaRPr lang="en-US" sz="1800" dirty="0"/>
+            <a:endParaRPr lang="en-US" sz="2400" dirty="0"/>
           </a:p>
         </p:txBody>
       </p:sp>
@@ -26754,12 +28037,12 @@
         </p:nvSpPr>
         <p:spPr>
           <a:xfrm>
-            <a:off x="4361688" y="2377440"/>
-            <a:ext cx="3429000" cy="3291840"/>
+            <a:off x="6172200" y="2377440"/>
+            <a:ext cx="5257800" cy="2651760"/>
           </a:xfrm>
           <a:prstGeom prst="roundRect">
             <a:avLst>
-              <a:gd name="adj" fmla="val 3889"/>
+              <a:gd name="adj" fmla="val 4828"/>
             </a:avLst>
           </a:prstGeom>
           <a:solidFill>
@@ -26789,7 +28072,7 @@
         </p:blipFill>
         <p:spPr>
           <a:xfrm>
-            <a:off x="4636008" y="2606040"/>
+            <a:off x="6446520" y="2606040"/>
             <a:ext cx="548640" cy="548640"/>
           </a:xfrm>
           <a:prstGeom prst="rect">
@@ -26805,8 +28088,8 @@
         </p:nvSpPr>
         <p:spPr>
           <a:xfrm>
-            <a:off x="5321808" y="2578608"/>
-            <a:ext cx="2286000" cy="603504"/>
+            <a:off x="7132320" y="2578608"/>
+            <a:ext cx="4023360" cy="603504"/>
           </a:xfrm>
           <a:prstGeom prst="rect">
             <a:avLst/>
@@ -26822,7 +28105,7 @@
               <a:buNone/>
             </a:pPr>
             <a:r>
-              <a:rPr lang="en-US" sz="3000" b="1" dirty="0">
+              <a:rPr lang="en-US" sz="3200" b="1" dirty="0">
                 <a:solidFill>
                   <a:srgbClr val="FF7A1A"/>
                 </a:solidFill>
@@ -26832,7 +28115,7 @@
               </a:rPr>
               <a:t>Panne</a:t>
             </a:r>
-            <a:endParaRPr lang="en-US" sz="3000" dirty="0"/>
+            <a:endParaRPr lang="en-US" sz="3200" dirty="0"/>
           </a:p>
         </p:txBody>
       </p:sp>
@@ -26844,8 +28127,8 @@
         </p:nvSpPr>
         <p:spPr>
           <a:xfrm>
-            <a:off x="4636008" y="3429000"/>
-            <a:ext cx="2971800" cy="2651760"/>
+            <a:off x="6537960" y="3429000"/>
+            <a:ext cx="4663440" cy="2011680"/>
           </a:xfrm>
           <a:prstGeom prst="rect">
             <a:avLst/>
@@ -26859,13 +28142,13 @@
           <a:p>
             <a:pPr algn="l" marL="342900" indent="-342900">
               <a:spcAft>
-                <a:spcPts val="1000"/>
+                <a:spcPts val="1200"/>
               </a:spcAft>
               <a:buSzPct val="100000"/>
               <a:buChar char="•"/>
             </a:pPr>
             <a:r>
-              <a:rPr lang="en-US" sz="1800" dirty="0">
+              <a:rPr lang="en-US" sz="2400" dirty="0">
                 <a:solidFill>
                   <a:srgbClr val="F5F2EC"/>
                 </a:solidFill>
@@ -26873,20 +28156,20 @@
                 <a:ea typeface="Calibri" pitchFamily="34" charset="-122"/>
                 <a:cs typeface="Calibri" pitchFamily="34" charset="-120"/>
               </a:rPr>
-              <a:t>Warnblinker an</a:t>
+              <a:t>Warnblinker, Warnweste</a:t>
             </a:r>
-            <a:endParaRPr lang="en-US" sz="1800" dirty="0"/>
+            <a:endParaRPr lang="en-US" sz="2400" dirty="0"/>
           </a:p>
           <a:p>
             <a:pPr algn="l" marL="342900" indent="-342900">
               <a:spcAft>
-                <a:spcPts val="1000"/>
+                <a:spcPts val="1200"/>
               </a:spcAft>
               <a:buSzPct val="100000"/>
               <a:buChar char="•"/>
             </a:pPr>
             <a:r>
-              <a:rPr lang="en-US" sz="1800" dirty="0">
+              <a:rPr lang="en-US" sz="2400" dirty="0">
                 <a:solidFill>
                   <a:srgbClr val="F5F2EC"/>
                 </a:solidFill>
@@ -26894,41 +28177,20 @@
                 <a:ea typeface="Calibri" pitchFamily="34" charset="-122"/>
                 <a:cs typeface="Calibri" pitchFamily="34" charset="-120"/>
               </a:rPr>
-              <a:t>In die Pannenbucht</a:t>
+              <a:t>Ab in die Pannenbucht</a:t>
             </a:r>
-            <a:endParaRPr lang="en-US" sz="1800" dirty="0"/>
+            <a:endParaRPr lang="en-US" sz="2400" dirty="0"/>
           </a:p>
           <a:p>
             <a:pPr algn="l" marL="342900" indent="-342900">
               <a:spcAft>
-                <a:spcPts val="1000"/>
+                <a:spcPts val="1200"/>
               </a:spcAft>
               <a:buSzPct val="100000"/>
               <a:buChar char="•"/>
             </a:pPr>
             <a:r>
-              <a:rPr lang="en-US" sz="1800" dirty="0">
-                <a:solidFill>
-                  <a:srgbClr val="F5F2EC"/>
-                </a:solidFill>
-                <a:latin typeface="Calibri" pitchFamily="34" charset="0"/>
-                <a:ea typeface="Calibri" pitchFamily="34" charset="-122"/>
-                <a:cs typeface="Calibri" pitchFamily="34" charset="-120"/>
-              </a:rPr>
-              <a:t>Warnweste an</a:t>
-            </a:r>
-            <a:endParaRPr lang="en-US" sz="1800" dirty="0"/>
-          </a:p>
-          <a:p>
-            <a:pPr algn="l" marL="342900" indent="-342900">
-              <a:spcAft>
-                <a:spcPts val="1000"/>
-              </a:spcAft>
-              <a:buSzPct val="100000"/>
-              <a:buChar char="•"/>
-            </a:pPr>
-            <a:r>
-              <a:rPr lang="en-US" sz="1800" dirty="0">
+              <a:rPr lang="en-US" sz="2400" dirty="0">
                 <a:solidFill>
                   <a:srgbClr val="F5F2EC"/>
                 </a:solidFill>
@@ -26938,203 +28200,7 @@
               </a:rPr>
               <a:t>Notrufstation nutzen</a:t>
             </a:r>
-            <a:endParaRPr lang="en-US" sz="1800" dirty="0"/>
-          </a:p>
-        </p:txBody>
-      </p:sp>
-      <p:sp>
-        <p:nvSpPr>
-          <p:cNvPr id="15" name="e27_11"/>
-          <p:cNvSpPr/>
-          <p:nvPr/>
-        </p:nvSpPr>
-        <p:spPr>
-          <a:xfrm>
-            <a:off x="7991856" y="2377440"/>
-            <a:ext cx="3429000" cy="3291840"/>
-          </a:xfrm>
-          <a:prstGeom prst="roundRect">
-            <a:avLst>
-              <a:gd name="adj" fmla="val 3889"/>
-            </a:avLst>
-          </a:prstGeom>
-          <a:solidFill>
-            <a:srgbClr val="12161E"/>
-          </a:solidFill>
-          <a:ln w="19050">
-            <a:solidFill>
-              <a:srgbClr val="FF4D4D"/>
-            </a:solidFill>
-            <a:prstDash val="solid"/>
-          </a:ln>
-        </p:spPr>
-      </p:sp>
-      <p:pic>
-        <p:nvPicPr>
-          <p:cNvPr id="16" name="e27_12" descr="preencoded.png">    </p:cNvPr>
-          <p:cNvPicPr>
-            <a:picLocks noChangeAspect="1"/>
-          </p:cNvPicPr>
-          <p:nvPr/>
-        </p:nvPicPr>
-        <p:blipFill>
-          <a:blip r:embed="rId4"/>
-          <a:stretch>
-            <a:fillRect/>
-          </a:stretch>
-        </p:blipFill>
-        <p:spPr>
-          <a:xfrm>
-            <a:off x="8266176" y="2606040"/>
-            <a:ext cx="548640" cy="548640"/>
-          </a:xfrm>
-          <a:prstGeom prst="rect">
-            <a:avLst/>
-          </a:prstGeom>
-        </p:spPr>
-      </p:pic>
-      <p:sp>
-        <p:nvSpPr>
-          <p:cNvPr id="17" name="e27_13"/>
-          <p:cNvSpPr txBox="1"/>
-          <p:nvPr/>
-        </p:nvSpPr>
-        <p:spPr>
-          <a:xfrm>
-            <a:off x="8951976" y="2578608"/>
-            <a:ext cx="2286000" cy="603504"/>
-          </a:xfrm>
-          <a:prstGeom prst="rect">
-            <a:avLst/>
-          </a:prstGeom>
-          <a:noFill/>
-          <a:ln/>
-        </p:spPr>
-        <p:txBody>
-          <a:bodyPr wrap="square" lIns="0" tIns="0" rIns="0" bIns="0" rtlCol="0" anchor="ctr"/>
-          <a:lstStyle/>
-          <a:p>
-            <a:pPr algn="l" indent="0" marL="0">
-              <a:buNone/>
-            </a:pPr>
-            <a:r>
-              <a:rPr lang="en-US" sz="3000" b="1" dirty="0">
-                <a:solidFill>
-                  <a:srgbClr val="FF4D4D"/>
-                </a:solidFill>
-                <a:latin typeface="Cambria" pitchFamily="34" charset="0"/>
-                <a:ea typeface="Cambria" pitchFamily="34" charset="-122"/>
-                <a:cs typeface="Cambria" pitchFamily="34" charset="-120"/>
-              </a:rPr>
-              <a:t>Brand</a:t>
-            </a:r>
-            <a:endParaRPr lang="en-US" sz="3000" dirty="0"/>
-          </a:p>
-        </p:txBody>
-      </p:sp>
-      <p:sp>
-        <p:nvSpPr>
-          <p:cNvPr id="18" name="e27_14"/>
-          <p:cNvSpPr txBox="1"/>
-          <p:nvPr/>
-        </p:nvSpPr>
-        <p:spPr>
-          <a:xfrm>
-            <a:off x="8266176" y="3429000"/>
-            <a:ext cx="2971800" cy="2651760"/>
-          </a:xfrm>
-          <a:prstGeom prst="rect">
-            <a:avLst/>
-          </a:prstGeom>
-          <a:noFill/>
-          <a:ln/>
-        </p:spPr>
-        <p:txBody>
-          <a:bodyPr wrap="square" lIns="0" tIns="0" rIns="0" bIns="0" rtlCol="0" anchor="t"/>
-          <a:lstStyle/>
-          <a:p>
-            <a:pPr algn="l" marL="342900" indent="-342900">
-              <a:spcAft>
-                <a:spcPts val="1000"/>
-              </a:spcAft>
-              <a:buSzPct val="100000"/>
-              <a:buChar char="•"/>
-            </a:pPr>
-            <a:r>
-              <a:rPr lang="en-US" sz="1800" dirty="0">
-                <a:solidFill>
-                  <a:srgbClr val="F5F2EC"/>
-                </a:solidFill>
-                <a:latin typeface="Calibri" pitchFamily="34" charset="0"/>
-                <a:ea typeface="Calibri" pitchFamily="34" charset="-122"/>
-                <a:cs typeface="Calibri" pitchFamily="34" charset="-120"/>
-              </a:rPr>
-              <a:t>Motor aus</a:t>
-            </a:r>
-            <a:endParaRPr lang="en-US" sz="1800" dirty="0"/>
-          </a:p>
-          <a:p>
-            <a:pPr algn="l" marL="342900" indent="-342900">
-              <a:spcAft>
-                <a:spcPts val="1000"/>
-              </a:spcAft>
-              <a:buSzPct val="100000"/>
-              <a:buChar char="•"/>
-            </a:pPr>
-            <a:r>
-              <a:rPr lang="en-US" sz="1800" dirty="0">
-                <a:solidFill>
-                  <a:srgbClr val="F5F2EC"/>
-                </a:solidFill>
-                <a:latin typeface="Calibri" pitchFamily="34" charset="0"/>
-                <a:ea typeface="Calibri" pitchFamily="34" charset="-122"/>
-                <a:cs typeface="Calibri" pitchFamily="34" charset="-120"/>
-              </a:rPr>
-              <a:t>Schlüssel stecken lassen</a:t>
-            </a:r>
-            <a:endParaRPr lang="en-US" sz="1800" dirty="0"/>
-          </a:p>
-          <a:p>
-            <a:pPr algn="l" marL="342900" indent="-342900">
-              <a:spcAft>
-                <a:spcPts val="1000"/>
-              </a:spcAft>
-              <a:buSzPct val="100000"/>
-              <a:buChar char="•"/>
-            </a:pPr>
-            <a:r>
-              <a:rPr lang="en-US" sz="1800" dirty="0">
-                <a:solidFill>
-                  <a:srgbClr val="F5F2EC"/>
-                </a:solidFill>
-                <a:latin typeface="Calibri" pitchFamily="34" charset="0"/>
-                <a:ea typeface="Calibri" pitchFamily="34" charset="-122"/>
-                <a:cs typeface="Calibri" pitchFamily="34" charset="-120"/>
-              </a:rPr>
-              <a:t>Tür nicht abschließen</a:t>
-            </a:r>
-            <a:endParaRPr lang="en-US" sz="1800" dirty="0"/>
-          </a:p>
-          <a:p>
-            <a:pPr algn="l" marL="342900" indent="-342900">
-              <a:spcAft>
-                <a:spcPts val="1000"/>
-              </a:spcAft>
-              <a:buSzPct val="100000"/>
-              <a:buChar char="•"/>
-            </a:pPr>
-            <a:r>
-              <a:rPr lang="en-US" sz="1800" dirty="0">
-                <a:solidFill>
-                  <a:srgbClr val="F5F2EC"/>
-                </a:solidFill>
-                <a:latin typeface="Calibri" pitchFamily="34" charset="0"/>
-                <a:ea typeface="Calibri" pitchFamily="34" charset="-122"/>
-                <a:cs typeface="Calibri" pitchFamily="34" charset="-120"/>
-              </a:rPr>
-              <a:t>Weg vom Rauch zum Notausgang</a:t>
-            </a:r>
-            <a:endParaRPr lang="en-US" sz="1800" dirty="0"/>
+            <a:endParaRPr lang="en-US" sz="2400" dirty="0"/>
           </a:p>
         </p:txBody>
       </p:sp>
@@ -27642,256 +28708,6 @@
                                         <p:cTn id="38" dur="400"/>
                                         <p:tgtEl>
                                           <p:spTgt spid="14"/>
-                                        </p:tgtEl>
-                                      </p:cBhvr>
-                                    </p:animEffect>
-                                  </p:childTnLst>
-                                </p:cTn>
-                              </p:par>
-                            </p:childTnLst>
-                          </p:cTn>
-                        </p:par>
-                      </p:childTnLst>
-                    </p:cTn>
-                  </p:par>
-                  <p:par>
-                    <p:cTn id="39" fill="hold">
-                      <p:stCondLst>
-                        <p:cond delay="indefinite"/>
-                      </p:stCondLst>
-                      <p:childTnLst>
-                        <p:par>
-                          <p:cTn id="40" fill="hold">
-                            <p:stCondLst>
-                              <p:cond delay="0"/>
-                            </p:stCondLst>
-                            <p:childTnLst>
-                              <p:par>
-                                <p:cTn id="41" presetID="42" presetClass="entr" presetSubtype="0" fill="hold" grpId="0" nodeType="clickEffect">
-                                  <p:stCondLst>
-                                    <p:cond delay="0"/>
-                                  </p:stCondLst>
-                                  <p:childTnLst>
-                                    <p:set>
-                                      <p:cBhvr>
-                                        <p:cTn id="42" dur="1" fill="hold">
-                                          <p:stCondLst>
-                                            <p:cond delay="0"/>
-                                          </p:stCondLst>
-                                        </p:cTn>
-                                        <p:tgtEl>
-                                          <p:spTgt spid="15"/>
-                                        </p:tgtEl>
-                                        <p:attrNameLst>
-                                          <p:attrName>style.visibility</p:attrName>
-                                        </p:attrNameLst>
-                                      </p:cBhvr>
-                                      <p:to>
-                                        <p:strVal val="visible"/>
-                                      </p:to>
-                                    </p:set>
-                                    <p:animEffect transition="in" filter="fade">
-                                      <p:cBhvr>
-                                        <p:cTn id="43" dur="650"/>
-                                        <p:tgtEl>
-                                          <p:spTgt spid="15"/>
-                                        </p:tgtEl>
-                                      </p:cBhvr>
-                                    </p:animEffect>
-                                    <p:anim calcmode="lin" valueType="num">
-                                      <p:cBhvr additive="base">
-                                        <p:cTn id="44" dur="650" fill="hold" decel="100000"/>
-                                        <p:tgtEl>
-                                          <p:spTgt spid="15"/>
-                                        </p:tgtEl>
-                                        <p:attrNameLst>
-                                          <p:attrName>ppt_x</p:attrName>
-                                        </p:attrNameLst>
-                                      </p:cBhvr>
-                                      <p:tavLst>
-                                        <p:tav tm="0">
-                                          <p:val>
-                                            <p:strVal val="#ppt_x"/>
-                                          </p:val>
-                                        </p:tav>
-                                        <p:tav tm="100000">
-                                          <p:val>
-                                            <p:strVal val="#ppt_x"/>
-                                          </p:val>
-                                        </p:tav>
-                                      </p:tavLst>
-                                    </p:anim>
-                                    <p:anim calcmode="lin" valueType="num">
-                                      <p:cBhvr additive="base">
-                                        <p:cTn id="45" dur="650" fill="hold" decel="100000"/>
-                                        <p:tgtEl>
-                                          <p:spTgt spid="15"/>
-                                        </p:tgtEl>
-                                        <p:attrNameLst>
-                                          <p:attrName>ppt_y</p:attrName>
-                                        </p:attrNameLst>
-                                      </p:cBhvr>
-                                      <p:tavLst>
-                                        <p:tav tm="0">
-                                          <p:val>
-                                            <p:strVal val="#ppt_y+.18"/>
-                                          </p:val>
-                                        </p:tav>
-                                        <p:tav tm="100000">
-                                          <p:val>
-                                            <p:strVal val="#ppt_y"/>
-                                          </p:val>
-                                        </p:tav>
-                                      </p:tavLst>
-                                    </p:anim>
-                                  </p:childTnLst>
-                                </p:cTn>
-                              </p:par>
-                              <p:par>
-                                <p:cTn id="46" presetID="53" presetClass="entr" presetSubtype="16" fill="hold" nodeType="withEffect">
-                                  <p:stCondLst>
-                                    <p:cond delay="0"/>
-                                  </p:stCondLst>
-                                  <p:childTnLst>
-                                    <p:set>
-                                      <p:cBhvr>
-                                        <p:cTn id="47" dur="1" fill="hold">
-                                          <p:stCondLst>
-                                            <p:cond delay="0"/>
-                                          </p:stCondLst>
-                                        </p:cTn>
-                                        <p:tgtEl>
-                                          <p:spTgt spid="16"/>
-                                        </p:tgtEl>
-                                        <p:attrNameLst>
-                                          <p:attrName>style.visibility</p:attrName>
-                                        </p:attrNameLst>
-                                      </p:cBhvr>
-                                      <p:to>
-                                        <p:strVal val="visible"/>
-                                      </p:to>
-                                    </p:set>
-                                    <p:anim calcmode="lin" valueType="num">
-                                      <p:cBhvr additive="base">
-                                        <p:cTn id="48" dur="400" fill="hold" decel="100000"/>
-                                        <p:tgtEl>
-                                          <p:spTgt spid="16"/>
-                                        </p:tgtEl>
-                                        <p:attrNameLst>
-                                          <p:attrName>ppt_w</p:attrName>
-                                        </p:attrNameLst>
-                                      </p:cBhvr>
-                                      <p:tavLst>
-                                        <p:tav tm="0">
-                                          <p:val>
-                                            <p:strVal val="0"/>
-                                          </p:val>
-                                        </p:tav>
-                                        <p:tav tm="100000">
-                                          <p:val>
-                                            <p:strVal val="#ppt_w"/>
-                                          </p:val>
-                                        </p:tav>
-                                      </p:tavLst>
-                                    </p:anim>
-                                    <p:anim calcmode="lin" valueType="num">
-                                      <p:cBhvr additive="base">
-                                        <p:cTn id="49" dur="400" fill="hold" decel="100000"/>
-                                        <p:tgtEl>
-                                          <p:spTgt spid="16"/>
-                                        </p:tgtEl>
-                                        <p:attrNameLst>
-                                          <p:attrName>ppt_h</p:attrName>
-                                        </p:attrNameLst>
-                                      </p:cBhvr>
-                                      <p:tavLst>
-                                        <p:tav tm="0">
-                                          <p:val>
-                                            <p:strVal val="0"/>
-                                          </p:val>
-                                        </p:tav>
-                                        <p:tav tm="100000">
-                                          <p:val>
-                                            <p:strVal val="#ppt_h"/>
-                                          </p:val>
-                                        </p:tav>
-                                      </p:tavLst>
-                                    </p:anim>
-                                    <p:animEffect transition="in" filter="fade">
-                                      <p:cBhvr>
-                                        <p:cTn id="50" dur="400"/>
-                                        <p:tgtEl>
-                                          <p:spTgt spid="16"/>
-                                        </p:tgtEl>
-                                      </p:cBhvr>
-                                    </p:animEffect>
-                                  </p:childTnLst>
-                                </p:cTn>
-                              </p:par>
-                              <p:par>
-                                <p:cTn id="51" presetID="10" presetClass="entr" presetSubtype="0" fill="hold" grpId="0" nodeType="withEffect">
-                                  <p:stCondLst>
-                                    <p:cond delay="0"/>
-                                  </p:stCondLst>
-                                  <p:childTnLst>
-                                    <p:set>
-                                      <p:cBhvr>
-                                        <p:cTn id="52" dur="1" fill="hold">
-                                          <p:stCondLst>
-                                            <p:cond delay="0"/>
-                                          </p:stCondLst>
-                                        </p:cTn>
-                                        <p:tgtEl>
-                                          <p:spTgt spid="17"/>
-                                        </p:tgtEl>
-                                        <p:attrNameLst>
-                                          <p:attrName>style.visibility</p:attrName>
-                                        </p:attrNameLst>
-                                      </p:cBhvr>
-                                      <p:to>
-                                        <p:strVal val="visible"/>
-                                      </p:to>
-                                    </p:set>
-                                    <p:animEffect transition="in" filter="fade">
-                                      <p:cBhvr>
-                                        <p:cTn id="53" dur="400"/>
-                                        <p:tgtEl>
-                                          <p:spTgt spid="17"/>
-                                        </p:tgtEl>
-                                      </p:cBhvr>
-                                    </p:animEffect>
-                                  </p:childTnLst>
-                                </p:cTn>
-                              </p:par>
-                              <p:par>
-                                <p:cTn id="54" presetID="10" presetClass="entr" presetSubtype="0" fill="hold" grpId="0" nodeType="withEffect">
-                                  <p:stCondLst>
-                                    <p:cond delay="0"/>
-                                  </p:stCondLst>
-                                  <p:childTnLst>
-                                    <p:set>
-                                      <p:cBhvr>
-                                        <p:cTn id="55" dur="1" fill="hold">
-                                          <p:stCondLst>
-                                            <p:cond delay="0"/>
-                                          </p:stCondLst>
-                                        </p:cTn>
-                                        <p:tgtEl>
-                                          <p:spTgt spid="18"/>
-                                        </p:tgtEl>
-                                        <p:attrNameLst>
-                                          <p:attrName>style.visibility</p:attrName>
-                                        </p:attrNameLst>
-                                      </p:cBhvr>
-                                      <p:to>
-                                        <p:strVal val="visible"/>
-                                      </p:to>
-                                    </p:set>
-                                    <p:animEffect transition="in" filter="fade">
-                                      <p:cBhvr>
-                                        <p:cTn id="56" dur="400"/>
-                                        <p:tgtEl>
-                                          <p:spTgt spid="18"/>
                                         </p:tgtEl>
                                       </p:cBhvr>
                                     </p:animEffect>
@@ -27932,9 +28748,6 @@
       <p:bldP spid="11" grpId="0" animBg="1"/>
       <p:bldP spid="13" grpId="0" animBg="1"/>
       <p:bldP spid="14" grpId="0" animBg="1"/>
-      <p:bldP spid="15" grpId="0" animBg="1"/>
-      <p:bldP spid="17" grpId="0" animBg="1"/>
-      <p:bldP spid="18" grpId="0" animBg="1"/>
     </p:bldLst>
   </p:timing>
 </p:sld>
@@ -29961,8 +30774,8 @@
         </p:nvSpPr>
         <p:spPr>
           <a:xfrm>
-            <a:off x="1097280" y="6355080"/>
-            <a:ext cx="2194560" cy="320040"/>
+            <a:off x="1097280" y="6336792"/>
+            <a:ext cx="2194560" cy="365760"/>
           </a:xfrm>
           <a:prstGeom prst="rect">
             <a:avLst/>
@@ -29978,7 +30791,7 @@
               <a:buNone/>
             </a:pPr>
             <a:r>
-              <a:rPr lang="en-US" sz="1500" b="1" dirty="0">
+              <a:rPr lang="en-US" sz="1800" b="1" dirty="0">
                 <a:solidFill>
                   <a:srgbClr val="FFB547"/>
                 </a:solidFill>
@@ -29988,7 +30801,7 @@
               </a:rPr>
               <a:t>Reaktion 24 m</a:t>
             </a:r>
-            <a:endParaRPr lang="en-US" sz="1500" dirty="0"/>
+            <a:endParaRPr lang="en-US" sz="1800" dirty="0"/>
           </a:p>
         </p:txBody>
       </p:sp>
@@ -30020,8 +30833,8 @@
         </p:nvSpPr>
         <p:spPr>
           <a:xfrm>
-            <a:off x="2944368" y="6355080"/>
-            <a:ext cx="3840480" cy="320040"/>
+            <a:off x="2944368" y="6336792"/>
+            <a:ext cx="4389120" cy="365760"/>
           </a:xfrm>
           <a:prstGeom prst="rect">
             <a:avLst/>
@@ -30037,7 +30850,7 @@
               <a:buNone/>
             </a:pPr>
             <a:r>
-              <a:rPr lang="en-US" sz="1500" b="1" dirty="0">
+              <a:rPr lang="en-US" sz="1800" b="1" dirty="0">
                 <a:solidFill>
                   <a:srgbClr val="FF4D4D"/>
                 </a:solidFill>
@@ -30047,7 +30860,7 @@
               </a:rPr>
               <a:t>+ Gefahrbremsung 32 m = 56 m</a:t>
             </a:r>
-            <a:endParaRPr lang="en-US" sz="1500" dirty="0"/>
+            <a:endParaRPr lang="en-US" sz="1800" dirty="0"/>
           </a:p>
         </p:txBody>
       </p:sp>
@@ -30547,6 +31360,1093 @@
             <a:r>
               <a:rPr lang="en-US" sz="1300" b="1" spc="500" kern="0" dirty="0">
                 <a:solidFill>
+                  <a:srgbClr val="FF4D4D"/>
+                </a:solidFill>
+                <a:latin typeface="Calibri" pitchFamily="34" charset="0"/>
+                <a:ea typeface="Calibri" pitchFamily="34" charset="-122"/>
+                <a:cs typeface="Calibri" pitchFamily="34" charset="-120"/>
+              </a:rPr>
+              <a:t>DAS KOMMT NOCH</a:t>
+            </a:r>
+            <a:endParaRPr lang="en-US" sz="1300" dirty="0"/>
+          </a:p>
+        </p:txBody>
+      </p:sp>
+      <p:sp>
+        <p:nvSpPr>
+          <p:cNvPr id="6" name="e30_2"/>
+          <p:cNvSpPr txBox="1"/>
+          <p:nvPr/>
+        </p:nvSpPr>
+        <p:spPr>
+          <a:xfrm>
+            <a:off x="685800" y="1188720"/>
+            <a:ext cx="10972800" cy="914400"/>
+          </a:xfrm>
+          <a:prstGeom prst="rect">
+            <a:avLst/>
+          </a:prstGeom>
+          <a:noFill/>
+          <a:ln/>
+        </p:spPr>
+        <p:txBody>
+          <a:bodyPr wrap="square" lIns="0" tIns="0" rIns="0" bIns="0" rtlCol="0" anchor="t"/>
+          <a:lstStyle/>
+          <a:p>
+            <a:pPr algn="l" indent="0" marL="0">
+              <a:lnSpc>
+                <a:spcPct val="95000"/>
+              </a:lnSpc>
+              <a:buNone/>
+            </a:pPr>
+            <a:r>
+              <a:rPr lang="en-US" sz="4400" b="1" dirty="0">
+                <a:solidFill>
+                  <a:srgbClr val="F5F2EC"/>
+                </a:solidFill>
+                <a:latin typeface="Cambria" pitchFamily="34" charset="0"/>
+                <a:ea typeface="Cambria" pitchFamily="34" charset="-122"/>
+                <a:cs typeface="Cambria" pitchFamily="34" charset="-120"/>
+              </a:rPr>
+              <a:t>Das gehört auch zu Lektion 11</a:t>
+            </a:r>
+            <a:endParaRPr lang="en-US" sz="4400" dirty="0"/>
+          </a:p>
+        </p:txBody>
+      </p:sp>
+      <p:sp>
+        <p:nvSpPr>
+          <p:cNvPr id="7" name="e30_3"/>
+          <p:cNvSpPr txBox="1"/>
+          <p:nvPr/>
+        </p:nvSpPr>
+        <p:spPr>
+          <a:xfrm>
+            <a:off x="731520" y="2651760"/>
+            <a:ext cx="3429000" cy="731520"/>
+          </a:xfrm>
+          <a:prstGeom prst="roundRect">
+            <a:avLst>
+              <a:gd name="adj" fmla="val 31250"/>
+            </a:avLst>
+          </a:prstGeom>
+          <a:solidFill>
+            <a:srgbClr val="12161E"/>
+          </a:solidFill>
+          <a:ln w="12700">
+            <a:solidFill>
+              <a:srgbClr val="2A3342"/>
+            </a:solidFill>
+          </a:ln>
+        </p:spPr>
+        <p:txBody>
+          <a:bodyPr wrap="square" lIns="0" tIns="0" rIns="0" bIns="0" rtlCol="0" anchor="ctr"/>
+          <a:lstStyle/>
+          <a:p>
+            <a:pPr algn="ctr" indent="0" marL="0">
+              <a:buNone/>
+            </a:pPr>
+            <a:r>
+              <a:rPr lang="en-US" sz="1900" b="1" dirty="0">
+                <a:solidFill>
+                  <a:srgbClr val="F5F2EC"/>
+                </a:solidFill>
+                <a:latin typeface="Calibri" pitchFamily="34" charset="0"/>
+                <a:ea typeface="Calibri" pitchFamily="34" charset="-122"/>
+                <a:cs typeface="Calibri" pitchFamily="34" charset="-120"/>
+              </a:rPr>
+              <a:t>Nach dem Unfall</a:t>
+            </a:r>
+            <a:endParaRPr lang="en-US" sz="1900" dirty="0"/>
+          </a:p>
+        </p:txBody>
+      </p:sp>
+      <p:sp>
+        <p:nvSpPr>
+          <p:cNvPr id="8" name="e30_4"/>
+          <p:cNvSpPr txBox="1"/>
+          <p:nvPr/>
+        </p:nvSpPr>
+        <p:spPr>
+          <a:xfrm>
+            <a:off x="4361688" y="2651760"/>
+            <a:ext cx="3429000" cy="731520"/>
+          </a:xfrm>
+          <a:prstGeom prst="roundRect">
+            <a:avLst>
+              <a:gd name="adj" fmla="val 31250"/>
+            </a:avLst>
+          </a:prstGeom>
+          <a:solidFill>
+            <a:srgbClr val="12161E"/>
+          </a:solidFill>
+          <a:ln w="12700">
+            <a:solidFill>
+              <a:srgbClr val="2A3342"/>
+            </a:solidFill>
+          </a:ln>
+        </p:spPr>
+        <p:txBody>
+          <a:bodyPr wrap="square" lIns="0" tIns="0" rIns="0" bIns="0" rtlCol="0" anchor="ctr"/>
+          <a:lstStyle/>
+          <a:p>
+            <a:pPr algn="ctr" indent="0" marL="0">
+              <a:buNone/>
+            </a:pPr>
+            <a:r>
+              <a:rPr lang="en-US" sz="1900" b="1" dirty="0">
+                <a:solidFill>
+                  <a:srgbClr val="F5F2EC"/>
+                </a:solidFill>
+                <a:latin typeface="Calibri" pitchFamily="34" charset="0"/>
+                <a:ea typeface="Calibri" pitchFamily="34" charset="-122"/>
+                <a:cs typeface="Calibri" pitchFamily="34" charset="-120"/>
+              </a:rPr>
+              <a:t>Bußgeld, Fahrverbot, Strafe</a:t>
+            </a:r>
+            <a:endParaRPr lang="en-US" sz="1900" dirty="0"/>
+          </a:p>
+        </p:txBody>
+      </p:sp>
+      <p:sp>
+        <p:nvSpPr>
+          <p:cNvPr id="9" name="e30_5"/>
+          <p:cNvSpPr txBox="1"/>
+          <p:nvPr/>
+        </p:nvSpPr>
+        <p:spPr>
+          <a:xfrm>
+            <a:off x="7991856" y="2651760"/>
+            <a:ext cx="3429000" cy="731520"/>
+          </a:xfrm>
+          <a:prstGeom prst="roundRect">
+            <a:avLst>
+              <a:gd name="adj" fmla="val 31250"/>
+            </a:avLst>
+          </a:prstGeom>
+          <a:solidFill>
+            <a:srgbClr val="12161E"/>
+          </a:solidFill>
+          <a:ln w="12700">
+            <a:solidFill>
+              <a:srgbClr val="2A3342"/>
+            </a:solidFill>
+          </a:ln>
+        </p:spPr>
+        <p:txBody>
+          <a:bodyPr wrap="square" lIns="0" tIns="0" rIns="0" bIns="0" rtlCol="0" anchor="ctr"/>
+          <a:lstStyle/>
+          <a:p>
+            <a:pPr algn="ctr" indent="0" marL="0">
+              <a:buNone/>
+            </a:pPr>
+            <a:r>
+              <a:rPr lang="en-US" sz="1900" b="1" dirty="0">
+                <a:solidFill>
+                  <a:srgbClr val="F5F2EC"/>
+                </a:solidFill>
+                <a:latin typeface="Calibri" pitchFamily="34" charset="0"/>
+                <a:ea typeface="Calibri" pitchFamily="34" charset="-122"/>
+                <a:cs typeface="Calibri" pitchFamily="34" charset="-120"/>
+              </a:rPr>
+              <a:t>Punkte in Flensburg</a:t>
+            </a:r>
+            <a:endParaRPr lang="en-US" sz="1900" dirty="0"/>
+          </a:p>
+        </p:txBody>
+      </p:sp>
+      <p:sp>
+        <p:nvSpPr>
+          <p:cNvPr id="10" name="e30_6"/>
+          <p:cNvSpPr txBox="1"/>
+          <p:nvPr/>
+        </p:nvSpPr>
+        <p:spPr>
+          <a:xfrm>
+            <a:off x="731520" y="3657600"/>
+            <a:ext cx="3429000" cy="731520"/>
+          </a:xfrm>
+          <a:prstGeom prst="roundRect">
+            <a:avLst>
+              <a:gd name="adj" fmla="val 31250"/>
+            </a:avLst>
+          </a:prstGeom>
+          <a:solidFill>
+            <a:srgbClr val="12161E"/>
+          </a:solidFill>
+          <a:ln w="12700">
+            <a:solidFill>
+              <a:srgbClr val="2A3342"/>
+            </a:solidFill>
+          </a:ln>
+        </p:spPr>
+        <p:txBody>
+          <a:bodyPr wrap="square" lIns="0" tIns="0" rIns="0" bIns="0" rtlCol="0" anchor="ctr"/>
+          <a:lstStyle/>
+          <a:p>
+            <a:pPr algn="ctr" indent="0" marL="0">
+              <a:buNone/>
+            </a:pPr>
+            <a:r>
+              <a:rPr lang="en-US" sz="1900" b="1" dirty="0">
+                <a:solidFill>
+                  <a:srgbClr val="F5F2EC"/>
+                </a:solidFill>
+                <a:latin typeface="Calibri" pitchFamily="34" charset="0"/>
+                <a:ea typeface="Calibri" pitchFamily="34" charset="-122"/>
+                <a:cs typeface="Calibri" pitchFamily="34" charset="-120"/>
+              </a:rPr>
+              <a:t>Entzug der Fahrerlaubnis</a:t>
+            </a:r>
+            <a:endParaRPr lang="en-US" sz="1900" dirty="0"/>
+          </a:p>
+        </p:txBody>
+      </p:sp>
+      <p:sp>
+        <p:nvSpPr>
+          <p:cNvPr id="11" name="e30_7"/>
+          <p:cNvSpPr txBox="1"/>
+          <p:nvPr/>
+        </p:nvSpPr>
+        <p:spPr>
+          <a:xfrm>
+            <a:off x="4361688" y="3657600"/>
+            <a:ext cx="3429000" cy="731520"/>
+          </a:xfrm>
+          <a:prstGeom prst="roundRect">
+            <a:avLst>
+              <a:gd name="adj" fmla="val 31250"/>
+            </a:avLst>
+          </a:prstGeom>
+          <a:solidFill>
+            <a:srgbClr val="12161E"/>
+          </a:solidFill>
+          <a:ln w="12700">
+            <a:solidFill>
+              <a:srgbClr val="2A3342"/>
+            </a:solidFill>
+          </a:ln>
+        </p:spPr>
+        <p:txBody>
+          <a:bodyPr wrap="square" lIns="0" tIns="0" rIns="0" bIns="0" rtlCol="0" anchor="ctr"/>
+          <a:lstStyle/>
+          <a:p>
+            <a:pPr algn="ctr" indent="0" marL="0">
+              <a:buNone/>
+            </a:pPr>
+            <a:r>
+              <a:rPr lang="en-US" sz="1900" b="1" dirty="0">
+                <a:solidFill>
+                  <a:srgbClr val="F5F2EC"/>
+                </a:solidFill>
+                <a:latin typeface="Calibri" pitchFamily="34" charset="0"/>
+                <a:ea typeface="Calibri" pitchFamily="34" charset="-122"/>
+                <a:cs typeface="Calibri" pitchFamily="34" charset="-120"/>
+              </a:rPr>
+              <a:t>Versicherung und Regress</a:t>
+            </a:r>
+            <a:endParaRPr lang="en-US" sz="1900" dirty="0"/>
+          </a:p>
+        </p:txBody>
+      </p:sp>
+      <p:sp>
+        <p:nvSpPr>
+          <p:cNvPr id="12" name="e30_8"/>
+          <p:cNvSpPr txBox="1"/>
+          <p:nvPr/>
+        </p:nvSpPr>
+        <p:spPr>
+          <a:xfrm>
+            <a:off x="7991856" y="3657600"/>
+            <a:ext cx="3429000" cy="731520"/>
+          </a:xfrm>
+          <a:prstGeom prst="roundRect">
+            <a:avLst>
+              <a:gd name="adj" fmla="val 31250"/>
+            </a:avLst>
+          </a:prstGeom>
+          <a:solidFill>
+            <a:srgbClr val="12161E"/>
+          </a:solidFill>
+          <a:ln w="12700">
+            <a:solidFill>
+              <a:srgbClr val="2A3342"/>
+            </a:solidFill>
+          </a:ln>
+        </p:spPr>
+        <p:txBody>
+          <a:bodyPr wrap="square" lIns="0" tIns="0" rIns="0" bIns="0" rtlCol="0" anchor="ctr"/>
+          <a:lstStyle/>
+          <a:p>
+            <a:pPr algn="ctr" indent="0" marL="0">
+              <a:buNone/>
+            </a:pPr>
+            <a:r>
+              <a:rPr lang="en-US" sz="1900" b="1" dirty="0">
+                <a:solidFill>
+                  <a:srgbClr val="F5F2EC"/>
+                </a:solidFill>
+                <a:latin typeface="Calibri" pitchFamily="34" charset="0"/>
+                <a:ea typeface="Calibri" pitchFamily="34" charset="-122"/>
+                <a:cs typeface="Calibri" pitchFamily="34" charset="-120"/>
+              </a:rPr>
+              <a:t>MPU</a:t>
+            </a:r>
+            <a:endParaRPr lang="en-US" sz="1900" dirty="0"/>
+          </a:p>
+        </p:txBody>
+      </p:sp>
+      <p:sp>
+        <p:nvSpPr>
+          <p:cNvPr id="13" name="e30_9"/>
+          <p:cNvSpPr txBox="1"/>
+          <p:nvPr/>
+        </p:nvSpPr>
+        <p:spPr>
+          <a:xfrm>
+            <a:off x="731520" y="4937760"/>
+            <a:ext cx="10058400" cy="457200"/>
+          </a:xfrm>
+          <a:prstGeom prst="rect">
+            <a:avLst/>
+          </a:prstGeom>
+          <a:noFill/>
+          <a:ln/>
+        </p:spPr>
+        <p:txBody>
+          <a:bodyPr wrap="square" lIns="0" tIns="0" rIns="0" bIns="0" rtlCol="0" anchor="t"/>
+          <a:lstStyle/>
+          <a:p>
+            <a:pPr algn="l" indent="0" marL="0">
+              <a:buNone/>
+            </a:pPr>
+            <a:r>
+              <a:rPr lang="en-US" sz="1900" i="1" dirty="0">
+                <a:solidFill>
+                  <a:srgbClr val="CDD3DC"/>
+                </a:solidFill>
+                <a:latin typeface="Calibri" pitchFamily="34" charset="0"/>
+                <a:ea typeface="Calibri" pitchFamily="34" charset="-122"/>
+                <a:cs typeface="Calibri" pitchFamily="34" charset="-120"/>
+              </a:rPr>
+              <a:t>Probezeit und Seminare: gleich in Lektion 12.</a:t>
+            </a:r>
+            <a:endParaRPr lang="en-US" sz="1900" dirty="0"/>
+          </a:p>
+        </p:txBody>
+      </p:sp>
+    </p:spTree>
+  </p:cSld>
+  <p:clrMapOvr>
+    <a:masterClrMapping/>
+  </p:clrMapOvr>
+  <p:transition spd="med">
+    <p:fade/>
+  </p:transition>
+  <p:timing>
+    <p:tnLst>
+      <p:par>
+        <p:cTn id="1" dur="indefinite" restart="never" nodeType="tmRoot">
+          <p:childTnLst>
+            <p:seq concurrent="1" nextAc="seek">
+              <p:cTn id="2" dur="indefinite" nodeType="mainSeq">
+                <p:childTnLst>
+                  <p:par>
+                    <p:cTn id="3" fill="hold">
+                      <p:stCondLst>
+                        <p:cond delay="indefinite"/>
+                      </p:stCondLst>
+                      <p:childTnLst>
+                        <p:par>
+                          <p:cTn id="4" fill="hold">
+                            <p:stCondLst>
+                              <p:cond delay="0"/>
+                            </p:stCondLst>
+                            <p:childTnLst>
+                              <p:par>
+                                <p:cTn id="5" presetID="42" presetClass="entr" presetSubtype="0" fill="hold" grpId="0" nodeType="clickEffect">
+                                  <p:stCondLst>
+                                    <p:cond delay="0"/>
+                                  </p:stCondLst>
+                                  <p:childTnLst>
+                                    <p:set>
+                                      <p:cBhvr>
+                                        <p:cTn id="6" dur="1" fill="hold">
+                                          <p:stCondLst>
+                                            <p:cond delay="0"/>
+                                          </p:stCondLst>
+                                        </p:cTn>
+                                        <p:tgtEl>
+                                          <p:spTgt spid="7"/>
+                                        </p:tgtEl>
+                                        <p:attrNameLst>
+                                          <p:attrName>style.visibility</p:attrName>
+                                        </p:attrNameLst>
+                                      </p:cBhvr>
+                                      <p:to>
+                                        <p:strVal val="visible"/>
+                                      </p:to>
+                                    </p:set>
+                                    <p:animEffect transition="in" filter="fade">
+                                      <p:cBhvr>
+                                        <p:cTn id="7" dur="800"/>
+                                        <p:tgtEl>
+                                          <p:spTgt spid="7"/>
+                                        </p:tgtEl>
+                                      </p:cBhvr>
+                                    </p:animEffect>
+                                    <p:anim calcmode="lin" valueType="num">
+                                      <p:cBhvr additive="base">
+                                        <p:cTn id="8" dur="800" fill="hold" decel="100000"/>
+                                        <p:tgtEl>
+                                          <p:spTgt spid="7"/>
+                                        </p:tgtEl>
+                                        <p:attrNameLst>
+                                          <p:attrName>ppt_x</p:attrName>
+                                        </p:attrNameLst>
+                                      </p:cBhvr>
+                                      <p:tavLst>
+                                        <p:tav tm="0">
+                                          <p:val>
+                                            <p:strVal val="#ppt_x"/>
+                                          </p:val>
+                                        </p:tav>
+                                        <p:tav tm="100000">
+                                          <p:val>
+                                            <p:strVal val="#ppt_x"/>
+                                          </p:val>
+                                        </p:tav>
+                                      </p:tavLst>
+                                    </p:anim>
+                                    <p:anim calcmode="lin" valueType="num">
+                                      <p:cBhvr additive="base">
+                                        <p:cTn id="9" dur="800" fill="hold" decel="100000"/>
+                                        <p:tgtEl>
+                                          <p:spTgt spid="7"/>
+                                        </p:tgtEl>
+                                        <p:attrNameLst>
+                                          <p:attrName>ppt_y</p:attrName>
+                                        </p:attrNameLst>
+                                      </p:cBhvr>
+                                      <p:tavLst>
+                                        <p:tav tm="0">
+                                          <p:val>
+                                            <p:strVal val="#ppt_y+.18"/>
+                                          </p:val>
+                                        </p:tav>
+                                        <p:tav tm="100000">
+                                          <p:val>
+                                            <p:strVal val="#ppt_y"/>
+                                          </p:val>
+                                        </p:tav>
+                                      </p:tavLst>
+                                    </p:anim>
+                                  </p:childTnLst>
+                                </p:cTn>
+                              </p:par>
+                              <p:par>
+                                <p:cTn id="10" presetID="42" presetClass="entr" presetSubtype="0" fill="hold" grpId="0" nodeType="withEffect">
+                                  <p:stCondLst>
+                                    <p:cond delay="120"/>
+                                  </p:stCondLst>
+                                  <p:childTnLst>
+                                    <p:set>
+                                      <p:cBhvr>
+                                        <p:cTn id="11" dur="1" fill="hold">
+                                          <p:stCondLst>
+                                            <p:cond delay="0"/>
+                                          </p:stCondLst>
+                                        </p:cTn>
+                                        <p:tgtEl>
+                                          <p:spTgt spid="8"/>
+                                        </p:tgtEl>
+                                        <p:attrNameLst>
+                                          <p:attrName>style.visibility</p:attrName>
+                                        </p:attrNameLst>
+                                      </p:cBhvr>
+                                      <p:to>
+                                        <p:strVal val="visible"/>
+                                      </p:to>
+                                    </p:set>
+                                    <p:animEffect transition="in" filter="fade">
+                                      <p:cBhvr>
+                                        <p:cTn id="12" dur="800"/>
+                                        <p:tgtEl>
+                                          <p:spTgt spid="8"/>
+                                        </p:tgtEl>
+                                      </p:cBhvr>
+                                    </p:animEffect>
+                                    <p:anim calcmode="lin" valueType="num">
+                                      <p:cBhvr additive="base">
+                                        <p:cTn id="13" dur="800" fill="hold" decel="100000"/>
+                                        <p:tgtEl>
+                                          <p:spTgt spid="8"/>
+                                        </p:tgtEl>
+                                        <p:attrNameLst>
+                                          <p:attrName>ppt_x</p:attrName>
+                                        </p:attrNameLst>
+                                      </p:cBhvr>
+                                      <p:tavLst>
+                                        <p:tav tm="0">
+                                          <p:val>
+                                            <p:strVal val="#ppt_x"/>
+                                          </p:val>
+                                        </p:tav>
+                                        <p:tav tm="100000">
+                                          <p:val>
+                                            <p:strVal val="#ppt_x"/>
+                                          </p:val>
+                                        </p:tav>
+                                      </p:tavLst>
+                                    </p:anim>
+                                    <p:anim calcmode="lin" valueType="num">
+                                      <p:cBhvr additive="base">
+                                        <p:cTn id="14" dur="800" fill="hold" decel="100000"/>
+                                        <p:tgtEl>
+                                          <p:spTgt spid="8"/>
+                                        </p:tgtEl>
+                                        <p:attrNameLst>
+                                          <p:attrName>ppt_y</p:attrName>
+                                        </p:attrNameLst>
+                                      </p:cBhvr>
+                                      <p:tavLst>
+                                        <p:tav tm="0">
+                                          <p:val>
+                                            <p:strVal val="#ppt_y+.18"/>
+                                          </p:val>
+                                        </p:tav>
+                                        <p:tav tm="100000">
+                                          <p:val>
+                                            <p:strVal val="#ppt_y"/>
+                                          </p:val>
+                                        </p:tav>
+                                      </p:tavLst>
+                                    </p:anim>
+                                  </p:childTnLst>
+                                </p:cTn>
+                              </p:par>
+                              <p:par>
+                                <p:cTn id="15" presetID="42" presetClass="entr" presetSubtype="0" fill="hold" grpId="0" nodeType="withEffect">
+                                  <p:stCondLst>
+                                    <p:cond delay="240"/>
+                                  </p:stCondLst>
+                                  <p:childTnLst>
+                                    <p:set>
+                                      <p:cBhvr>
+                                        <p:cTn id="16" dur="1" fill="hold">
+                                          <p:stCondLst>
+                                            <p:cond delay="0"/>
+                                          </p:stCondLst>
+                                        </p:cTn>
+                                        <p:tgtEl>
+                                          <p:spTgt spid="9"/>
+                                        </p:tgtEl>
+                                        <p:attrNameLst>
+                                          <p:attrName>style.visibility</p:attrName>
+                                        </p:attrNameLst>
+                                      </p:cBhvr>
+                                      <p:to>
+                                        <p:strVal val="visible"/>
+                                      </p:to>
+                                    </p:set>
+                                    <p:animEffect transition="in" filter="fade">
+                                      <p:cBhvr>
+                                        <p:cTn id="17" dur="800"/>
+                                        <p:tgtEl>
+                                          <p:spTgt spid="9"/>
+                                        </p:tgtEl>
+                                      </p:cBhvr>
+                                    </p:animEffect>
+                                    <p:anim calcmode="lin" valueType="num">
+                                      <p:cBhvr additive="base">
+                                        <p:cTn id="18" dur="800" fill="hold" decel="100000"/>
+                                        <p:tgtEl>
+                                          <p:spTgt spid="9"/>
+                                        </p:tgtEl>
+                                        <p:attrNameLst>
+                                          <p:attrName>ppt_x</p:attrName>
+                                        </p:attrNameLst>
+                                      </p:cBhvr>
+                                      <p:tavLst>
+                                        <p:tav tm="0">
+                                          <p:val>
+                                            <p:strVal val="#ppt_x"/>
+                                          </p:val>
+                                        </p:tav>
+                                        <p:tav tm="100000">
+                                          <p:val>
+                                            <p:strVal val="#ppt_x"/>
+                                          </p:val>
+                                        </p:tav>
+                                      </p:tavLst>
+                                    </p:anim>
+                                    <p:anim calcmode="lin" valueType="num">
+                                      <p:cBhvr additive="base">
+                                        <p:cTn id="19" dur="800" fill="hold" decel="100000"/>
+                                        <p:tgtEl>
+                                          <p:spTgt spid="9"/>
+                                        </p:tgtEl>
+                                        <p:attrNameLst>
+                                          <p:attrName>ppt_y</p:attrName>
+                                        </p:attrNameLst>
+                                      </p:cBhvr>
+                                      <p:tavLst>
+                                        <p:tav tm="0">
+                                          <p:val>
+                                            <p:strVal val="#ppt_y+.18"/>
+                                          </p:val>
+                                        </p:tav>
+                                        <p:tav tm="100000">
+                                          <p:val>
+                                            <p:strVal val="#ppt_y"/>
+                                          </p:val>
+                                        </p:tav>
+                                      </p:tavLst>
+                                    </p:anim>
+                                  </p:childTnLst>
+                                </p:cTn>
+                              </p:par>
+                              <p:par>
+                                <p:cTn id="20" presetID="42" presetClass="entr" presetSubtype="0" fill="hold" grpId="0" nodeType="withEffect">
+                                  <p:stCondLst>
+                                    <p:cond delay="360"/>
+                                  </p:stCondLst>
+                                  <p:childTnLst>
+                                    <p:set>
+                                      <p:cBhvr>
+                                        <p:cTn id="21" dur="1" fill="hold">
+                                          <p:stCondLst>
+                                            <p:cond delay="0"/>
+                                          </p:stCondLst>
+                                        </p:cTn>
+                                        <p:tgtEl>
+                                          <p:spTgt spid="10"/>
+                                        </p:tgtEl>
+                                        <p:attrNameLst>
+                                          <p:attrName>style.visibility</p:attrName>
+                                        </p:attrNameLst>
+                                      </p:cBhvr>
+                                      <p:to>
+                                        <p:strVal val="visible"/>
+                                      </p:to>
+                                    </p:set>
+                                    <p:animEffect transition="in" filter="fade">
+                                      <p:cBhvr>
+                                        <p:cTn id="22" dur="800"/>
+                                        <p:tgtEl>
+                                          <p:spTgt spid="10"/>
+                                        </p:tgtEl>
+                                      </p:cBhvr>
+                                    </p:animEffect>
+                                    <p:anim calcmode="lin" valueType="num">
+                                      <p:cBhvr additive="base">
+                                        <p:cTn id="23" dur="800" fill="hold" decel="100000"/>
+                                        <p:tgtEl>
+                                          <p:spTgt spid="10"/>
+                                        </p:tgtEl>
+                                        <p:attrNameLst>
+                                          <p:attrName>ppt_x</p:attrName>
+                                        </p:attrNameLst>
+                                      </p:cBhvr>
+                                      <p:tavLst>
+                                        <p:tav tm="0">
+                                          <p:val>
+                                            <p:strVal val="#ppt_x"/>
+                                          </p:val>
+                                        </p:tav>
+                                        <p:tav tm="100000">
+                                          <p:val>
+                                            <p:strVal val="#ppt_x"/>
+                                          </p:val>
+                                        </p:tav>
+                                      </p:tavLst>
+                                    </p:anim>
+                                    <p:anim calcmode="lin" valueType="num">
+                                      <p:cBhvr additive="base">
+                                        <p:cTn id="24" dur="800" fill="hold" decel="100000"/>
+                                        <p:tgtEl>
+                                          <p:spTgt spid="10"/>
+                                        </p:tgtEl>
+                                        <p:attrNameLst>
+                                          <p:attrName>ppt_y</p:attrName>
+                                        </p:attrNameLst>
+                                      </p:cBhvr>
+                                      <p:tavLst>
+                                        <p:tav tm="0">
+                                          <p:val>
+                                            <p:strVal val="#ppt_y+.18"/>
+                                          </p:val>
+                                        </p:tav>
+                                        <p:tav tm="100000">
+                                          <p:val>
+                                            <p:strVal val="#ppt_y"/>
+                                          </p:val>
+                                        </p:tav>
+                                      </p:tavLst>
+                                    </p:anim>
+                                  </p:childTnLst>
+                                </p:cTn>
+                              </p:par>
+                              <p:par>
+                                <p:cTn id="25" presetID="42" presetClass="entr" presetSubtype="0" fill="hold" grpId="0" nodeType="withEffect">
+                                  <p:stCondLst>
+                                    <p:cond delay="480"/>
+                                  </p:stCondLst>
+                                  <p:childTnLst>
+                                    <p:set>
+                                      <p:cBhvr>
+                                        <p:cTn id="26" dur="1" fill="hold">
+                                          <p:stCondLst>
+                                            <p:cond delay="0"/>
+                                          </p:stCondLst>
+                                        </p:cTn>
+                                        <p:tgtEl>
+                                          <p:spTgt spid="11"/>
+                                        </p:tgtEl>
+                                        <p:attrNameLst>
+                                          <p:attrName>style.visibility</p:attrName>
+                                        </p:attrNameLst>
+                                      </p:cBhvr>
+                                      <p:to>
+                                        <p:strVal val="visible"/>
+                                      </p:to>
+                                    </p:set>
+                                    <p:animEffect transition="in" filter="fade">
+                                      <p:cBhvr>
+                                        <p:cTn id="27" dur="800"/>
+                                        <p:tgtEl>
+                                          <p:spTgt spid="11"/>
+                                        </p:tgtEl>
+                                      </p:cBhvr>
+                                    </p:animEffect>
+                                    <p:anim calcmode="lin" valueType="num">
+                                      <p:cBhvr additive="base">
+                                        <p:cTn id="28" dur="800" fill="hold" decel="100000"/>
+                                        <p:tgtEl>
+                                          <p:spTgt spid="11"/>
+                                        </p:tgtEl>
+                                        <p:attrNameLst>
+                                          <p:attrName>ppt_x</p:attrName>
+                                        </p:attrNameLst>
+                                      </p:cBhvr>
+                                      <p:tavLst>
+                                        <p:tav tm="0">
+                                          <p:val>
+                                            <p:strVal val="#ppt_x"/>
+                                          </p:val>
+                                        </p:tav>
+                                        <p:tav tm="100000">
+                                          <p:val>
+                                            <p:strVal val="#ppt_x"/>
+                                          </p:val>
+                                        </p:tav>
+                                      </p:tavLst>
+                                    </p:anim>
+                                    <p:anim calcmode="lin" valueType="num">
+                                      <p:cBhvr additive="base">
+                                        <p:cTn id="29" dur="800" fill="hold" decel="100000"/>
+                                        <p:tgtEl>
+                                          <p:spTgt spid="11"/>
+                                        </p:tgtEl>
+                                        <p:attrNameLst>
+                                          <p:attrName>ppt_y</p:attrName>
+                                        </p:attrNameLst>
+                                      </p:cBhvr>
+                                      <p:tavLst>
+                                        <p:tav tm="0">
+                                          <p:val>
+                                            <p:strVal val="#ppt_y+.18"/>
+                                          </p:val>
+                                        </p:tav>
+                                        <p:tav tm="100000">
+                                          <p:val>
+                                            <p:strVal val="#ppt_y"/>
+                                          </p:val>
+                                        </p:tav>
+                                      </p:tavLst>
+                                    </p:anim>
+                                  </p:childTnLst>
+                                </p:cTn>
+                              </p:par>
+                              <p:par>
+                                <p:cTn id="30" presetID="42" presetClass="entr" presetSubtype="0" fill="hold" grpId="0" nodeType="withEffect">
+                                  <p:stCondLst>
+                                    <p:cond delay="600"/>
+                                  </p:stCondLst>
+                                  <p:childTnLst>
+                                    <p:set>
+                                      <p:cBhvr>
+                                        <p:cTn id="31" dur="1" fill="hold">
+                                          <p:stCondLst>
+                                            <p:cond delay="0"/>
+                                          </p:stCondLst>
+                                        </p:cTn>
+                                        <p:tgtEl>
+                                          <p:spTgt spid="12"/>
+                                        </p:tgtEl>
+                                        <p:attrNameLst>
+                                          <p:attrName>style.visibility</p:attrName>
+                                        </p:attrNameLst>
+                                      </p:cBhvr>
+                                      <p:to>
+                                        <p:strVal val="visible"/>
+                                      </p:to>
+                                    </p:set>
+                                    <p:animEffect transition="in" filter="fade">
+                                      <p:cBhvr>
+                                        <p:cTn id="32" dur="800"/>
+                                        <p:tgtEl>
+                                          <p:spTgt spid="12"/>
+                                        </p:tgtEl>
+                                      </p:cBhvr>
+                                    </p:animEffect>
+                                    <p:anim calcmode="lin" valueType="num">
+                                      <p:cBhvr additive="base">
+                                        <p:cTn id="33" dur="800" fill="hold" decel="100000"/>
+                                        <p:tgtEl>
+                                          <p:spTgt spid="12"/>
+                                        </p:tgtEl>
+                                        <p:attrNameLst>
+                                          <p:attrName>ppt_x</p:attrName>
+                                        </p:attrNameLst>
+                                      </p:cBhvr>
+                                      <p:tavLst>
+                                        <p:tav tm="0">
+                                          <p:val>
+                                            <p:strVal val="#ppt_x"/>
+                                          </p:val>
+                                        </p:tav>
+                                        <p:tav tm="100000">
+                                          <p:val>
+                                            <p:strVal val="#ppt_x"/>
+                                          </p:val>
+                                        </p:tav>
+                                      </p:tavLst>
+                                    </p:anim>
+                                    <p:anim calcmode="lin" valueType="num">
+                                      <p:cBhvr additive="base">
+                                        <p:cTn id="34" dur="800" fill="hold" decel="100000"/>
+                                        <p:tgtEl>
+                                          <p:spTgt spid="12"/>
+                                        </p:tgtEl>
+                                        <p:attrNameLst>
+                                          <p:attrName>ppt_y</p:attrName>
+                                        </p:attrNameLst>
+                                      </p:cBhvr>
+                                      <p:tavLst>
+                                        <p:tav tm="0">
+                                          <p:val>
+                                            <p:strVal val="#ppt_y+.18"/>
+                                          </p:val>
+                                        </p:tav>
+                                        <p:tav tm="100000">
+                                          <p:val>
+                                            <p:strVal val="#ppt_y"/>
+                                          </p:val>
+                                        </p:tav>
+                                      </p:tavLst>
+                                    </p:anim>
+                                  </p:childTnLst>
+                                </p:cTn>
+                              </p:par>
+                            </p:childTnLst>
+                          </p:cTn>
+                        </p:par>
+                        <p:par>
+                          <p:cTn id="35" fill="hold">
+                            <p:stCondLst>
+                              <p:cond delay="1400"/>
+                            </p:stCondLst>
+                            <p:childTnLst>
+                              <p:par>
+                                <p:cTn id="36" presetID="10" presetClass="entr" presetSubtype="0" fill="hold" grpId="0" nodeType="afterEffect">
+                                  <p:stCondLst>
+                                    <p:cond delay="0"/>
+                                  </p:stCondLst>
+                                  <p:childTnLst>
+                                    <p:set>
+                                      <p:cBhvr>
+                                        <p:cTn id="37" dur="1" fill="hold">
+                                          <p:stCondLst>
+                                            <p:cond delay="0"/>
+                                          </p:stCondLst>
+                                        </p:cTn>
+                                        <p:tgtEl>
+                                          <p:spTgt spid="13"/>
+                                        </p:tgtEl>
+                                        <p:attrNameLst>
+                                          <p:attrName>style.visibility</p:attrName>
+                                        </p:attrNameLst>
+                                      </p:cBhvr>
+                                      <p:to>
+                                        <p:strVal val="visible"/>
+                                      </p:to>
+                                    </p:set>
+                                    <p:animEffect transition="in" filter="fade">
+                                      <p:cBhvr>
+                                        <p:cTn id="38" dur="600"/>
+                                        <p:tgtEl>
+                                          <p:spTgt spid="13"/>
+                                        </p:tgtEl>
+                                      </p:cBhvr>
+                                    </p:animEffect>
+                                  </p:childTnLst>
+                                </p:cTn>
+                              </p:par>
+                            </p:childTnLst>
+                          </p:cTn>
+                        </p:par>
+                      </p:childTnLst>
+                    </p:cTn>
+                  </p:par>
+                </p:childTnLst>
+              </p:cTn>
+              <p:prevCondLst>
+                <p:cond evt="onPrev" delay="0">
+                  <p:tgtEl>
+                    <p:sldTgt/>
+                  </p:tgtEl>
+                </p:cond>
+              </p:prevCondLst>
+              <p:nextCondLst>
+                <p:cond evt="onNext" delay="0">
+                  <p:tgtEl>
+                    <p:sldTgt/>
+                  </p:tgtEl>
+                </p:cond>
+              </p:nextCondLst>
+            </p:seq>
+          </p:childTnLst>
+        </p:cTn>
+      </p:par>
+    </p:tnLst>
+    <p:bldLst>
+      <p:bldP spid="7" grpId="0" animBg="1"/>
+      <p:bldP spid="8" grpId="0" animBg="1"/>
+      <p:bldP spid="9" grpId="0" animBg="1"/>
+      <p:bldP spid="10" grpId="0" animBg="1"/>
+      <p:bldP spid="11" grpId="0" animBg="1"/>
+      <p:bldP spid="12" grpId="0" animBg="1"/>
+      <p:bldP spid="13" grpId="0" animBg="1"/>
+    </p:bldLst>
+  </p:timing>
+</p:sld>
+</file>
+
+<file path=ppt/slides/slide31.xml><?xml version="1.0" encoding="utf-8"?>
+<p:sld xmlns:a="http://schemas.openxmlformats.org/drawingml/2006/main" xmlns:r="http://schemas.openxmlformats.org/officeDocument/2006/relationships" xmlns:p="http://schemas.openxmlformats.org/presentationml/2006/main">
+  <p:cSld name="Slide 31">
+    <p:bg>
+      <p:bgPr>
+        <a:solidFill>
+          <a:srgbClr val="07080B"/>
+        </a:solidFill>
+      </p:bgPr>
+    </p:bg>
+    <p:spTree>
+      <p:nvGrpSpPr>
+        <p:cNvPr id="2" name=""/>
+        <p:cNvGrpSpPr/>
+        <p:nvPr/>
+      </p:nvGrpSpPr>
+      <p:grpSpPr>
+        <a:xfrm>
+          <a:off x="0" y="0"/>
+          <a:ext cx="0" cy="0"/>
+          <a:chOff x="0" y="0"/>
+          <a:chExt cx="0" cy="0"/>
+        </a:xfrm>
+      </p:grpSpPr>
+      <p:pic>
+        <p:nvPicPr>
+          <p:cNvPr id="3" name="!!bg" descr="Hintergrund">    </p:cNvPr>
+          <p:cNvPicPr>
+            <a:picLocks noChangeAspect="1"/>
+          </p:cNvPicPr>
+          <p:nvPr/>
+        </p:nvPicPr>
+        <p:blipFill>
+          <a:blip r:embed="rId1"/>
+          <a:stretch>
+            <a:fillRect/>
+          </a:stretch>
+        </p:blipFill>
+        <p:spPr>
+          <a:xfrm>
+            <a:off x="0" y="0"/>
+            <a:ext cx="12191695" cy="6858000"/>
+          </a:xfrm>
+          <a:prstGeom prst="rect">
+            <a:avLst/>
+          </a:prstGeom>
+        </p:spPr>
+      </p:pic>
+      <p:sp>
+        <p:nvSpPr>
+          <p:cNvPr id="4" name="!!ft"/>
+          <p:cNvSpPr txBox="1"/>
+          <p:nvPr/>
+        </p:nvSpPr>
+        <p:spPr>
+          <a:xfrm>
+            <a:off x="9174175" y="292608"/>
+            <a:ext cx="2560320" cy="228600"/>
+          </a:xfrm>
+          <a:prstGeom prst="rect">
+            <a:avLst/>
+          </a:prstGeom>
+          <a:noFill/>
+          <a:ln/>
+        </p:spPr>
+        <p:txBody>
+          <a:bodyPr wrap="square" lIns="0" tIns="0" rIns="0" bIns="0" rtlCol="0" anchor="t"/>
+          <a:lstStyle/>
+          <a:p>
+            <a:pPr algn="r" indent="0" marL="0">
+              <a:buNone/>
+            </a:pPr>
+            <a:r>
+              <a:rPr lang="en-US" sz="1000" b="1" spc="300" kern="0" dirty="0">
+                <a:solidFill>
+                  <a:srgbClr val="6E7888"/>
+                </a:solidFill>
+                <a:latin typeface="Calibri" pitchFamily="34" charset="0"/>
+                <a:ea typeface="Calibri" pitchFamily="34" charset="-122"/>
+                <a:cs typeface="Calibri" pitchFamily="34" charset="-120"/>
+              </a:rPr>
+              <a:t>FAHRLEHRER SERBAND</a:t>
+            </a:r>
+            <a:endParaRPr lang="en-US" sz="1000" dirty="0"/>
+          </a:p>
+        </p:txBody>
+      </p:sp>
+      <p:sp>
+        <p:nvSpPr>
+          <p:cNvPr id="5" name="e31_1"/>
+          <p:cNvSpPr txBox="1"/>
+          <p:nvPr/>
+        </p:nvSpPr>
+        <p:spPr>
+          <a:xfrm>
+            <a:off x="731520" y="822960"/>
+            <a:ext cx="8229600" cy="320040"/>
+          </a:xfrm>
+          <a:prstGeom prst="rect">
+            <a:avLst/>
+          </a:prstGeom>
+          <a:noFill/>
+          <a:ln/>
+        </p:spPr>
+        <p:txBody>
+          <a:bodyPr wrap="square" lIns="0" tIns="0" rIns="0" bIns="0" rtlCol="0" anchor="t"/>
+          <a:lstStyle/>
+          <a:p>
+            <a:pPr algn="l" indent="0" marL="0">
+              <a:buNone/>
+            </a:pPr>
+            <a:r>
+              <a:rPr lang="en-US" sz="1300" b="1" spc="500" kern="0" dirty="0">
+                <a:solidFill>
                   <a:srgbClr val="FF7A1A"/>
                 </a:solidFill>
                 <a:latin typeface="Calibri" pitchFamily="34" charset="0"/>
@@ -30561,7 +32461,7 @@
       </p:sp>
       <p:sp>
         <p:nvSpPr>
-          <p:cNvPr id="6" name="e30_2"/>
+          <p:cNvPr id="6" name="e31_2"/>
           <p:cNvSpPr txBox="1"/>
           <p:nvPr/>
         </p:nvSpPr>
@@ -30603,7 +32503,7 @@
       </p:sp>
       <p:sp>
         <p:nvSpPr>
-          <p:cNvPr id="7" name="e30_3"/>
+          <p:cNvPr id="7" name="e31_3"/>
           <p:cNvSpPr/>
           <p:nvPr/>
         </p:nvSpPr>
@@ -30630,7 +32530,7 @@
       </p:sp>
       <p:pic>
         <p:nvPicPr>
-          <p:cNvPr id="8" name="e30_4" descr="preencoded.png">    </p:cNvPr>
+          <p:cNvPr id="8" name="e31_4" descr="preencoded.png">    </p:cNvPr>
           <p:cNvPicPr>
             <a:picLocks noChangeAspect="1"/>
           </p:cNvPicPr>
@@ -30654,7 +32554,7 @@
       </p:pic>
       <p:sp>
         <p:nvSpPr>
-          <p:cNvPr id="9" name="e30_5"/>
+          <p:cNvPr id="9" name="e31_5"/>
           <p:cNvSpPr txBox="1"/>
           <p:nvPr/>
         </p:nvSpPr>
@@ -30693,7 +32593,7 @@
       </p:sp>
       <p:sp>
         <p:nvSpPr>
-          <p:cNvPr id="10" name="e30_6"/>
+          <p:cNvPr id="10" name="e31_6"/>
           <p:cNvSpPr txBox="1"/>
           <p:nvPr/>
         </p:nvSpPr>
@@ -30718,7 +32618,7 @@
             <a:r>
               <a:rPr lang="en-US" sz="1700" dirty="0">
                 <a:solidFill>
-                  <a:srgbClr val="A7B0BD"/>
+                  <a:srgbClr val="CDD3DC"/>
                 </a:solidFill>
                 <a:latin typeface="Calibri" pitchFamily="34" charset="0"/>
                 <a:ea typeface="Calibri" pitchFamily="34" charset="-122"/>
@@ -30732,7 +32632,7 @@
       </p:sp>
       <p:sp>
         <p:nvSpPr>
-          <p:cNvPr id="11" name="e30_7"/>
+          <p:cNvPr id="11" name="e31_7"/>
           <p:cNvSpPr/>
           <p:nvPr/>
         </p:nvSpPr>
@@ -30759,7 +32659,7 @@
       </p:sp>
       <p:pic>
         <p:nvPicPr>
-          <p:cNvPr id="12" name="e30_8" descr="preencoded.png">    </p:cNvPr>
+          <p:cNvPr id="12" name="e31_8" descr="preencoded.png">    </p:cNvPr>
           <p:cNvPicPr>
             <a:picLocks noChangeAspect="1"/>
           </p:cNvPicPr>
@@ -30783,7 +32683,7 @@
       </p:pic>
       <p:sp>
         <p:nvSpPr>
-          <p:cNvPr id="13" name="e30_9"/>
+          <p:cNvPr id="13" name="e31_9"/>
           <p:cNvSpPr txBox="1"/>
           <p:nvPr/>
         </p:nvSpPr>
@@ -30822,7 +32722,7 @@
       </p:sp>
       <p:sp>
         <p:nvSpPr>
-          <p:cNvPr id="14" name="e30_10"/>
+          <p:cNvPr id="14" name="e31_10"/>
           <p:cNvSpPr txBox="1"/>
           <p:nvPr/>
         </p:nvSpPr>
@@ -30847,7 +32747,7 @@
             <a:r>
               <a:rPr lang="en-US" sz="1700" dirty="0">
                 <a:solidFill>
-                  <a:srgbClr val="A7B0BD"/>
+                  <a:srgbClr val="CDD3DC"/>
                 </a:solidFill>
                 <a:latin typeface="Calibri" pitchFamily="34" charset="0"/>
                 <a:ea typeface="Calibri" pitchFamily="34" charset="-122"/>
@@ -30861,7 +32761,7 @@
       </p:sp>
       <p:sp>
         <p:nvSpPr>
-          <p:cNvPr id="15" name="e30_11"/>
+          <p:cNvPr id="15" name="e31_11"/>
           <p:cNvSpPr/>
           <p:nvPr/>
         </p:nvSpPr>
@@ -30888,7 +32788,7 @@
       </p:sp>
       <p:pic>
         <p:nvPicPr>
-          <p:cNvPr id="16" name="e30_12" descr="preencoded.png">    </p:cNvPr>
+          <p:cNvPr id="16" name="e31_12" descr="preencoded.png">    </p:cNvPr>
           <p:cNvPicPr>
             <a:picLocks noChangeAspect="1"/>
           </p:cNvPicPr>
@@ -30912,7 +32812,7 @@
       </p:pic>
       <p:sp>
         <p:nvSpPr>
-          <p:cNvPr id="17" name="e30_13"/>
+          <p:cNvPr id="17" name="e31_13"/>
           <p:cNvSpPr txBox="1"/>
           <p:nvPr/>
         </p:nvSpPr>
@@ -30951,7 +32851,7 @@
       </p:sp>
       <p:sp>
         <p:nvSpPr>
-          <p:cNvPr id="18" name="e30_14"/>
+          <p:cNvPr id="18" name="e31_14"/>
           <p:cNvSpPr txBox="1"/>
           <p:nvPr/>
         </p:nvSpPr>
@@ -30976,7 +32876,7 @@
             <a:r>
               <a:rPr lang="en-US" sz="1700" dirty="0">
                 <a:solidFill>
-                  <a:srgbClr val="A7B0BD"/>
+                  <a:srgbClr val="CDD3DC"/>
                 </a:solidFill>
                 <a:latin typeface="Calibri" pitchFamily="34" charset="0"/>
                 <a:ea typeface="Calibri" pitchFamily="34" charset="-122"/>
@@ -30990,7 +32890,7 @@
       </p:sp>
       <p:sp>
         <p:nvSpPr>
-          <p:cNvPr id="19" name="e30_15"/>
+          <p:cNvPr id="19" name="e31_15"/>
           <p:cNvSpPr txBox="1"/>
           <p:nvPr/>
         </p:nvSpPr>
@@ -31036,7 +32936,7 @@
       </p:sp>
       <p:sp>
         <p:nvSpPr>
-          <p:cNvPr id="20" name="e30_16"/>
+          <p:cNvPr id="20" name="e31_16"/>
           <p:cNvSpPr txBox="1"/>
           <p:nvPr/>
         </p:nvSpPr>
@@ -32037,9 +33937,9 @@
 </p:sld>
 </file>
 
-<file path=ppt/slides/slide31.xml><?xml version="1.0" encoding="utf-8"?>
+<file path=ppt/slides/slide32.xml><?xml version="1.0" encoding="utf-8"?>
 <p:sld xmlns:a="http://schemas.openxmlformats.org/drawingml/2006/main" xmlns:r="http://schemas.openxmlformats.org/officeDocument/2006/relationships" xmlns:p="http://schemas.openxmlformats.org/presentationml/2006/main">
-  <p:cSld name="Slide 31">
+  <p:cSld name="Slide 32">
     <p:bg>
       <p:bgPr>
         <a:solidFill>
@@ -32126,7 +34026,7 @@
       </p:sp>
       <p:sp>
         <p:nvSpPr>
-          <p:cNvPr id="5" name="e31_1"/>
+          <p:cNvPr id="5" name="e32_1"/>
           <p:cNvSpPr txBox="1"/>
           <p:nvPr/>
         </p:nvSpPr>
@@ -32165,7 +34065,7 @@
       </p:sp>
       <p:sp>
         <p:nvSpPr>
-          <p:cNvPr id="6" name="e31_2"/>
+          <p:cNvPr id="6" name="e32_2"/>
           <p:cNvSpPr txBox="1"/>
           <p:nvPr/>
         </p:nvSpPr>
@@ -32207,7 +34107,7 @@
       </p:sp>
       <p:sp>
         <p:nvSpPr>
-          <p:cNvPr id="7" name="e31_3"/>
+          <p:cNvPr id="7" name="e32_3"/>
           <p:cNvSpPr/>
           <p:nvPr/>
         </p:nvSpPr>
@@ -32232,7 +34132,7 @@
       </p:sp>
       <p:pic>
         <p:nvPicPr>
-          <p:cNvPr id="8" name="e31_4" descr="preencoded.png">    </p:cNvPr>
+          <p:cNvPr id="8" name="e32_4" descr="preencoded.png">    </p:cNvPr>
           <p:cNvPicPr>
             <a:picLocks noChangeAspect="1"/>
           </p:cNvPicPr>
@@ -32256,7 +34156,7 @@
       </p:pic>
       <p:sp>
         <p:nvSpPr>
-          <p:cNvPr id="9" name="e31_5"/>
+          <p:cNvPr id="9" name="e32_5"/>
           <p:cNvSpPr txBox="1"/>
           <p:nvPr/>
         </p:nvSpPr>
@@ -32295,7 +34195,7 @@
       </p:sp>
       <p:sp>
         <p:nvSpPr>
-          <p:cNvPr id="10" name="e31_6"/>
+          <p:cNvPr id="10" name="e32_6"/>
           <p:cNvSpPr/>
           <p:nvPr/>
         </p:nvSpPr>
@@ -32320,7 +34220,7 @@
       </p:sp>
       <p:pic>
         <p:nvPicPr>
-          <p:cNvPr id="11" name="e31_7" descr="preencoded.png">    </p:cNvPr>
+          <p:cNvPr id="11" name="e32_7" descr="preencoded.png">    </p:cNvPr>
           <p:cNvPicPr>
             <a:picLocks noChangeAspect="1"/>
           </p:cNvPicPr>
@@ -32344,7 +34244,7 @@
       </p:pic>
       <p:sp>
         <p:nvSpPr>
-          <p:cNvPr id="12" name="e31_8"/>
+          <p:cNvPr id="12" name="e32_8"/>
           <p:cNvSpPr txBox="1"/>
           <p:nvPr/>
         </p:nvSpPr>
@@ -32383,7 +34283,7 @@
       </p:sp>
       <p:sp>
         <p:nvSpPr>
-          <p:cNvPr id="13" name="e31_9"/>
+          <p:cNvPr id="13" name="e32_9"/>
           <p:cNvSpPr/>
           <p:nvPr/>
         </p:nvSpPr>
@@ -32408,7 +34308,7 @@
       </p:sp>
       <p:pic>
         <p:nvPicPr>
-          <p:cNvPr id="14" name="e31_10" descr="preencoded.png">    </p:cNvPr>
+          <p:cNvPr id="14" name="e32_10" descr="preencoded.png">    </p:cNvPr>
           <p:cNvPicPr>
             <a:picLocks noChangeAspect="1"/>
           </p:cNvPicPr>
@@ -32432,7 +34332,7 @@
       </p:pic>
       <p:sp>
         <p:nvSpPr>
-          <p:cNvPr id="15" name="e31_11"/>
+          <p:cNvPr id="15" name="e32_11"/>
           <p:cNvSpPr txBox="1"/>
           <p:nvPr/>
         </p:nvSpPr>
@@ -33163,1093 +35063,6 @@
 </p:sld>
 </file>
 
-<file path=ppt/slides/slide32.xml><?xml version="1.0" encoding="utf-8"?>
-<p:sld xmlns:a="http://schemas.openxmlformats.org/drawingml/2006/main" xmlns:r="http://schemas.openxmlformats.org/officeDocument/2006/relationships" xmlns:p="http://schemas.openxmlformats.org/presentationml/2006/main">
-  <p:cSld name="Slide 32">
-    <p:bg>
-      <p:bgPr>
-        <a:solidFill>
-          <a:srgbClr val="07080B"/>
-        </a:solidFill>
-      </p:bgPr>
-    </p:bg>
-    <p:spTree>
-      <p:nvGrpSpPr>
-        <p:cNvPr id="2" name=""/>
-        <p:cNvGrpSpPr/>
-        <p:nvPr/>
-      </p:nvGrpSpPr>
-      <p:grpSpPr>
-        <a:xfrm>
-          <a:off x="0" y="0"/>
-          <a:ext cx="0" cy="0"/>
-          <a:chOff x="0" y="0"/>
-          <a:chExt cx="0" cy="0"/>
-        </a:xfrm>
-      </p:grpSpPr>
-      <p:pic>
-        <p:nvPicPr>
-          <p:cNvPr id="3" name="!!bg" descr="Hintergrund">    </p:cNvPr>
-          <p:cNvPicPr>
-            <a:picLocks noChangeAspect="1"/>
-          </p:cNvPicPr>
-          <p:nvPr/>
-        </p:nvPicPr>
-        <p:blipFill>
-          <a:blip r:embed="rId1"/>
-          <a:stretch>
-            <a:fillRect/>
-          </a:stretch>
-        </p:blipFill>
-        <p:spPr>
-          <a:xfrm>
-            <a:off x="0" y="0"/>
-            <a:ext cx="12191695" cy="6858000"/>
-          </a:xfrm>
-          <a:prstGeom prst="rect">
-            <a:avLst/>
-          </a:prstGeom>
-        </p:spPr>
-      </p:pic>
-      <p:sp>
-        <p:nvSpPr>
-          <p:cNvPr id="4" name="!!ft"/>
-          <p:cNvSpPr txBox="1"/>
-          <p:nvPr/>
-        </p:nvSpPr>
-        <p:spPr>
-          <a:xfrm>
-            <a:off x="9174175" y="292608"/>
-            <a:ext cx="2560320" cy="228600"/>
-          </a:xfrm>
-          <a:prstGeom prst="rect">
-            <a:avLst/>
-          </a:prstGeom>
-          <a:noFill/>
-          <a:ln/>
-        </p:spPr>
-        <p:txBody>
-          <a:bodyPr wrap="square" lIns="0" tIns="0" rIns="0" bIns="0" rtlCol="0" anchor="t"/>
-          <a:lstStyle/>
-          <a:p>
-            <a:pPr algn="r" indent="0" marL="0">
-              <a:buNone/>
-            </a:pPr>
-            <a:r>
-              <a:rPr lang="en-US" sz="1000" b="1" spc="300" kern="0" dirty="0">
-                <a:solidFill>
-                  <a:srgbClr val="6E7888"/>
-                </a:solidFill>
-                <a:latin typeface="Calibri" pitchFamily="34" charset="0"/>
-                <a:ea typeface="Calibri" pitchFamily="34" charset="-122"/>
-                <a:cs typeface="Calibri" pitchFamily="34" charset="-120"/>
-              </a:rPr>
-              <a:t>FAHRLEHRER SERBAND</a:t>
-            </a:r>
-            <a:endParaRPr lang="en-US" sz="1000" dirty="0"/>
-          </a:p>
-        </p:txBody>
-      </p:sp>
-      <p:sp>
-        <p:nvSpPr>
-          <p:cNvPr id="5" name="e32_1"/>
-          <p:cNvSpPr txBox="1"/>
-          <p:nvPr/>
-        </p:nvSpPr>
-        <p:spPr>
-          <a:xfrm>
-            <a:off x="731520" y="822960"/>
-            <a:ext cx="8229600" cy="320040"/>
-          </a:xfrm>
-          <a:prstGeom prst="rect">
-            <a:avLst/>
-          </a:prstGeom>
-          <a:noFill/>
-          <a:ln/>
-        </p:spPr>
-        <p:txBody>
-          <a:bodyPr wrap="square" lIns="0" tIns="0" rIns="0" bIns="0" rtlCol="0" anchor="t"/>
-          <a:lstStyle/>
-          <a:p>
-            <a:pPr algn="l" indent="0" marL="0">
-              <a:buNone/>
-            </a:pPr>
-            <a:r>
-              <a:rPr lang="en-US" sz="1300" b="1" spc="500" kern="0" dirty="0">
-                <a:solidFill>
-                  <a:srgbClr val="FF4D4D"/>
-                </a:solidFill>
-                <a:latin typeface="Calibri" pitchFamily="34" charset="0"/>
-                <a:ea typeface="Calibri" pitchFamily="34" charset="-122"/>
-                <a:cs typeface="Calibri" pitchFamily="34" charset="-120"/>
-              </a:rPr>
-              <a:t>DAS KOMMT NOCH</a:t>
-            </a:r>
-            <a:endParaRPr lang="en-US" sz="1300" dirty="0"/>
-          </a:p>
-        </p:txBody>
-      </p:sp>
-      <p:sp>
-        <p:nvSpPr>
-          <p:cNvPr id="6" name="e32_2"/>
-          <p:cNvSpPr txBox="1"/>
-          <p:nvPr/>
-        </p:nvSpPr>
-        <p:spPr>
-          <a:xfrm>
-            <a:off x="685800" y="1188720"/>
-            <a:ext cx="10972800" cy="914400"/>
-          </a:xfrm>
-          <a:prstGeom prst="rect">
-            <a:avLst/>
-          </a:prstGeom>
-          <a:noFill/>
-          <a:ln/>
-        </p:spPr>
-        <p:txBody>
-          <a:bodyPr wrap="square" lIns="0" tIns="0" rIns="0" bIns="0" rtlCol="0" anchor="t"/>
-          <a:lstStyle/>
-          <a:p>
-            <a:pPr algn="l" indent="0" marL="0">
-              <a:lnSpc>
-                <a:spcPct val="95000"/>
-              </a:lnSpc>
-              <a:buNone/>
-            </a:pPr>
-            <a:r>
-              <a:rPr lang="en-US" sz="4400" b="1" dirty="0">
-                <a:solidFill>
-                  <a:srgbClr val="F5F2EC"/>
-                </a:solidFill>
-                <a:latin typeface="Cambria" pitchFamily="34" charset="0"/>
-                <a:ea typeface="Cambria" pitchFamily="34" charset="-122"/>
-                <a:cs typeface="Cambria" pitchFamily="34" charset="-120"/>
-              </a:rPr>
-              <a:t>Das gehört auch zu Lektion 11</a:t>
-            </a:r>
-            <a:endParaRPr lang="en-US" sz="4400" dirty="0"/>
-          </a:p>
-        </p:txBody>
-      </p:sp>
-      <p:sp>
-        <p:nvSpPr>
-          <p:cNvPr id="7" name="e32_3"/>
-          <p:cNvSpPr txBox="1"/>
-          <p:nvPr/>
-        </p:nvSpPr>
-        <p:spPr>
-          <a:xfrm>
-            <a:off x="731520" y="2651760"/>
-            <a:ext cx="3429000" cy="731520"/>
-          </a:xfrm>
-          <a:prstGeom prst="roundRect">
-            <a:avLst>
-              <a:gd name="adj" fmla="val 31250"/>
-            </a:avLst>
-          </a:prstGeom>
-          <a:solidFill>
-            <a:srgbClr val="12161E"/>
-          </a:solidFill>
-          <a:ln w="12700">
-            <a:solidFill>
-              <a:srgbClr val="2A3342"/>
-            </a:solidFill>
-          </a:ln>
-        </p:spPr>
-        <p:txBody>
-          <a:bodyPr wrap="square" lIns="0" tIns="0" rIns="0" bIns="0" rtlCol="0" anchor="ctr"/>
-          <a:lstStyle/>
-          <a:p>
-            <a:pPr algn="ctr" indent="0" marL="0">
-              <a:buNone/>
-            </a:pPr>
-            <a:r>
-              <a:rPr lang="en-US" sz="1900" b="1" dirty="0">
-                <a:solidFill>
-                  <a:srgbClr val="F5F2EC"/>
-                </a:solidFill>
-                <a:latin typeface="Calibri" pitchFamily="34" charset="0"/>
-                <a:ea typeface="Calibri" pitchFamily="34" charset="-122"/>
-                <a:cs typeface="Calibri" pitchFamily="34" charset="-120"/>
-              </a:rPr>
-              <a:t>Nach dem Unfall</a:t>
-            </a:r>
-            <a:endParaRPr lang="en-US" sz="1900" dirty="0"/>
-          </a:p>
-        </p:txBody>
-      </p:sp>
-      <p:sp>
-        <p:nvSpPr>
-          <p:cNvPr id="8" name="e32_4"/>
-          <p:cNvSpPr txBox="1"/>
-          <p:nvPr/>
-        </p:nvSpPr>
-        <p:spPr>
-          <a:xfrm>
-            <a:off x="4361688" y="2651760"/>
-            <a:ext cx="3429000" cy="731520"/>
-          </a:xfrm>
-          <a:prstGeom prst="roundRect">
-            <a:avLst>
-              <a:gd name="adj" fmla="val 31250"/>
-            </a:avLst>
-          </a:prstGeom>
-          <a:solidFill>
-            <a:srgbClr val="12161E"/>
-          </a:solidFill>
-          <a:ln w="12700">
-            <a:solidFill>
-              <a:srgbClr val="2A3342"/>
-            </a:solidFill>
-          </a:ln>
-        </p:spPr>
-        <p:txBody>
-          <a:bodyPr wrap="square" lIns="0" tIns="0" rIns="0" bIns="0" rtlCol="0" anchor="ctr"/>
-          <a:lstStyle/>
-          <a:p>
-            <a:pPr algn="ctr" indent="0" marL="0">
-              <a:buNone/>
-            </a:pPr>
-            <a:r>
-              <a:rPr lang="en-US" sz="1900" b="1" dirty="0">
-                <a:solidFill>
-                  <a:srgbClr val="F5F2EC"/>
-                </a:solidFill>
-                <a:latin typeface="Calibri" pitchFamily="34" charset="0"/>
-                <a:ea typeface="Calibri" pitchFamily="34" charset="-122"/>
-                <a:cs typeface="Calibri" pitchFamily="34" charset="-120"/>
-              </a:rPr>
-              <a:t>Bußgeld, Fahrverbot, Strafe</a:t>
-            </a:r>
-            <a:endParaRPr lang="en-US" sz="1900" dirty="0"/>
-          </a:p>
-        </p:txBody>
-      </p:sp>
-      <p:sp>
-        <p:nvSpPr>
-          <p:cNvPr id="9" name="e32_5"/>
-          <p:cNvSpPr txBox="1"/>
-          <p:nvPr/>
-        </p:nvSpPr>
-        <p:spPr>
-          <a:xfrm>
-            <a:off x="7991856" y="2651760"/>
-            <a:ext cx="3429000" cy="731520"/>
-          </a:xfrm>
-          <a:prstGeom prst="roundRect">
-            <a:avLst>
-              <a:gd name="adj" fmla="val 31250"/>
-            </a:avLst>
-          </a:prstGeom>
-          <a:solidFill>
-            <a:srgbClr val="12161E"/>
-          </a:solidFill>
-          <a:ln w="12700">
-            <a:solidFill>
-              <a:srgbClr val="2A3342"/>
-            </a:solidFill>
-          </a:ln>
-        </p:spPr>
-        <p:txBody>
-          <a:bodyPr wrap="square" lIns="0" tIns="0" rIns="0" bIns="0" rtlCol="0" anchor="ctr"/>
-          <a:lstStyle/>
-          <a:p>
-            <a:pPr algn="ctr" indent="0" marL="0">
-              <a:buNone/>
-            </a:pPr>
-            <a:r>
-              <a:rPr lang="en-US" sz="1900" b="1" dirty="0">
-                <a:solidFill>
-                  <a:srgbClr val="F5F2EC"/>
-                </a:solidFill>
-                <a:latin typeface="Calibri" pitchFamily="34" charset="0"/>
-                <a:ea typeface="Calibri" pitchFamily="34" charset="-122"/>
-                <a:cs typeface="Calibri" pitchFamily="34" charset="-120"/>
-              </a:rPr>
-              <a:t>Punkte in Flensburg</a:t>
-            </a:r>
-            <a:endParaRPr lang="en-US" sz="1900" dirty="0"/>
-          </a:p>
-        </p:txBody>
-      </p:sp>
-      <p:sp>
-        <p:nvSpPr>
-          <p:cNvPr id="10" name="e32_6"/>
-          <p:cNvSpPr txBox="1"/>
-          <p:nvPr/>
-        </p:nvSpPr>
-        <p:spPr>
-          <a:xfrm>
-            <a:off x="731520" y="3657600"/>
-            <a:ext cx="3429000" cy="731520"/>
-          </a:xfrm>
-          <a:prstGeom prst="roundRect">
-            <a:avLst>
-              <a:gd name="adj" fmla="val 31250"/>
-            </a:avLst>
-          </a:prstGeom>
-          <a:solidFill>
-            <a:srgbClr val="12161E"/>
-          </a:solidFill>
-          <a:ln w="12700">
-            <a:solidFill>
-              <a:srgbClr val="2A3342"/>
-            </a:solidFill>
-          </a:ln>
-        </p:spPr>
-        <p:txBody>
-          <a:bodyPr wrap="square" lIns="0" tIns="0" rIns="0" bIns="0" rtlCol="0" anchor="ctr"/>
-          <a:lstStyle/>
-          <a:p>
-            <a:pPr algn="ctr" indent="0" marL="0">
-              <a:buNone/>
-            </a:pPr>
-            <a:r>
-              <a:rPr lang="en-US" sz="1900" b="1" dirty="0">
-                <a:solidFill>
-                  <a:srgbClr val="F5F2EC"/>
-                </a:solidFill>
-                <a:latin typeface="Calibri" pitchFamily="34" charset="0"/>
-                <a:ea typeface="Calibri" pitchFamily="34" charset="-122"/>
-                <a:cs typeface="Calibri" pitchFamily="34" charset="-120"/>
-              </a:rPr>
-              <a:t>Entzug der Fahrerlaubnis</a:t>
-            </a:r>
-            <a:endParaRPr lang="en-US" sz="1900" dirty="0"/>
-          </a:p>
-        </p:txBody>
-      </p:sp>
-      <p:sp>
-        <p:nvSpPr>
-          <p:cNvPr id="11" name="e32_7"/>
-          <p:cNvSpPr txBox="1"/>
-          <p:nvPr/>
-        </p:nvSpPr>
-        <p:spPr>
-          <a:xfrm>
-            <a:off x="4361688" y="3657600"/>
-            <a:ext cx="3429000" cy="731520"/>
-          </a:xfrm>
-          <a:prstGeom prst="roundRect">
-            <a:avLst>
-              <a:gd name="adj" fmla="val 31250"/>
-            </a:avLst>
-          </a:prstGeom>
-          <a:solidFill>
-            <a:srgbClr val="12161E"/>
-          </a:solidFill>
-          <a:ln w="12700">
-            <a:solidFill>
-              <a:srgbClr val="2A3342"/>
-            </a:solidFill>
-          </a:ln>
-        </p:spPr>
-        <p:txBody>
-          <a:bodyPr wrap="square" lIns="0" tIns="0" rIns="0" bIns="0" rtlCol="0" anchor="ctr"/>
-          <a:lstStyle/>
-          <a:p>
-            <a:pPr algn="ctr" indent="0" marL="0">
-              <a:buNone/>
-            </a:pPr>
-            <a:r>
-              <a:rPr lang="en-US" sz="1900" b="1" dirty="0">
-                <a:solidFill>
-                  <a:srgbClr val="F5F2EC"/>
-                </a:solidFill>
-                <a:latin typeface="Calibri" pitchFamily="34" charset="0"/>
-                <a:ea typeface="Calibri" pitchFamily="34" charset="-122"/>
-                <a:cs typeface="Calibri" pitchFamily="34" charset="-120"/>
-              </a:rPr>
-              <a:t>Versicherung und Regress</a:t>
-            </a:r>
-            <a:endParaRPr lang="en-US" sz="1900" dirty="0"/>
-          </a:p>
-        </p:txBody>
-      </p:sp>
-      <p:sp>
-        <p:nvSpPr>
-          <p:cNvPr id="12" name="e32_8"/>
-          <p:cNvSpPr txBox="1"/>
-          <p:nvPr/>
-        </p:nvSpPr>
-        <p:spPr>
-          <a:xfrm>
-            <a:off x="7991856" y="3657600"/>
-            <a:ext cx="3429000" cy="731520"/>
-          </a:xfrm>
-          <a:prstGeom prst="roundRect">
-            <a:avLst>
-              <a:gd name="adj" fmla="val 31250"/>
-            </a:avLst>
-          </a:prstGeom>
-          <a:solidFill>
-            <a:srgbClr val="12161E"/>
-          </a:solidFill>
-          <a:ln w="12700">
-            <a:solidFill>
-              <a:srgbClr val="2A3342"/>
-            </a:solidFill>
-          </a:ln>
-        </p:spPr>
-        <p:txBody>
-          <a:bodyPr wrap="square" lIns="0" tIns="0" rIns="0" bIns="0" rtlCol="0" anchor="ctr"/>
-          <a:lstStyle/>
-          <a:p>
-            <a:pPr algn="ctr" indent="0" marL="0">
-              <a:buNone/>
-            </a:pPr>
-            <a:r>
-              <a:rPr lang="en-US" sz="1900" b="1" dirty="0">
-                <a:solidFill>
-                  <a:srgbClr val="F5F2EC"/>
-                </a:solidFill>
-                <a:latin typeface="Calibri" pitchFamily="34" charset="0"/>
-                <a:ea typeface="Calibri" pitchFamily="34" charset="-122"/>
-                <a:cs typeface="Calibri" pitchFamily="34" charset="-120"/>
-              </a:rPr>
-              <a:t>MPU</a:t>
-            </a:r>
-            <a:endParaRPr lang="en-US" sz="1900" dirty="0"/>
-          </a:p>
-        </p:txBody>
-      </p:sp>
-      <p:sp>
-        <p:nvSpPr>
-          <p:cNvPr id="13" name="e32_9"/>
-          <p:cNvSpPr txBox="1"/>
-          <p:nvPr/>
-        </p:nvSpPr>
-        <p:spPr>
-          <a:xfrm>
-            <a:off x="731520" y="4937760"/>
-            <a:ext cx="10058400" cy="457200"/>
-          </a:xfrm>
-          <a:prstGeom prst="rect">
-            <a:avLst/>
-          </a:prstGeom>
-          <a:noFill/>
-          <a:ln/>
-        </p:spPr>
-        <p:txBody>
-          <a:bodyPr wrap="square" lIns="0" tIns="0" rIns="0" bIns="0" rtlCol="0" anchor="t"/>
-          <a:lstStyle/>
-          <a:p>
-            <a:pPr algn="l" indent="0" marL="0">
-              <a:buNone/>
-            </a:pPr>
-            <a:r>
-              <a:rPr lang="en-US" sz="1900" i="1" dirty="0">
-                <a:solidFill>
-                  <a:srgbClr val="A7B0BD"/>
-                </a:solidFill>
-                <a:latin typeface="Calibri" pitchFamily="34" charset="0"/>
-                <a:ea typeface="Calibri" pitchFamily="34" charset="-122"/>
-                <a:cs typeface="Calibri" pitchFamily="34" charset="-120"/>
-              </a:rPr>
-              <a:t>Probezeit und Seminare: siehe Lektion 12.</a:t>
-            </a:r>
-            <a:endParaRPr lang="en-US" sz="1900" dirty="0"/>
-          </a:p>
-        </p:txBody>
-      </p:sp>
-    </p:spTree>
-  </p:cSld>
-  <p:clrMapOvr>
-    <a:masterClrMapping/>
-  </p:clrMapOvr>
-  <p:transition spd="med">
-    <p:fade/>
-  </p:transition>
-  <p:timing>
-    <p:tnLst>
-      <p:par>
-        <p:cTn id="1" dur="indefinite" restart="never" nodeType="tmRoot">
-          <p:childTnLst>
-            <p:seq concurrent="1" nextAc="seek">
-              <p:cTn id="2" dur="indefinite" nodeType="mainSeq">
-                <p:childTnLst>
-                  <p:par>
-                    <p:cTn id="3" fill="hold">
-                      <p:stCondLst>
-                        <p:cond delay="indefinite"/>
-                      </p:stCondLst>
-                      <p:childTnLst>
-                        <p:par>
-                          <p:cTn id="4" fill="hold">
-                            <p:stCondLst>
-                              <p:cond delay="0"/>
-                            </p:stCondLst>
-                            <p:childTnLst>
-                              <p:par>
-                                <p:cTn id="5" presetID="42" presetClass="entr" presetSubtype="0" fill="hold" grpId="0" nodeType="clickEffect">
-                                  <p:stCondLst>
-                                    <p:cond delay="0"/>
-                                  </p:stCondLst>
-                                  <p:childTnLst>
-                                    <p:set>
-                                      <p:cBhvr>
-                                        <p:cTn id="6" dur="1" fill="hold">
-                                          <p:stCondLst>
-                                            <p:cond delay="0"/>
-                                          </p:stCondLst>
-                                        </p:cTn>
-                                        <p:tgtEl>
-                                          <p:spTgt spid="7"/>
-                                        </p:tgtEl>
-                                        <p:attrNameLst>
-                                          <p:attrName>style.visibility</p:attrName>
-                                        </p:attrNameLst>
-                                      </p:cBhvr>
-                                      <p:to>
-                                        <p:strVal val="visible"/>
-                                      </p:to>
-                                    </p:set>
-                                    <p:animEffect transition="in" filter="fade">
-                                      <p:cBhvr>
-                                        <p:cTn id="7" dur="800"/>
-                                        <p:tgtEl>
-                                          <p:spTgt spid="7"/>
-                                        </p:tgtEl>
-                                      </p:cBhvr>
-                                    </p:animEffect>
-                                    <p:anim calcmode="lin" valueType="num">
-                                      <p:cBhvr additive="base">
-                                        <p:cTn id="8" dur="800" fill="hold" decel="100000"/>
-                                        <p:tgtEl>
-                                          <p:spTgt spid="7"/>
-                                        </p:tgtEl>
-                                        <p:attrNameLst>
-                                          <p:attrName>ppt_x</p:attrName>
-                                        </p:attrNameLst>
-                                      </p:cBhvr>
-                                      <p:tavLst>
-                                        <p:tav tm="0">
-                                          <p:val>
-                                            <p:strVal val="#ppt_x"/>
-                                          </p:val>
-                                        </p:tav>
-                                        <p:tav tm="100000">
-                                          <p:val>
-                                            <p:strVal val="#ppt_x"/>
-                                          </p:val>
-                                        </p:tav>
-                                      </p:tavLst>
-                                    </p:anim>
-                                    <p:anim calcmode="lin" valueType="num">
-                                      <p:cBhvr additive="base">
-                                        <p:cTn id="9" dur="800" fill="hold" decel="100000"/>
-                                        <p:tgtEl>
-                                          <p:spTgt spid="7"/>
-                                        </p:tgtEl>
-                                        <p:attrNameLst>
-                                          <p:attrName>ppt_y</p:attrName>
-                                        </p:attrNameLst>
-                                      </p:cBhvr>
-                                      <p:tavLst>
-                                        <p:tav tm="0">
-                                          <p:val>
-                                            <p:strVal val="#ppt_y+.18"/>
-                                          </p:val>
-                                        </p:tav>
-                                        <p:tav tm="100000">
-                                          <p:val>
-                                            <p:strVal val="#ppt_y"/>
-                                          </p:val>
-                                        </p:tav>
-                                      </p:tavLst>
-                                    </p:anim>
-                                  </p:childTnLst>
-                                </p:cTn>
-                              </p:par>
-                              <p:par>
-                                <p:cTn id="10" presetID="42" presetClass="entr" presetSubtype="0" fill="hold" grpId="0" nodeType="withEffect">
-                                  <p:stCondLst>
-                                    <p:cond delay="120"/>
-                                  </p:stCondLst>
-                                  <p:childTnLst>
-                                    <p:set>
-                                      <p:cBhvr>
-                                        <p:cTn id="11" dur="1" fill="hold">
-                                          <p:stCondLst>
-                                            <p:cond delay="0"/>
-                                          </p:stCondLst>
-                                        </p:cTn>
-                                        <p:tgtEl>
-                                          <p:spTgt spid="8"/>
-                                        </p:tgtEl>
-                                        <p:attrNameLst>
-                                          <p:attrName>style.visibility</p:attrName>
-                                        </p:attrNameLst>
-                                      </p:cBhvr>
-                                      <p:to>
-                                        <p:strVal val="visible"/>
-                                      </p:to>
-                                    </p:set>
-                                    <p:animEffect transition="in" filter="fade">
-                                      <p:cBhvr>
-                                        <p:cTn id="12" dur="800"/>
-                                        <p:tgtEl>
-                                          <p:spTgt spid="8"/>
-                                        </p:tgtEl>
-                                      </p:cBhvr>
-                                    </p:animEffect>
-                                    <p:anim calcmode="lin" valueType="num">
-                                      <p:cBhvr additive="base">
-                                        <p:cTn id="13" dur="800" fill="hold" decel="100000"/>
-                                        <p:tgtEl>
-                                          <p:spTgt spid="8"/>
-                                        </p:tgtEl>
-                                        <p:attrNameLst>
-                                          <p:attrName>ppt_x</p:attrName>
-                                        </p:attrNameLst>
-                                      </p:cBhvr>
-                                      <p:tavLst>
-                                        <p:tav tm="0">
-                                          <p:val>
-                                            <p:strVal val="#ppt_x"/>
-                                          </p:val>
-                                        </p:tav>
-                                        <p:tav tm="100000">
-                                          <p:val>
-                                            <p:strVal val="#ppt_x"/>
-                                          </p:val>
-                                        </p:tav>
-                                      </p:tavLst>
-                                    </p:anim>
-                                    <p:anim calcmode="lin" valueType="num">
-                                      <p:cBhvr additive="base">
-                                        <p:cTn id="14" dur="800" fill="hold" decel="100000"/>
-                                        <p:tgtEl>
-                                          <p:spTgt spid="8"/>
-                                        </p:tgtEl>
-                                        <p:attrNameLst>
-                                          <p:attrName>ppt_y</p:attrName>
-                                        </p:attrNameLst>
-                                      </p:cBhvr>
-                                      <p:tavLst>
-                                        <p:tav tm="0">
-                                          <p:val>
-                                            <p:strVal val="#ppt_y+.18"/>
-                                          </p:val>
-                                        </p:tav>
-                                        <p:tav tm="100000">
-                                          <p:val>
-                                            <p:strVal val="#ppt_y"/>
-                                          </p:val>
-                                        </p:tav>
-                                      </p:tavLst>
-                                    </p:anim>
-                                  </p:childTnLst>
-                                </p:cTn>
-                              </p:par>
-                              <p:par>
-                                <p:cTn id="15" presetID="42" presetClass="entr" presetSubtype="0" fill="hold" grpId="0" nodeType="withEffect">
-                                  <p:stCondLst>
-                                    <p:cond delay="240"/>
-                                  </p:stCondLst>
-                                  <p:childTnLst>
-                                    <p:set>
-                                      <p:cBhvr>
-                                        <p:cTn id="16" dur="1" fill="hold">
-                                          <p:stCondLst>
-                                            <p:cond delay="0"/>
-                                          </p:stCondLst>
-                                        </p:cTn>
-                                        <p:tgtEl>
-                                          <p:spTgt spid="9"/>
-                                        </p:tgtEl>
-                                        <p:attrNameLst>
-                                          <p:attrName>style.visibility</p:attrName>
-                                        </p:attrNameLst>
-                                      </p:cBhvr>
-                                      <p:to>
-                                        <p:strVal val="visible"/>
-                                      </p:to>
-                                    </p:set>
-                                    <p:animEffect transition="in" filter="fade">
-                                      <p:cBhvr>
-                                        <p:cTn id="17" dur="800"/>
-                                        <p:tgtEl>
-                                          <p:spTgt spid="9"/>
-                                        </p:tgtEl>
-                                      </p:cBhvr>
-                                    </p:animEffect>
-                                    <p:anim calcmode="lin" valueType="num">
-                                      <p:cBhvr additive="base">
-                                        <p:cTn id="18" dur="800" fill="hold" decel="100000"/>
-                                        <p:tgtEl>
-                                          <p:spTgt spid="9"/>
-                                        </p:tgtEl>
-                                        <p:attrNameLst>
-                                          <p:attrName>ppt_x</p:attrName>
-                                        </p:attrNameLst>
-                                      </p:cBhvr>
-                                      <p:tavLst>
-                                        <p:tav tm="0">
-                                          <p:val>
-                                            <p:strVal val="#ppt_x"/>
-                                          </p:val>
-                                        </p:tav>
-                                        <p:tav tm="100000">
-                                          <p:val>
-                                            <p:strVal val="#ppt_x"/>
-                                          </p:val>
-                                        </p:tav>
-                                      </p:tavLst>
-                                    </p:anim>
-                                    <p:anim calcmode="lin" valueType="num">
-                                      <p:cBhvr additive="base">
-                                        <p:cTn id="19" dur="800" fill="hold" decel="100000"/>
-                                        <p:tgtEl>
-                                          <p:spTgt spid="9"/>
-                                        </p:tgtEl>
-                                        <p:attrNameLst>
-                                          <p:attrName>ppt_y</p:attrName>
-                                        </p:attrNameLst>
-                                      </p:cBhvr>
-                                      <p:tavLst>
-                                        <p:tav tm="0">
-                                          <p:val>
-                                            <p:strVal val="#ppt_y+.18"/>
-                                          </p:val>
-                                        </p:tav>
-                                        <p:tav tm="100000">
-                                          <p:val>
-                                            <p:strVal val="#ppt_y"/>
-                                          </p:val>
-                                        </p:tav>
-                                      </p:tavLst>
-                                    </p:anim>
-                                  </p:childTnLst>
-                                </p:cTn>
-                              </p:par>
-                              <p:par>
-                                <p:cTn id="20" presetID="42" presetClass="entr" presetSubtype="0" fill="hold" grpId="0" nodeType="withEffect">
-                                  <p:stCondLst>
-                                    <p:cond delay="360"/>
-                                  </p:stCondLst>
-                                  <p:childTnLst>
-                                    <p:set>
-                                      <p:cBhvr>
-                                        <p:cTn id="21" dur="1" fill="hold">
-                                          <p:stCondLst>
-                                            <p:cond delay="0"/>
-                                          </p:stCondLst>
-                                        </p:cTn>
-                                        <p:tgtEl>
-                                          <p:spTgt spid="10"/>
-                                        </p:tgtEl>
-                                        <p:attrNameLst>
-                                          <p:attrName>style.visibility</p:attrName>
-                                        </p:attrNameLst>
-                                      </p:cBhvr>
-                                      <p:to>
-                                        <p:strVal val="visible"/>
-                                      </p:to>
-                                    </p:set>
-                                    <p:animEffect transition="in" filter="fade">
-                                      <p:cBhvr>
-                                        <p:cTn id="22" dur="800"/>
-                                        <p:tgtEl>
-                                          <p:spTgt spid="10"/>
-                                        </p:tgtEl>
-                                      </p:cBhvr>
-                                    </p:animEffect>
-                                    <p:anim calcmode="lin" valueType="num">
-                                      <p:cBhvr additive="base">
-                                        <p:cTn id="23" dur="800" fill="hold" decel="100000"/>
-                                        <p:tgtEl>
-                                          <p:spTgt spid="10"/>
-                                        </p:tgtEl>
-                                        <p:attrNameLst>
-                                          <p:attrName>ppt_x</p:attrName>
-                                        </p:attrNameLst>
-                                      </p:cBhvr>
-                                      <p:tavLst>
-                                        <p:tav tm="0">
-                                          <p:val>
-                                            <p:strVal val="#ppt_x"/>
-                                          </p:val>
-                                        </p:tav>
-                                        <p:tav tm="100000">
-                                          <p:val>
-                                            <p:strVal val="#ppt_x"/>
-                                          </p:val>
-                                        </p:tav>
-                                      </p:tavLst>
-                                    </p:anim>
-                                    <p:anim calcmode="lin" valueType="num">
-                                      <p:cBhvr additive="base">
-                                        <p:cTn id="24" dur="800" fill="hold" decel="100000"/>
-                                        <p:tgtEl>
-                                          <p:spTgt spid="10"/>
-                                        </p:tgtEl>
-                                        <p:attrNameLst>
-                                          <p:attrName>ppt_y</p:attrName>
-                                        </p:attrNameLst>
-                                      </p:cBhvr>
-                                      <p:tavLst>
-                                        <p:tav tm="0">
-                                          <p:val>
-                                            <p:strVal val="#ppt_y+.18"/>
-                                          </p:val>
-                                        </p:tav>
-                                        <p:tav tm="100000">
-                                          <p:val>
-                                            <p:strVal val="#ppt_y"/>
-                                          </p:val>
-                                        </p:tav>
-                                      </p:tavLst>
-                                    </p:anim>
-                                  </p:childTnLst>
-                                </p:cTn>
-                              </p:par>
-                              <p:par>
-                                <p:cTn id="25" presetID="42" presetClass="entr" presetSubtype="0" fill="hold" grpId="0" nodeType="withEffect">
-                                  <p:stCondLst>
-                                    <p:cond delay="480"/>
-                                  </p:stCondLst>
-                                  <p:childTnLst>
-                                    <p:set>
-                                      <p:cBhvr>
-                                        <p:cTn id="26" dur="1" fill="hold">
-                                          <p:stCondLst>
-                                            <p:cond delay="0"/>
-                                          </p:stCondLst>
-                                        </p:cTn>
-                                        <p:tgtEl>
-                                          <p:spTgt spid="11"/>
-                                        </p:tgtEl>
-                                        <p:attrNameLst>
-                                          <p:attrName>style.visibility</p:attrName>
-                                        </p:attrNameLst>
-                                      </p:cBhvr>
-                                      <p:to>
-                                        <p:strVal val="visible"/>
-                                      </p:to>
-                                    </p:set>
-                                    <p:animEffect transition="in" filter="fade">
-                                      <p:cBhvr>
-                                        <p:cTn id="27" dur="800"/>
-                                        <p:tgtEl>
-                                          <p:spTgt spid="11"/>
-                                        </p:tgtEl>
-                                      </p:cBhvr>
-                                    </p:animEffect>
-                                    <p:anim calcmode="lin" valueType="num">
-                                      <p:cBhvr additive="base">
-                                        <p:cTn id="28" dur="800" fill="hold" decel="100000"/>
-                                        <p:tgtEl>
-                                          <p:spTgt spid="11"/>
-                                        </p:tgtEl>
-                                        <p:attrNameLst>
-                                          <p:attrName>ppt_x</p:attrName>
-                                        </p:attrNameLst>
-                                      </p:cBhvr>
-                                      <p:tavLst>
-                                        <p:tav tm="0">
-                                          <p:val>
-                                            <p:strVal val="#ppt_x"/>
-                                          </p:val>
-                                        </p:tav>
-                                        <p:tav tm="100000">
-                                          <p:val>
-                                            <p:strVal val="#ppt_x"/>
-                                          </p:val>
-                                        </p:tav>
-                                      </p:tavLst>
-                                    </p:anim>
-                                    <p:anim calcmode="lin" valueType="num">
-                                      <p:cBhvr additive="base">
-                                        <p:cTn id="29" dur="800" fill="hold" decel="100000"/>
-                                        <p:tgtEl>
-                                          <p:spTgt spid="11"/>
-                                        </p:tgtEl>
-                                        <p:attrNameLst>
-                                          <p:attrName>ppt_y</p:attrName>
-                                        </p:attrNameLst>
-                                      </p:cBhvr>
-                                      <p:tavLst>
-                                        <p:tav tm="0">
-                                          <p:val>
-                                            <p:strVal val="#ppt_y+.18"/>
-                                          </p:val>
-                                        </p:tav>
-                                        <p:tav tm="100000">
-                                          <p:val>
-                                            <p:strVal val="#ppt_y"/>
-                                          </p:val>
-                                        </p:tav>
-                                      </p:tavLst>
-                                    </p:anim>
-                                  </p:childTnLst>
-                                </p:cTn>
-                              </p:par>
-                              <p:par>
-                                <p:cTn id="30" presetID="42" presetClass="entr" presetSubtype="0" fill="hold" grpId="0" nodeType="withEffect">
-                                  <p:stCondLst>
-                                    <p:cond delay="600"/>
-                                  </p:stCondLst>
-                                  <p:childTnLst>
-                                    <p:set>
-                                      <p:cBhvr>
-                                        <p:cTn id="31" dur="1" fill="hold">
-                                          <p:stCondLst>
-                                            <p:cond delay="0"/>
-                                          </p:stCondLst>
-                                        </p:cTn>
-                                        <p:tgtEl>
-                                          <p:spTgt spid="12"/>
-                                        </p:tgtEl>
-                                        <p:attrNameLst>
-                                          <p:attrName>style.visibility</p:attrName>
-                                        </p:attrNameLst>
-                                      </p:cBhvr>
-                                      <p:to>
-                                        <p:strVal val="visible"/>
-                                      </p:to>
-                                    </p:set>
-                                    <p:animEffect transition="in" filter="fade">
-                                      <p:cBhvr>
-                                        <p:cTn id="32" dur="800"/>
-                                        <p:tgtEl>
-                                          <p:spTgt spid="12"/>
-                                        </p:tgtEl>
-                                      </p:cBhvr>
-                                    </p:animEffect>
-                                    <p:anim calcmode="lin" valueType="num">
-                                      <p:cBhvr additive="base">
-                                        <p:cTn id="33" dur="800" fill="hold" decel="100000"/>
-                                        <p:tgtEl>
-                                          <p:spTgt spid="12"/>
-                                        </p:tgtEl>
-                                        <p:attrNameLst>
-                                          <p:attrName>ppt_x</p:attrName>
-                                        </p:attrNameLst>
-                                      </p:cBhvr>
-                                      <p:tavLst>
-                                        <p:tav tm="0">
-                                          <p:val>
-                                            <p:strVal val="#ppt_x"/>
-                                          </p:val>
-                                        </p:tav>
-                                        <p:tav tm="100000">
-                                          <p:val>
-                                            <p:strVal val="#ppt_x"/>
-                                          </p:val>
-                                        </p:tav>
-                                      </p:tavLst>
-                                    </p:anim>
-                                    <p:anim calcmode="lin" valueType="num">
-                                      <p:cBhvr additive="base">
-                                        <p:cTn id="34" dur="800" fill="hold" decel="100000"/>
-                                        <p:tgtEl>
-                                          <p:spTgt spid="12"/>
-                                        </p:tgtEl>
-                                        <p:attrNameLst>
-                                          <p:attrName>ppt_y</p:attrName>
-                                        </p:attrNameLst>
-                                      </p:cBhvr>
-                                      <p:tavLst>
-                                        <p:tav tm="0">
-                                          <p:val>
-                                            <p:strVal val="#ppt_y+.18"/>
-                                          </p:val>
-                                        </p:tav>
-                                        <p:tav tm="100000">
-                                          <p:val>
-                                            <p:strVal val="#ppt_y"/>
-                                          </p:val>
-                                        </p:tav>
-                                      </p:tavLst>
-                                    </p:anim>
-                                  </p:childTnLst>
-                                </p:cTn>
-                              </p:par>
-                            </p:childTnLst>
-                          </p:cTn>
-                        </p:par>
-                        <p:par>
-                          <p:cTn id="35" fill="hold">
-                            <p:stCondLst>
-                              <p:cond delay="1400"/>
-                            </p:stCondLst>
-                            <p:childTnLst>
-                              <p:par>
-                                <p:cTn id="36" presetID="10" presetClass="entr" presetSubtype="0" fill="hold" grpId="0" nodeType="afterEffect">
-                                  <p:stCondLst>
-                                    <p:cond delay="0"/>
-                                  </p:stCondLst>
-                                  <p:childTnLst>
-                                    <p:set>
-                                      <p:cBhvr>
-                                        <p:cTn id="37" dur="1" fill="hold">
-                                          <p:stCondLst>
-                                            <p:cond delay="0"/>
-                                          </p:stCondLst>
-                                        </p:cTn>
-                                        <p:tgtEl>
-                                          <p:spTgt spid="13"/>
-                                        </p:tgtEl>
-                                        <p:attrNameLst>
-                                          <p:attrName>style.visibility</p:attrName>
-                                        </p:attrNameLst>
-                                      </p:cBhvr>
-                                      <p:to>
-                                        <p:strVal val="visible"/>
-                                      </p:to>
-                                    </p:set>
-                                    <p:animEffect transition="in" filter="fade">
-                                      <p:cBhvr>
-                                        <p:cTn id="38" dur="600"/>
-                                        <p:tgtEl>
-                                          <p:spTgt spid="13"/>
-                                        </p:tgtEl>
-                                      </p:cBhvr>
-                                    </p:animEffect>
-                                  </p:childTnLst>
-                                </p:cTn>
-                              </p:par>
-                            </p:childTnLst>
-                          </p:cTn>
-                        </p:par>
-                      </p:childTnLst>
-                    </p:cTn>
-                  </p:par>
-                </p:childTnLst>
-              </p:cTn>
-              <p:prevCondLst>
-                <p:cond evt="onPrev" delay="0">
-                  <p:tgtEl>
-                    <p:sldTgt/>
-                  </p:tgtEl>
-                </p:cond>
-              </p:prevCondLst>
-              <p:nextCondLst>
-                <p:cond evt="onNext" delay="0">
-                  <p:tgtEl>
-                    <p:sldTgt/>
-                  </p:tgtEl>
-                </p:cond>
-              </p:nextCondLst>
-            </p:seq>
-          </p:childTnLst>
-        </p:cTn>
-      </p:par>
-    </p:tnLst>
-    <p:bldLst>
-      <p:bldP spid="7" grpId="0" animBg="1"/>
-      <p:bldP spid="8" grpId="0" animBg="1"/>
-      <p:bldP spid="9" grpId="0" animBg="1"/>
-      <p:bldP spid="10" grpId="0" animBg="1"/>
-      <p:bldP spid="11" grpId="0" animBg="1"/>
-      <p:bldP spid="12" grpId="0" animBg="1"/>
-      <p:bldP spid="13" grpId="0" animBg="1"/>
-    </p:bldLst>
-  </p:timing>
-</p:sld>
-</file>
-
 <file path=ppt/slides/slide33.xml><?xml version="1.0" encoding="utf-8"?>
 <p:sld xmlns:a="http://schemas.openxmlformats.org/drawingml/2006/main" xmlns:r="http://schemas.openxmlformats.org/officeDocument/2006/relationships" xmlns:p="http://schemas.openxmlformats.org/presentationml/2006/main">
   <p:cSld name="Slide 33">
@@ -34314,7 +35127,7 @@
         </p:blipFill>
         <p:spPr>
           <a:xfrm>
-            <a:off x="5550408" y="1371600"/>
+            <a:off x="5550408" y="822960"/>
             <a:ext cx="1097280" cy="1097280"/>
           </a:xfrm>
           <a:prstGeom prst="rect">
@@ -34330,7 +35143,7 @@
         </p:nvSpPr>
         <p:spPr>
           <a:xfrm>
-            <a:off x="731520" y="2651760"/>
+            <a:off x="731520" y="1965960"/>
             <a:ext cx="10698480" cy="1463040"/>
           </a:xfrm>
           <a:prstGeom prst="rect">
@@ -34372,8 +35185,8 @@
         </p:nvSpPr>
         <p:spPr>
           <a:xfrm>
-            <a:off x="731520" y="4297680"/>
-            <a:ext cx="10698480" cy="640080"/>
+            <a:off x="731520" y="3520440"/>
+            <a:ext cx="10698480" cy="548640"/>
           </a:xfrm>
           <a:prstGeom prst="rect">
             <a:avLst/>
@@ -34389,17 +35202,124 @@
               <a:buNone/>
             </a:pPr>
             <a:r>
-              <a:rPr lang="en-US" sz="2600" dirty="0">
+              <a:rPr lang="en-US" sz="2400" dirty="0">
                 <a:solidFill>
-                  <a:srgbClr val="A7B0BD"/>
+                  <a:srgbClr val="CDD3DC"/>
                 </a:solidFill>
                 <a:latin typeface="Calibri" pitchFamily="34" charset="0"/>
                 <a:ea typeface="Calibri" pitchFamily="34" charset="-122"/>
                 <a:cs typeface="Calibri" pitchFamily="34" charset="-120"/>
               </a:rPr>
-              <a:t>Danach: Lektion 12</a:t>
+              <a:t>Gleich geht es weiter mit Lektion 12: Lebenslanges Lernen</a:t>
             </a:r>
-            <a:endParaRPr lang="en-US" sz="2600" dirty="0"/>
+            <a:endParaRPr lang="en-US" sz="2400" dirty="0"/>
+          </a:p>
+        </p:txBody>
+      </p:sp>
+      <p:sp>
+        <p:nvSpPr>
+          <p:cNvPr id="7" name="e33_4"/>
+          <p:cNvSpPr/>
+          <p:nvPr/>
+        </p:nvSpPr>
+        <p:spPr>
+          <a:xfrm>
+            <a:off x="2194560" y="4480560"/>
+            <a:ext cx="7799832" cy="1371600"/>
+          </a:xfrm>
+          <a:prstGeom prst="roundRect">
+            <a:avLst>
+              <a:gd name="adj" fmla="val 10667"/>
+            </a:avLst>
+          </a:prstGeom>
+          <a:solidFill>
+            <a:srgbClr val="07080B">
+              <a:alpha val="70000"/>
+            </a:srgbClr>
+          </a:solidFill>
+          <a:ln w="15875">
+            <a:solidFill>
+              <a:srgbClr val="FF7A1A"/>
+            </a:solidFill>
+            <a:prstDash val="solid"/>
+          </a:ln>
+        </p:spPr>
+      </p:sp>
+      <p:sp>
+        <p:nvSpPr>
+          <p:cNvPr id="8" name="e33_5"/>
+          <p:cNvSpPr txBox="1"/>
+          <p:nvPr/>
+        </p:nvSpPr>
+        <p:spPr>
+          <a:xfrm>
+            <a:off x="2194560" y="4617720"/>
+            <a:ext cx="7799832" cy="320040"/>
+          </a:xfrm>
+          <a:prstGeom prst="rect">
+            <a:avLst/>
+          </a:prstGeom>
+          <a:noFill/>
+          <a:ln/>
+        </p:spPr>
+        <p:txBody>
+          <a:bodyPr wrap="square" lIns="0" tIns="0" rIns="0" bIns="0" rtlCol="0" anchor="t"/>
+          <a:lstStyle/>
+          <a:p>
+            <a:pPr algn="ctr" indent="0" marL="0">
+              <a:buNone/>
+            </a:pPr>
+            <a:r>
+              <a:rPr lang="en-US" sz="1300" b="1" spc="500" kern="0" dirty="0">
+                <a:solidFill>
+                  <a:srgbClr val="FF7A1A"/>
+                </a:solidFill>
+                <a:latin typeface="Calibri" pitchFamily="34" charset="0"/>
+                <a:ea typeface="Calibri" pitchFamily="34" charset="-122"/>
+                <a:cs typeface="Calibri" pitchFamily="34" charset="-120"/>
+              </a:rPr>
+              <a:t>DENK MAL DRÜBER NACH</a:t>
+            </a:r>
+            <a:endParaRPr lang="en-US" sz="1300" dirty="0"/>
+          </a:p>
+        </p:txBody>
+      </p:sp>
+      <p:sp>
+        <p:nvSpPr>
+          <p:cNvPr id="9" name="e33_6"/>
+          <p:cNvSpPr txBox="1"/>
+          <p:nvPr/>
+        </p:nvSpPr>
+        <p:spPr>
+          <a:xfrm>
+            <a:off x="2194560" y="4983480"/>
+            <a:ext cx="7799832" cy="731520"/>
+          </a:xfrm>
+          <a:prstGeom prst="rect">
+            <a:avLst/>
+          </a:prstGeom>
+          <a:noFill/>
+          <a:ln/>
+        </p:spPr>
+        <p:txBody>
+          <a:bodyPr wrap="square" lIns="0" tIns="0" rIns="0" bIns="0" rtlCol="0" anchor="ctr"/>
+          <a:lstStyle/>
+          <a:p>
+            <a:pPr algn="ctr" indent="0" marL="0">
+              <a:buNone/>
+            </a:pPr>
+            <a:r>
+              <a:rPr lang="en-US" sz="3200" i="1" dirty="0">
+                <a:solidFill>
+                  <a:srgbClr val="F5F2EC"/>
+                </a:solidFill>
+                <a:latin typeface="Cambria" pitchFamily="34" charset="0"/>
+                <a:ea typeface="Cambria" pitchFamily="34" charset="-122"/>
+                <a:cs typeface="Cambria" pitchFamily="34" charset="-120"/>
+              </a:rPr>
+              <a:t>Wann hört man auf, Auto fahren zu lernen?</a:t>
+            </a:r>
+            <a:endParaRPr lang="en-US" sz="3200" dirty="0"/>
           </a:p>
         </p:txBody>
       </p:sp>
@@ -34609,6 +35529,175 @@
                       </p:childTnLst>
                     </p:cTn>
                   </p:par>
+                  <p:par>
+                    <p:cTn id="18" fill="hold">
+                      <p:stCondLst>
+                        <p:cond delay="indefinite"/>
+                      </p:stCondLst>
+                      <p:childTnLst>
+                        <p:par>
+                          <p:cTn id="19" fill="hold">
+                            <p:stCondLst>
+                              <p:cond delay="0"/>
+                            </p:stCondLst>
+                            <p:childTnLst>
+                              <p:par>
+                                <p:cTn id="20" presetID="42" presetClass="entr" presetSubtype="0" fill="hold" grpId="0" nodeType="clickEffect">
+                                  <p:stCondLst>
+                                    <p:cond delay="0"/>
+                                  </p:stCondLst>
+                                  <p:childTnLst>
+                                    <p:set>
+                                      <p:cBhvr>
+                                        <p:cTn id="21" dur="1" fill="hold">
+                                          <p:stCondLst>
+                                            <p:cond delay="0"/>
+                                          </p:stCondLst>
+                                        </p:cTn>
+                                        <p:tgtEl>
+                                          <p:spTgt spid="7"/>
+                                        </p:tgtEl>
+                                        <p:attrNameLst>
+                                          <p:attrName>style.visibility</p:attrName>
+                                        </p:attrNameLst>
+                                      </p:cBhvr>
+                                      <p:to>
+                                        <p:strVal val="visible"/>
+                                      </p:to>
+                                    </p:set>
+                                    <p:animEffect transition="in" filter="fade">
+                                      <p:cBhvr>
+                                        <p:cTn id="22" dur="700"/>
+                                        <p:tgtEl>
+                                          <p:spTgt spid="7"/>
+                                        </p:tgtEl>
+                                      </p:cBhvr>
+                                    </p:animEffect>
+                                    <p:anim calcmode="lin" valueType="num">
+                                      <p:cBhvr additive="base">
+                                        <p:cTn id="23" dur="700" fill="hold" decel="100000"/>
+                                        <p:tgtEl>
+                                          <p:spTgt spid="7"/>
+                                        </p:tgtEl>
+                                        <p:attrNameLst>
+                                          <p:attrName>ppt_x</p:attrName>
+                                        </p:attrNameLst>
+                                      </p:cBhvr>
+                                      <p:tavLst>
+                                        <p:tav tm="0">
+                                          <p:val>
+                                            <p:strVal val="#ppt_x"/>
+                                          </p:val>
+                                        </p:tav>
+                                        <p:tav tm="100000">
+                                          <p:val>
+                                            <p:strVal val="#ppt_x"/>
+                                          </p:val>
+                                        </p:tav>
+                                      </p:tavLst>
+                                    </p:anim>
+                                    <p:anim calcmode="lin" valueType="num">
+                                      <p:cBhvr additive="base">
+                                        <p:cTn id="24" dur="700" fill="hold" decel="100000"/>
+                                        <p:tgtEl>
+                                          <p:spTgt spid="7"/>
+                                        </p:tgtEl>
+                                        <p:attrNameLst>
+                                          <p:attrName>ppt_y</p:attrName>
+                                        </p:attrNameLst>
+                                      </p:cBhvr>
+                                      <p:tavLst>
+                                        <p:tav tm="0">
+                                          <p:val>
+                                            <p:strVal val="#ppt_y+.18"/>
+                                          </p:val>
+                                        </p:tav>
+                                        <p:tav tm="100000">
+                                          <p:val>
+                                            <p:strVal val="#ppt_y"/>
+                                          </p:val>
+                                        </p:tav>
+                                      </p:tavLst>
+                                    </p:anim>
+                                  </p:childTnLst>
+                                </p:cTn>
+                              </p:par>
+                              <p:par>
+                                <p:cTn id="25" presetID="10" presetClass="entr" presetSubtype="0" fill="hold" grpId="0" nodeType="withEffect">
+                                  <p:stCondLst>
+                                    <p:cond delay="0"/>
+                                  </p:stCondLst>
+                                  <p:childTnLst>
+                                    <p:set>
+                                      <p:cBhvr>
+                                        <p:cTn id="26" dur="1" fill="hold">
+                                          <p:stCondLst>
+                                            <p:cond delay="0"/>
+                                          </p:stCondLst>
+                                        </p:cTn>
+                                        <p:tgtEl>
+                                          <p:spTgt spid="8"/>
+                                        </p:tgtEl>
+                                        <p:attrNameLst>
+                                          <p:attrName>style.visibility</p:attrName>
+                                        </p:attrNameLst>
+                                      </p:cBhvr>
+                                      <p:to>
+                                        <p:strVal val="visible"/>
+                                      </p:to>
+                                    </p:set>
+                                    <p:animEffect transition="in" filter="fade">
+                                      <p:cBhvr>
+                                        <p:cTn id="27" dur="400"/>
+                                        <p:tgtEl>
+                                          <p:spTgt spid="8"/>
+                                        </p:tgtEl>
+                                      </p:cBhvr>
+                                    </p:animEffect>
+                                  </p:childTnLst>
+                                </p:cTn>
+                              </p:par>
+                              <p:par>
+                                <p:cTn id="28" presetID="10" presetClass="entr" presetSubtype="0" fill="hold" grpId="0" nodeType="withEffect">
+                                  <p:stCondLst>
+                                    <p:cond delay="0"/>
+                                  </p:stCondLst>
+                                  <p:childTnLst>
+                                    <p:set>
+                                      <p:cBhvr>
+                                        <p:cTn id="29" dur="1" fill="hold">
+                                          <p:stCondLst>
+                                            <p:cond delay="0"/>
+                                          </p:stCondLst>
+                                        </p:cTn>
+                                        <p:tgtEl>
+                                          <p:spTgt spid="9"/>
+                                        </p:tgtEl>
+                                        <p:attrNameLst>
+                                          <p:attrName>style.visibility</p:attrName>
+                                        </p:attrNameLst>
+                                      </p:cBhvr>
+                                      <p:to>
+                                        <p:strVal val="visible"/>
+                                      </p:to>
+                                    </p:set>
+                                    <p:animEffect transition="in" filter="fade">
+                                      <p:cBhvr>
+                                        <p:cTn id="30" dur="400"/>
+                                        <p:tgtEl>
+                                          <p:spTgt spid="9"/>
+                                        </p:tgtEl>
+                                      </p:cBhvr>
+                                    </p:animEffect>
+                                  </p:childTnLst>
+                                </p:cTn>
+                              </p:par>
+                            </p:childTnLst>
+                          </p:cTn>
+                        </p:par>
+                      </p:childTnLst>
+                    </p:cTn>
+                  </p:par>
                 </p:childTnLst>
               </p:cTn>
               <p:prevCondLst>
@@ -34633,6 +35722,9 @@
     <p:bldLst>
       <p:bldP spid="5" grpId="0" animBg="1"/>
       <p:bldP spid="6" grpId="0" animBg="1"/>
+      <p:bldP spid="7" grpId="0" animBg="1"/>
+      <p:bldP spid="8" grpId="0" animBg="1"/>
+      <p:bldP spid="9" grpId="0" animBg="1"/>
     </p:bldLst>
   </p:timing>
 </p:sld>
@@ -34969,7 +36061,7 @@
             <a:r>
               <a:rPr lang="en-US" sz="1700" dirty="0">
                 <a:solidFill>
-                  <a:srgbClr val="A7B0BD"/>
+                  <a:srgbClr val="CDD3DC"/>
                 </a:solidFill>
                 <a:latin typeface="Calibri" pitchFamily="34" charset="0"/>
                 <a:ea typeface="Calibri" pitchFamily="34" charset="-122"/>
@@ -35144,7 +36236,7 @@
             <a:r>
               <a:rPr lang="en-US" sz="1700" dirty="0">
                 <a:solidFill>
-                  <a:srgbClr val="A7B0BD"/>
+                  <a:srgbClr val="CDD3DC"/>
                 </a:solidFill>
                 <a:latin typeface="Calibri" pitchFamily="34" charset="0"/>
                 <a:ea typeface="Calibri" pitchFamily="34" charset="-122"/>
@@ -35319,7 +36411,7 @@
             <a:r>
               <a:rPr lang="en-US" sz="1700" dirty="0">
                 <a:solidFill>
-                  <a:srgbClr val="A7B0BD"/>
+                  <a:srgbClr val="CDD3DC"/>
                 </a:solidFill>
                 <a:latin typeface="Calibri" pitchFamily="34" charset="0"/>
                 <a:ea typeface="Calibri" pitchFamily="34" charset="-122"/>
@@ -37077,8 +38169,8 @@
         </p:nvSpPr>
         <p:spPr>
           <a:xfrm>
-            <a:off x="760324" y="4754880"/>
-            <a:ext cx="1783080" cy="1325880"/>
+            <a:off x="714604" y="4709160"/>
+            <a:ext cx="1874520" cy="1417320"/>
           </a:xfrm>
           <a:prstGeom prst="rect">
             <a:avLst/>
@@ -37094,9 +38186,9 @@
               <a:buNone/>
             </a:pPr>
             <a:r>
-              <a:rPr lang="en-US" sz="1500" dirty="0">
+              <a:rPr lang="en-US" sz="1700" dirty="0">
                 <a:solidFill>
-                  <a:srgbClr val="A7B0BD"/>
+                  <a:srgbClr val="CDD3DC"/>
                 </a:solidFill>
                 <a:latin typeface="Calibri" pitchFamily="34" charset="0"/>
                 <a:ea typeface="Calibri" pitchFamily="34" charset="-122"/>
@@ -37104,7 +38196,7 @@
               </a:rPr>
               <a:t>Nur Halten oder Parken. Nie zum Fahren.</a:t>
             </a:r>
-            <a:endParaRPr lang="en-US" sz="1500" dirty="0"/>
+            <a:endParaRPr lang="en-US" sz="1700" dirty="0"/>
           </a:p>
         </p:txBody>
       </p:sp>
@@ -37206,8 +38298,8 @@
         </p:nvSpPr>
         <p:spPr>
           <a:xfrm>
-            <a:off x="2982316" y="4754880"/>
-            <a:ext cx="1783080" cy="1325880"/>
+            <a:off x="2936596" y="4709160"/>
+            <a:ext cx="1874520" cy="1417320"/>
           </a:xfrm>
           <a:prstGeom prst="rect">
             <a:avLst/>
@@ -37223,17 +38315,17 @@
               <a:buNone/>
             </a:pPr>
             <a:r>
-              <a:rPr lang="en-US" sz="1500" dirty="0">
+              <a:rPr lang="en-US" sz="1700" dirty="0">
                 <a:solidFill>
-                  <a:srgbClr val="A7B0BD"/>
+                  <a:srgbClr val="CDD3DC"/>
                 </a:solidFill>
                 <a:latin typeface="Calibri" pitchFamily="34" charset="0"/>
                 <a:ea typeface="Calibri" pitchFamily="34" charset="-122"/>
                 <a:cs typeface="Calibri" pitchFamily="34" charset="-120"/>
               </a:rPr>
-              <a:t>Dämmerung, Dunkelheit, schlechte Sicht, Tunnel</a:t>
+              <a:t>Dunkel, schlechte Sicht, Tunnel</a:t>
             </a:r>
-            <a:endParaRPr lang="en-US" sz="1500" dirty="0"/>
+            <a:endParaRPr lang="en-US" sz="1700" dirty="0"/>
           </a:p>
         </p:txBody>
       </p:sp>
@@ -37335,8 +38427,8 @@
         </p:nvSpPr>
         <p:spPr>
           <a:xfrm>
-            <a:off x="5204308" y="4754880"/>
-            <a:ext cx="1783080" cy="1325880"/>
+            <a:off x="5158588" y="4709160"/>
+            <a:ext cx="1874520" cy="1417320"/>
           </a:xfrm>
           <a:prstGeom prst="rect">
             <a:avLst/>
@@ -37352,17 +38444,17 @@
               <a:buNone/>
             </a:pPr>
             <a:r>
-              <a:rPr lang="en-US" sz="1500" dirty="0">
+              <a:rPr lang="en-US" sz="1700" dirty="0">
                 <a:solidFill>
-                  <a:srgbClr val="A7B0BD"/>
+                  <a:srgbClr val="CDD3DC"/>
                 </a:solidFill>
                 <a:latin typeface="Calibri" pitchFamily="34" charset="0"/>
                 <a:ea typeface="Calibri" pitchFamily="34" charset="-122"/>
                 <a:cs typeface="Calibri" pitchFamily="34" charset="-120"/>
               </a:rPr>
-              <a:t>Dunkle Straße ohne Beleuchtung, niemand wird geblendet</a:t>
+              <a:t>Unbeleuchtete Straße, niemand wird geblendet</a:t>
             </a:r>
-            <a:endParaRPr lang="en-US" sz="1500" dirty="0"/>
+            <a:endParaRPr lang="en-US" sz="1700" dirty="0"/>
           </a:p>
         </p:txBody>
       </p:sp>
@@ -37464,8 +38556,8 @@
         </p:nvSpPr>
         <p:spPr>
           <a:xfrm>
-            <a:off x="7426300" y="4754880"/>
-            <a:ext cx="1783080" cy="1325880"/>
+            <a:off x="7380580" y="4709160"/>
+            <a:ext cx="1874520" cy="1417320"/>
           </a:xfrm>
           <a:prstGeom prst="rect">
             <a:avLst/>
@@ -37481,17 +38573,17 @@
               <a:buNone/>
             </a:pPr>
             <a:r>
-              <a:rPr lang="en-US" sz="1500" dirty="0">
+              <a:rPr lang="en-US" sz="1700" dirty="0">
                 <a:solidFill>
-                  <a:srgbClr val="A7B0BD"/>
+                  <a:srgbClr val="CDD3DC"/>
                 </a:solidFill>
                 <a:latin typeface="Calibri" pitchFamily="34" charset="0"/>
                 <a:ea typeface="Calibri" pitchFamily="34" charset="-122"/>
                 <a:cs typeface="Calibri" pitchFamily="34" charset="-120"/>
               </a:rPr>
-              <a:t>Nebel, Schnee oder Regen mit starker Sichtbehinderung</a:t>
+              <a:t>Nebel, Schnee, Regen: starke Sichtbehinderung</a:t>
             </a:r>
-            <a:endParaRPr lang="en-US" sz="1500" dirty="0"/>
+            <a:endParaRPr lang="en-US" sz="1700" dirty="0"/>
           </a:p>
         </p:txBody>
       </p:sp>
@@ -37593,8 +38685,8 @@
         </p:nvSpPr>
         <p:spPr>
           <a:xfrm>
-            <a:off x="9648292" y="4754880"/>
-            <a:ext cx="1783080" cy="1325880"/>
+            <a:off x="9602572" y="4709160"/>
+            <a:ext cx="1874520" cy="1417320"/>
           </a:xfrm>
           <a:prstGeom prst="rect">
             <a:avLst/>
@@ -37610,9 +38702,9 @@
               <a:buNone/>
             </a:pPr>
             <a:r>
-              <a:rPr lang="en-US" sz="1500" dirty="0">
+              <a:rPr lang="en-US" sz="1700" dirty="0">
                 <a:solidFill>
-                  <a:srgbClr val="A7B0BD"/>
+                  <a:srgbClr val="CDD3DC"/>
                 </a:solidFill>
                 <a:latin typeface="Calibri" pitchFamily="34" charset="0"/>
                 <a:ea typeface="Calibri" pitchFamily="34" charset="-122"/>
@@ -37620,7 +38712,7 @@
               </a:rPr>
               <a:t>Nur bei Nebel und Sicht unter 50 m</a:t>
             </a:r>
-            <a:endParaRPr lang="en-US" sz="1500" dirty="0"/>
+            <a:endParaRPr lang="en-US" sz="1700" dirty="0"/>
           </a:p>
         </p:txBody>
       </p:sp>
@@ -39223,8 +40315,8 @@
         </p:nvSpPr>
         <p:spPr>
           <a:xfrm>
-            <a:off x="2148840" y="5394960"/>
-            <a:ext cx="1554480" cy="457200"/>
+            <a:off x="2011680" y="5394960"/>
+            <a:ext cx="1828800" cy="457200"/>
           </a:xfrm>
           <a:prstGeom prst="roundRect">
             <a:avLst>
@@ -39248,7 +40340,7 @@
               <a:buNone/>
             </a:pPr>
             <a:r>
-              <a:rPr lang="en-US" sz="1500" b="1" dirty="0">
+              <a:rPr lang="en-US" sz="1800" b="1" dirty="0">
                 <a:solidFill>
                   <a:srgbClr val="F5F2EC"/>
                 </a:solidFill>
@@ -39258,7 +40350,7 @@
               </a:rPr>
               <a:t>dunkel: 25 m</a:t>
             </a:r>
-            <a:endParaRPr lang="en-US" sz="1500" dirty="0"/>
+            <a:endParaRPr lang="en-US" sz="1800" dirty="0"/>
           </a:p>
         </p:txBody>
       </p:sp>
@@ -39294,8 +40386,8 @@
         </p:nvSpPr>
         <p:spPr>
           <a:xfrm>
-            <a:off x="3337560" y="5943600"/>
-            <a:ext cx="1371600" cy="457200"/>
+            <a:off x="3246120" y="5989320"/>
+            <a:ext cx="1554480" cy="457200"/>
           </a:xfrm>
           <a:prstGeom prst="roundRect">
             <a:avLst>
@@ -39319,7 +40411,7 @@
               <a:buNone/>
             </a:pPr>
             <a:r>
-              <a:rPr lang="en-US" sz="1500" b="1" dirty="0">
+              <a:rPr lang="en-US" sz="1800" b="1" dirty="0">
                 <a:solidFill>
                   <a:srgbClr val="F5F2EC"/>
                 </a:solidFill>
@@ -39329,7 +40421,7 @@
               </a:rPr>
               <a:t>hell: 40 m</a:t>
             </a:r>
-            <a:endParaRPr lang="en-US" sz="1500" dirty="0"/>
+            <a:endParaRPr lang="en-US" sz="1800" dirty="0"/>
           </a:p>
         </p:txBody>
       </p:sp>
@@ -39365,8 +40457,8 @@
         </p:nvSpPr>
         <p:spPr>
           <a:xfrm>
-            <a:off x="9326880" y="5394960"/>
-            <a:ext cx="2148840" cy="457200"/>
+            <a:off x="8915400" y="5394960"/>
+            <a:ext cx="2560320" cy="457200"/>
           </a:xfrm>
           <a:prstGeom prst="roundRect">
             <a:avLst>
@@ -39390,7 +40482,7 @@
               <a:buNone/>
             </a:pPr>
             <a:r>
-              <a:rPr lang="en-US" sz="1500" b="1" dirty="0">
+              <a:rPr lang="en-US" sz="1800" b="1" dirty="0">
                 <a:solidFill>
                   <a:srgbClr val="F7FF9A"/>
                 </a:solidFill>
@@ -39400,7 +40492,7 @@
               </a:rPr>
               <a:t>Reflektoren: 140 m</a:t>
             </a:r>
-            <a:endParaRPr lang="en-US" sz="1500" dirty="0"/>
+            <a:endParaRPr lang="en-US" sz="1800" dirty="0"/>
           </a:p>
         </p:txBody>
       </p:sp>
